--- a/Fase 2/Evidencias Grupales/06_Fecha_17.10.25 Avance.pptx
+++ b/Fase 2/Evidencias Grupales/06_Fecha_17.10.25 Avance.pptx
@@ -1,42 +1,42 @@
 
 <file path=ppt/presentation.xml><?xml version="1.0" encoding="utf-8"?>
-<p:presentation xmlns:a="http://schemas.openxmlformats.org/drawingml/2006/main" xmlns:r="http://schemas.openxmlformats.org/officeDocument/2006/relationships" xmlns:p="http://schemas.openxmlformats.org/presentationml/2006/main" saveSubsetFonts="1" embedTrueTypeFonts="true">
+<p:presentation xmlns:a="http://schemas.openxmlformats.org/drawingml/2006/main" xmlns:r="http://schemas.openxmlformats.org/officeDocument/2006/relationships" xmlns:p="http://schemas.openxmlformats.org/presentationml/2006/main" embedTrueTypeFonts="1" saveSubsetFonts="1">
   <p:sldMasterIdLst>
     <p:sldMasterId id="2147483648" r:id="rId1"/>
   </p:sldMasterIdLst>
   <p:sldIdLst>
-    <p:sldId id="256" r:id="rId6"/>
-    <p:sldId id="257" r:id="rId7"/>
-    <p:sldId id="258" r:id="rId8"/>
-    <p:sldId id="259" r:id="rId9"/>
-    <p:sldId id="260" r:id="rId10"/>
-    <p:sldId id="261" r:id="rId11"/>
-    <p:sldId id="262" r:id="rId12"/>
-    <p:sldId id="263" r:id="rId13"/>
-    <p:sldId id="264" r:id="rId14"/>
+    <p:sldId id="256" r:id="rId2"/>
+    <p:sldId id="257" r:id="rId3"/>
+    <p:sldId id="258" r:id="rId4"/>
+    <p:sldId id="259" r:id="rId5"/>
+    <p:sldId id="260" r:id="rId6"/>
+    <p:sldId id="261" r:id="rId7"/>
+    <p:sldId id="262" r:id="rId8"/>
+    <p:sldId id="263" r:id="rId9"/>
+    <p:sldId id="264" r:id="rId10"/>
   </p:sldIdLst>
   <p:sldSz cx="18288000" cy="10287000"/>
   <p:notesSz cx="6858000" cy="9144000"/>
   <p:embeddedFontLst>
     <p:embeddedFont>
-      <p:font typeface="Canva Sans Bold" charset="1" panose="020B0803030501040103"/>
-      <p:regular r:id="rId15"/>
+      <p:font typeface="Canva Sans" panose="020B0604020202020204" charset="0"/>
+      <p:regular r:id="rId11"/>
     </p:embeddedFont>
     <p:embeddedFont>
-      <p:font typeface="Canva Sans Medium" charset="1" panose="020B0603030501040103"/>
-      <p:regular r:id="rId16"/>
+      <p:font typeface="Canva Sans Bold" panose="020B0604020202020204" charset="0"/>
+      <p:regular r:id="rId12"/>
     </p:embeddedFont>
     <p:embeddedFont>
-      <p:font typeface="Montaser Arabic" charset="1" panose="00000500000000000000"/>
-      <p:regular r:id="rId17"/>
+      <p:font typeface="Canva Sans Bold Italics" panose="020B0604020202020204" charset="0"/>
+      <p:regular r:id="rId13"/>
     </p:embeddedFont>
     <p:embeddedFont>
-      <p:font typeface="Canva Sans" charset="1" panose="020B0503030501040103"/>
-      <p:regular r:id="rId18"/>
+      <p:font typeface="Canva Sans Medium" panose="020B0604020202020204" charset="0"/>
+      <p:regular r:id="rId14"/>
     </p:embeddedFont>
     <p:embeddedFont>
-      <p:font typeface="Canva Sans Bold Italics" charset="1" panose="020B0803030501040103"/>
-      <p:regular r:id="rId19"/>
+      <p:font typeface="Montaser Arabic" panose="020B0604020202020204" charset="-78"/>
+      <p:regular r:id="rId15"/>
     </p:embeddedFont>
   </p:embeddedFontLst>
   <p:defaultTextStyle>
@@ -134,6 +134,22 @@
       </a:defRPr>
     </a:lvl9pPr>
   </p:defaultTextStyle>
+  <p:extLst>
+    <p:ext uri="{EFAFB233-063F-42B5-8137-9DF3F51BA10A}">
+      <p15:sldGuideLst xmlns:p15="http://schemas.microsoft.com/office/powerpoint/2012/main">
+        <p15:guide id="1" orient="horz" pos="2160">
+          <p15:clr>
+            <a:srgbClr val="A4A3A4"/>
+          </p15:clr>
+        </p15:guide>
+        <p15:guide id="2" pos="2880">
+          <p15:clr>
+            <a:srgbClr val="A4A3A4"/>
+          </p15:clr>
+        </p15:guide>
+      </p15:sldGuideLst>
+    </p:ext>
+  </p:extLst>
 </p:presentation>
 </file>
 
@@ -175,10 +191,9 @@
           <a:lstStyle/>
           <a:p>
             <a:r>
-              <a:rPr lang="en-US" smtClean="0"/>
+              <a:rPr lang="en-US"/>
               <a:t>Click to edit Master title style</a:t>
             </a:r>
-            <a:endParaRPr lang="en-US"/>
           </a:p>
         </p:txBody>
       </p:sp>
@@ -294,10 +309,9 @@
           </a:lstStyle>
           <a:p>
             <a:r>
-              <a:rPr lang="en-US" smtClean="0"/>
+              <a:rPr lang="en-US"/>
               <a:t>Click to edit Master subtitle style</a:t>
             </a:r>
-            <a:endParaRPr lang="en-US"/>
           </a:p>
         </p:txBody>
       </p:sp>
@@ -319,7 +333,7 @@
             <a:fld id="{1D8BD707-D9CF-40AE-B4C6-C98DA3205C09}" type="datetimeFigureOut">
               <a:rPr lang="en-US" smtClean="0"/>
               <a:pPr/>
-              <a:t>8/1/2011</a:t>
+              <a:t>10/17/2025</a:t>
             </a:fld>
             <a:endParaRPr lang="en-US"/>
           </a:p>
@@ -362,7 +376,7 @@
             <a:fld id="{B6F15528-21DE-4FAA-801E-634DDDAF4B2B}" type="slidenum">
               <a:rPr lang="en-US" smtClean="0"/>
               <a:pPr/>
-              <a:t>‹#›</a:t>
+              <a:t>‹Nº›</a:t>
             </a:fld>
             <a:endParaRPr lang="en-US"/>
           </a:p>
@@ -409,10 +423,9 @@
           <a:lstStyle/>
           <a:p>
             <a:r>
-              <a:rPr lang="en-US" smtClean="0"/>
+              <a:rPr lang="en-US"/>
               <a:t>Click to edit Master title style</a:t>
             </a:r>
-            <a:endParaRPr lang="en-US"/>
           </a:p>
         </p:txBody>
       </p:sp>
@@ -433,38 +446,37 @@
           <a:p>
             <a:pPr lvl="0"/>
             <a:r>
-              <a:rPr lang="en-US" smtClean="0"/>
+              <a:rPr lang="en-US"/>
               <a:t>Click to edit Master text styles</a:t>
             </a:r>
           </a:p>
           <a:p>
             <a:pPr lvl="1"/>
             <a:r>
-              <a:rPr lang="en-US" smtClean="0"/>
+              <a:rPr lang="en-US"/>
               <a:t>Second level</a:t>
             </a:r>
           </a:p>
           <a:p>
             <a:pPr lvl="2"/>
             <a:r>
-              <a:rPr lang="en-US" smtClean="0"/>
+              <a:rPr lang="en-US"/>
               <a:t>Third level</a:t>
             </a:r>
           </a:p>
           <a:p>
             <a:pPr lvl="3"/>
             <a:r>
-              <a:rPr lang="en-US" smtClean="0"/>
+              <a:rPr lang="en-US"/>
               <a:t>Fourth level</a:t>
             </a:r>
           </a:p>
           <a:p>
             <a:pPr lvl="4"/>
             <a:r>
-              <a:rPr lang="en-US" smtClean="0"/>
+              <a:rPr lang="en-US"/>
               <a:t>Fifth level</a:t>
             </a:r>
-            <a:endParaRPr lang="en-US"/>
           </a:p>
         </p:txBody>
       </p:sp>
@@ -486,7 +498,7 @@
             <a:fld id="{1D8BD707-D9CF-40AE-B4C6-C98DA3205C09}" type="datetimeFigureOut">
               <a:rPr lang="en-US" smtClean="0"/>
               <a:pPr/>
-              <a:t>8/1/2011</a:t>
+              <a:t>10/17/2025</a:t>
             </a:fld>
             <a:endParaRPr lang="en-US"/>
           </a:p>
@@ -529,7 +541,7 @@
             <a:fld id="{B6F15528-21DE-4FAA-801E-634DDDAF4B2B}" type="slidenum">
               <a:rPr lang="en-US" smtClean="0"/>
               <a:pPr/>
-              <a:t>‹#›</a:t>
+              <a:t>‹Nº›</a:t>
             </a:fld>
             <a:endParaRPr lang="en-US"/>
           </a:p>
@@ -581,10 +593,9 @@
           <a:lstStyle/>
           <a:p>
             <a:r>
-              <a:rPr lang="en-US" smtClean="0"/>
+              <a:rPr lang="en-US"/>
               <a:t>Click to edit Master title style</a:t>
             </a:r>
-            <a:endParaRPr lang="en-US"/>
           </a:p>
         </p:txBody>
       </p:sp>
@@ -610,38 +621,37 @@
           <a:p>
             <a:pPr lvl="0"/>
             <a:r>
-              <a:rPr lang="en-US" smtClean="0"/>
+              <a:rPr lang="en-US"/>
               <a:t>Click to edit Master text styles</a:t>
             </a:r>
           </a:p>
           <a:p>
             <a:pPr lvl="1"/>
             <a:r>
-              <a:rPr lang="en-US" smtClean="0"/>
+              <a:rPr lang="en-US"/>
               <a:t>Second level</a:t>
             </a:r>
           </a:p>
           <a:p>
             <a:pPr lvl="2"/>
             <a:r>
-              <a:rPr lang="en-US" smtClean="0"/>
+              <a:rPr lang="en-US"/>
               <a:t>Third level</a:t>
             </a:r>
           </a:p>
           <a:p>
             <a:pPr lvl="3"/>
             <a:r>
-              <a:rPr lang="en-US" smtClean="0"/>
+              <a:rPr lang="en-US"/>
               <a:t>Fourth level</a:t>
             </a:r>
           </a:p>
           <a:p>
             <a:pPr lvl="4"/>
             <a:r>
-              <a:rPr lang="en-US" smtClean="0"/>
+              <a:rPr lang="en-US"/>
               <a:t>Fifth level</a:t>
             </a:r>
-            <a:endParaRPr lang="en-US"/>
           </a:p>
         </p:txBody>
       </p:sp>
@@ -663,7 +673,7 @@
             <a:fld id="{1D8BD707-D9CF-40AE-B4C6-C98DA3205C09}" type="datetimeFigureOut">
               <a:rPr lang="en-US" smtClean="0"/>
               <a:pPr/>
-              <a:t>8/1/2011</a:t>
+              <a:t>10/17/2025</a:t>
             </a:fld>
             <a:endParaRPr lang="en-US"/>
           </a:p>
@@ -706,7 +716,7 @@
             <a:fld id="{B6F15528-21DE-4FAA-801E-634DDDAF4B2B}" type="slidenum">
               <a:rPr lang="en-US" smtClean="0"/>
               <a:pPr/>
-              <a:t>‹#›</a:t>
+              <a:t>‹Nº›</a:t>
             </a:fld>
             <a:endParaRPr lang="en-US"/>
           </a:p>
@@ -753,10 +763,9 @@
           <a:lstStyle/>
           <a:p>
             <a:r>
-              <a:rPr lang="en-US" smtClean="0"/>
+              <a:rPr lang="en-US"/>
               <a:t>Click to edit Master title style</a:t>
             </a:r>
-            <a:endParaRPr lang="en-US"/>
           </a:p>
         </p:txBody>
       </p:sp>
@@ -777,38 +786,37 @@
           <a:p>
             <a:pPr lvl="0"/>
             <a:r>
-              <a:rPr lang="en-US" smtClean="0"/>
+              <a:rPr lang="en-US"/>
               <a:t>Click to edit Master text styles</a:t>
             </a:r>
           </a:p>
           <a:p>
             <a:pPr lvl="1"/>
             <a:r>
-              <a:rPr lang="en-US" smtClean="0"/>
+              <a:rPr lang="en-US"/>
               <a:t>Second level</a:t>
             </a:r>
           </a:p>
           <a:p>
             <a:pPr lvl="2"/>
             <a:r>
-              <a:rPr lang="en-US" smtClean="0"/>
+              <a:rPr lang="en-US"/>
               <a:t>Third level</a:t>
             </a:r>
           </a:p>
           <a:p>
             <a:pPr lvl="3"/>
             <a:r>
-              <a:rPr lang="en-US" smtClean="0"/>
+              <a:rPr lang="en-US"/>
               <a:t>Fourth level</a:t>
             </a:r>
           </a:p>
           <a:p>
             <a:pPr lvl="4"/>
             <a:r>
-              <a:rPr lang="en-US" smtClean="0"/>
+              <a:rPr lang="en-US"/>
               <a:t>Fifth level</a:t>
             </a:r>
-            <a:endParaRPr lang="en-US"/>
           </a:p>
         </p:txBody>
       </p:sp>
@@ -830,7 +838,7 @@
             <a:fld id="{1D8BD707-D9CF-40AE-B4C6-C98DA3205C09}" type="datetimeFigureOut">
               <a:rPr lang="en-US" smtClean="0"/>
               <a:pPr/>
-              <a:t>8/1/2011</a:t>
+              <a:t>10/17/2025</a:t>
             </a:fld>
             <a:endParaRPr lang="en-US"/>
           </a:p>
@@ -873,7 +881,7 @@
             <a:fld id="{B6F15528-21DE-4FAA-801E-634DDDAF4B2B}" type="slidenum">
               <a:rPr lang="en-US" smtClean="0"/>
               <a:pPr/>
-              <a:t>‹#›</a:t>
+              <a:t>‹Nº›</a:t>
             </a:fld>
             <a:endParaRPr lang="en-US"/>
           </a:p>
@@ -929,10 +937,9 @@
           </a:lstStyle>
           <a:p>
             <a:r>
-              <a:rPr lang="en-US" smtClean="0"/>
+              <a:rPr lang="en-US"/>
               <a:t>Click to edit Master title style</a:t>
             </a:r>
-            <a:endParaRPr lang="en-US"/>
           </a:p>
         </p:txBody>
       </p:sp>
@@ -1049,7 +1056,7 @@
           <a:p>
             <a:pPr lvl="0"/>
             <a:r>
-              <a:rPr lang="en-US" smtClean="0"/>
+              <a:rPr lang="en-US"/>
               <a:t>Click to edit Master text styles</a:t>
             </a:r>
           </a:p>
@@ -1073,7 +1080,7 @@
             <a:fld id="{1D8BD707-D9CF-40AE-B4C6-C98DA3205C09}" type="datetimeFigureOut">
               <a:rPr lang="en-US" smtClean="0"/>
               <a:pPr/>
-              <a:t>8/1/2011</a:t>
+              <a:t>10/17/2025</a:t>
             </a:fld>
             <a:endParaRPr lang="en-US"/>
           </a:p>
@@ -1116,7 +1123,7 @@
             <a:fld id="{B6F15528-21DE-4FAA-801E-634DDDAF4B2B}" type="slidenum">
               <a:rPr lang="en-US" smtClean="0"/>
               <a:pPr/>
-              <a:t>‹#›</a:t>
+              <a:t>‹Nº›</a:t>
             </a:fld>
             <a:endParaRPr lang="en-US"/>
           </a:p>
@@ -1163,10 +1170,9 @@
           <a:lstStyle/>
           <a:p>
             <a:r>
-              <a:rPr lang="en-US" smtClean="0"/>
+              <a:rPr lang="en-US"/>
               <a:t>Click to edit Master title style</a:t>
             </a:r>
-            <a:endParaRPr lang="en-US"/>
           </a:p>
         </p:txBody>
       </p:sp>
@@ -1220,38 +1226,37 @@
           <a:p>
             <a:pPr lvl="0"/>
             <a:r>
-              <a:rPr lang="en-US" smtClean="0"/>
+              <a:rPr lang="en-US"/>
               <a:t>Click to edit Master text styles</a:t>
             </a:r>
           </a:p>
           <a:p>
             <a:pPr lvl="1"/>
             <a:r>
-              <a:rPr lang="en-US" smtClean="0"/>
+              <a:rPr lang="en-US"/>
               <a:t>Second level</a:t>
             </a:r>
           </a:p>
           <a:p>
             <a:pPr lvl="2"/>
             <a:r>
-              <a:rPr lang="en-US" smtClean="0"/>
+              <a:rPr lang="en-US"/>
               <a:t>Third level</a:t>
             </a:r>
           </a:p>
           <a:p>
             <a:pPr lvl="3"/>
             <a:r>
-              <a:rPr lang="en-US" smtClean="0"/>
+              <a:rPr lang="en-US"/>
               <a:t>Fourth level</a:t>
             </a:r>
           </a:p>
           <a:p>
             <a:pPr lvl="4"/>
             <a:r>
-              <a:rPr lang="en-US" smtClean="0"/>
+              <a:rPr lang="en-US"/>
               <a:t>Fifth level</a:t>
             </a:r>
-            <a:endParaRPr lang="en-US"/>
           </a:p>
         </p:txBody>
       </p:sp>
@@ -1305,38 +1310,37 @@
           <a:p>
             <a:pPr lvl="0"/>
             <a:r>
-              <a:rPr lang="en-US" smtClean="0"/>
+              <a:rPr lang="en-US"/>
               <a:t>Click to edit Master text styles</a:t>
             </a:r>
           </a:p>
           <a:p>
             <a:pPr lvl="1"/>
             <a:r>
-              <a:rPr lang="en-US" smtClean="0"/>
+              <a:rPr lang="en-US"/>
               <a:t>Second level</a:t>
             </a:r>
           </a:p>
           <a:p>
             <a:pPr lvl="2"/>
             <a:r>
-              <a:rPr lang="en-US" smtClean="0"/>
+              <a:rPr lang="en-US"/>
               <a:t>Third level</a:t>
             </a:r>
           </a:p>
           <a:p>
             <a:pPr lvl="3"/>
             <a:r>
-              <a:rPr lang="en-US" smtClean="0"/>
+              <a:rPr lang="en-US"/>
               <a:t>Fourth level</a:t>
             </a:r>
           </a:p>
           <a:p>
             <a:pPr lvl="4"/>
             <a:r>
-              <a:rPr lang="en-US" smtClean="0"/>
+              <a:rPr lang="en-US"/>
               <a:t>Fifth level</a:t>
             </a:r>
-            <a:endParaRPr lang="en-US"/>
           </a:p>
         </p:txBody>
       </p:sp>
@@ -1358,7 +1362,7 @@
             <a:fld id="{1D8BD707-D9CF-40AE-B4C6-C98DA3205C09}" type="datetimeFigureOut">
               <a:rPr lang="en-US" smtClean="0"/>
               <a:pPr/>
-              <a:t>8/1/2011</a:t>
+              <a:t>10/17/2025</a:t>
             </a:fld>
             <a:endParaRPr lang="en-US"/>
           </a:p>
@@ -1401,7 +1405,7 @@
             <a:fld id="{B6F15528-21DE-4FAA-801E-634DDDAF4B2B}" type="slidenum">
               <a:rPr lang="en-US" smtClean="0"/>
               <a:pPr/>
-              <a:t>‹#›</a:t>
+              <a:t>‹Nº›</a:t>
             </a:fld>
             <a:endParaRPr lang="en-US"/>
           </a:p>
@@ -1452,10 +1456,9 @@
           </a:lstStyle>
           <a:p>
             <a:r>
-              <a:rPr lang="en-US" smtClean="0"/>
+              <a:rPr lang="en-US"/>
               <a:t>Click to edit Master title style</a:t>
             </a:r>
-            <a:endParaRPr lang="en-US"/>
           </a:p>
         </p:txBody>
       </p:sp>
@@ -1518,7 +1521,7 @@
           <a:p>
             <a:pPr lvl="0"/>
             <a:r>
-              <a:rPr lang="en-US" smtClean="0"/>
+              <a:rPr lang="en-US"/>
               <a:t>Click to edit Master text styles</a:t>
             </a:r>
           </a:p>
@@ -1574,38 +1577,37 @@
           <a:p>
             <a:pPr lvl="0"/>
             <a:r>
-              <a:rPr lang="en-US" smtClean="0"/>
+              <a:rPr lang="en-US"/>
               <a:t>Click to edit Master text styles</a:t>
             </a:r>
           </a:p>
           <a:p>
             <a:pPr lvl="1"/>
             <a:r>
-              <a:rPr lang="en-US" smtClean="0"/>
+              <a:rPr lang="en-US"/>
               <a:t>Second level</a:t>
             </a:r>
           </a:p>
           <a:p>
             <a:pPr lvl="2"/>
             <a:r>
-              <a:rPr lang="en-US" smtClean="0"/>
+              <a:rPr lang="en-US"/>
               <a:t>Third level</a:t>
             </a:r>
           </a:p>
           <a:p>
             <a:pPr lvl="3"/>
             <a:r>
-              <a:rPr lang="en-US" smtClean="0"/>
+              <a:rPr lang="en-US"/>
               <a:t>Fourth level</a:t>
             </a:r>
           </a:p>
           <a:p>
             <a:pPr lvl="4"/>
             <a:r>
-              <a:rPr lang="en-US" smtClean="0"/>
+              <a:rPr lang="en-US"/>
               <a:t>Fifth level</a:t>
             </a:r>
-            <a:endParaRPr lang="en-US"/>
           </a:p>
         </p:txBody>
       </p:sp>
@@ -1668,7 +1670,7 @@
           <a:p>
             <a:pPr lvl="0"/>
             <a:r>
-              <a:rPr lang="en-US" smtClean="0"/>
+              <a:rPr lang="en-US"/>
               <a:t>Click to edit Master text styles</a:t>
             </a:r>
           </a:p>
@@ -1724,38 +1726,37 @@
           <a:p>
             <a:pPr lvl="0"/>
             <a:r>
-              <a:rPr lang="en-US" smtClean="0"/>
+              <a:rPr lang="en-US"/>
               <a:t>Click to edit Master text styles</a:t>
             </a:r>
           </a:p>
           <a:p>
             <a:pPr lvl="1"/>
             <a:r>
-              <a:rPr lang="en-US" smtClean="0"/>
+              <a:rPr lang="en-US"/>
               <a:t>Second level</a:t>
             </a:r>
           </a:p>
           <a:p>
             <a:pPr lvl="2"/>
             <a:r>
-              <a:rPr lang="en-US" smtClean="0"/>
+              <a:rPr lang="en-US"/>
               <a:t>Third level</a:t>
             </a:r>
           </a:p>
           <a:p>
             <a:pPr lvl="3"/>
             <a:r>
-              <a:rPr lang="en-US" smtClean="0"/>
+              <a:rPr lang="en-US"/>
               <a:t>Fourth level</a:t>
             </a:r>
           </a:p>
           <a:p>
             <a:pPr lvl="4"/>
             <a:r>
-              <a:rPr lang="en-US" smtClean="0"/>
+              <a:rPr lang="en-US"/>
               <a:t>Fifth level</a:t>
             </a:r>
-            <a:endParaRPr lang="en-US"/>
           </a:p>
         </p:txBody>
       </p:sp>
@@ -1777,7 +1778,7 @@
             <a:fld id="{1D8BD707-D9CF-40AE-B4C6-C98DA3205C09}" type="datetimeFigureOut">
               <a:rPr lang="en-US" smtClean="0"/>
               <a:pPr/>
-              <a:t>8/1/2011</a:t>
+              <a:t>10/17/2025</a:t>
             </a:fld>
             <a:endParaRPr lang="en-US"/>
           </a:p>
@@ -1820,7 +1821,7 @@
             <a:fld id="{B6F15528-21DE-4FAA-801E-634DDDAF4B2B}" type="slidenum">
               <a:rPr lang="en-US" smtClean="0"/>
               <a:pPr/>
-              <a:t>‹#›</a:t>
+              <a:t>‹Nº›</a:t>
             </a:fld>
             <a:endParaRPr lang="en-US"/>
           </a:p>
@@ -1867,10 +1868,9 @@
           <a:lstStyle/>
           <a:p>
             <a:r>
-              <a:rPr lang="en-US" smtClean="0"/>
+              <a:rPr lang="en-US"/>
               <a:t>Click to edit Master title style</a:t>
             </a:r>
-            <a:endParaRPr lang="en-US"/>
           </a:p>
         </p:txBody>
       </p:sp>
@@ -1892,7 +1892,7 @@
             <a:fld id="{1D8BD707-D9CF-40AE-B4C6-C98DA3205C09}" type="datetimeFigureOut">
               <a:rPr lang="en-US" smtClean="0"/>
               <a:pPr/>
-              <a:t>8/1/2011</a:t>
+              <a:t>10/17/2025</a:t>
             </a:fld>
             <a:endParaRPr lang="en-US"/>
           </a:p>
@@ -1935,7 +1935,7 @@
             <a:fld id="{B6F15528-21DE-4FAA-801E-634DDDAF4B2B}" type="slidenum">
               <a:rPr lang="en-US" smtClean="0"/>
               <a:pPr/>
-              <a:t>‹#›</a:t>
+              <a:t>‹Nº›</a:t>
             </a:fld>
             <a:endParaRPr lang="en-US"/>
           </a:p>
@@ -1984,7 +1984,7 @@
             <a:fld id="{1D8BD707-D9CF-40AE-B4C6-C98DA3205C09}" type="datetimeFigureOut">
               <a:rPr lang="en-US" smtClean="0"/>
               <a:pPr/>
-              <a:t>8/1/2011</a:t>
+              <a:t>10/17/2025</a:t>
             </a:fld>
             <a:endParaRPr lang="en-US"/>
           </a:p>
@@ -2027,7 +2027,7 @@
             <a:fld id="{B6F15528-21DE-4FAA-801E-634DDDAF4B2B}" type="slidenum">
               <a:rPr lang="en-US" smtClean="0"/>
               <a:pPr/>
-              <a:t>‹#›</a:t>
+              <a:t>‹Nº›</a:t>
             </a:fld>
             <a:endParaRPr lang="en-US"/>
           </a:p>
@@ -2083,10 +2083,9 @@
           </a:lstStyle>
           <a:p>
             <a:r>
-              <a:rPr lang="en-US" smtClean="0"/>
+              <a:rPr lang="en-US"/>
               <a:t>Click to edit Master title style</a:t>
             </a:r>
-            <a:endParaRPr lang="en-US"/>
           </a:p>
         </p:txBody>
       </p:sp>
@@ -2140,38 +2139,37 @@
           <a:p>
             <a:pPr lvl="0"/>
             <a:r>
-              <a:rPr lang="en-US" smtClean="0"/>
+              <a:rPr lang="en-US"/>
               <a:t>Click to edit Master text styles</a:t>
             </a:r>
           </a:p>
           <a:p>
             <a:pPr lvl="1"/>
             <a:r>
-              <a:rPr lang="en-US" smtClean="0"/>
+              <a:rPr lang="en-US"/>
               <a:t>Second level</a:t>
             </a:r>
           </a:p>
           <a:p>
             <a:pPr lvl="2"/>
             <a:r>
-              <a:rPr lang="en-US" smtClean="0"/>
+              <a:rPr lang="en-US"/>
               <a:t>Third level</a:t>
             </a:r>
           </a:p>
           <a:p>
             <a:pPr lvl="3"/>
             <a:r>
-              <a:rPr lang="en-US" smtClean="0"/>
+              <a:rPr lang="en-US"/>
               <a:t>Fourth level</a:t>
             </a:r>
           </a:p>
           <a:p>
             <a:pPr lvl="4"/>
             <a:r>
-              <a:rPr lang="en-US" smtClean="0"/>
+              <a:rPr lang="en-US"/>
               <a:t>Fifth level</a:t>
             </a:r>
-            <a:endParaRPr lang="en-US"/>
           </a:p>
         </p:txBody>
       </p:sp>
@@ -2234,7 +2232,7 @@
           <a:p>
             <a:pPr lvl="0"/>
             <a:r>
-              <a:rPr lang="en-US" smtClean="0"/>
+              <a:rPr lang="en-US"/>
               <a:t>Click to edit Master text styles</a:t>
             </a:r>
           </a:p>
@@ -2258,7 +2256,7 @@
             <a:fld id="{1D8BD707-D9CF-40AE-B4C6-C98DA3205C09}" type="datetimeFigureOut">
               <a:rPr lang="en-US" smtClean="0"/>
               <a:pPr/>
-              <a:t>8/1/2011</a:t>
+              <a:t>10/17/2025</a:t>
             </a:fld>
             <a:endParaRPr lang="en-US"/>
           </a:p>
@@ -2301,7 +2299,7 @@
             <a:fld id="{B6F15528-21DE-4FAA-801E-634DDDAF4B2B}" type="slidenum">
               <a:rPr lang="en-US" smtClean="0"/>
               <a:pPr/>
-              <a:t>‹#›</a:t>
+              <a:t>‹Nº›</a:t>
             </a:fld>
             <a:endParaRPr lang="en-US"/>
           </a:p>
@@ -2357,10 +2355,9 @@
           </a:lstStyle>
           <a:p>
             <a:r>
-              <a:rPr lang="en-US" smtClean="0"/>
+              <a:rPr lang="en-US"/>
               <a:t>Click to edit Master title style</a:t>
             </a:r>
-            <a:endParaRPr lang="en-US"/>
           </a:p>
         </p:txBody>
       </p:sp>
@@ -2484,7 +2481,7 @@
           <a:p>
             <a:pPr lvl="0"/>
             <a:r>
-              <a:rPr lang="en-US" smtClean="0"/>
+              <a:rPr lang="en-US"/>
               <a:t>Click to edit Master text styles</a:t>
             </a:r>
           </a:p>
@@ -2508,7 +2505,7 @@
             <a:fld id="{1D8BD707-D9CF-40AE-B4C6-C98DA3205C09}" type="datetimeFigureOut">
               <a:rPr lang="en-US" smtClean="0"/>
               <a:pPr/>
-              <a:t>8/1/2011</a:t>
+              <a:t>10/17/2025</a:t>
             </a:fld>
             <a:endParaRPr lang="en-US"/>
           </a:p>
@@ -2551,7 +2548,7 @@
             <a:fld id="{B6F15528-21DE-4FAA-801E-634DDDAF4B2B}" type="slidenum">
               <a:rPr lang="en-US" smtClean="0"/>
               <a:pPr/>
-              <a:t>‹#›</a:t>
+              <a:t>‹Nº›</a:t>
             </a:fld>
             <a:endParaRPr lang="en-US"/>
           </a:p>
@@ -2613,10 +2610,9 @@
           <a:lstStyle/>
           <a:p>
             <a:r>
-              <a:rPr lang="en-US" smtClean="0"/>
+              <a:rPr lang="en-US"/>
               <a:t>Click to edit Master title style</a:t>
             </a:r>
-            <a:endParaRPr lang="en-US"/>
           </a:p>
         </p:txBody>
       </p:sp>
@@ -2647,38 +2643,37 @@
           <a:p>
             <a:pPr lvl="0"/>
             <a:r>
-              <a:rPr lang="en-US" smtClean="0"/>
+              <a:rPr lang="en-US"/>
               <a:t>Click to edit Master text styles</a:t>
             </a:r>
           </a:p>
           <a:p>
             <a:pPr lvl="1"/>
             <a:r>
-              <a:rPr lang="en-US" smtClean="0"/>
+              <a:rPr lang="en-US"/>
               <a:t>Second level</a:t>
             </a:r>
           </a:p>
           <a:p>
             <a:pPr lvl="2"/>
             <a:r>
-              <a:rPr lang="en-US" smtClean="0"/>
+              <a:rPr lang="en-US"/>
               <a:t>Third level</a:t>
             </a:r>
           </a:p>
           <a:p>
             <a:pPr lvl="3"/>
             <a:r>
-              <a:rPr lang="en-US" smtClean="0"/>
+              <a:rPr lang="en-US"/>
               <a:t>Fourth level</a:t>
             </a:r>
           </a:p>
           <a:p>
             <a:pPr lvl="4"/>
             <a:r>
-              <a:rPr lang="en-US" smtClean="0"/>
+              <a:rPr lang="en-US"/>
               <a:t>Fifth level</a:t>
             </a:r>
-            <a:endParaRPr lang="en-US"/>
           </a:p>
         </p:txBody>
       </p:sp>
@@ -2718,7 +2713,7 @@
             <a:fld id="{1D8BD707-D9CF-40AE-B4C6-C98DA3205C09}" type="datetimeFigureOut">
               <a:rPr lang="en-US" smtClean="0"/>
               <a:pPr/>
-              <a:t>8/1/2011</a:t>
+              <a:t>10/17/2025</a:t>
             </a:fld>
             <a:endParaRPr lang="en-US"/>
           </a:p>
@@ -2797,7 +2792,7 @@
             <a:fld id="{B6F15528-21DE-4FAA-801E-634DDDAF4B2B}" type="slidenum">
               <a:rPr lang="en-US" smtClean="0"/>
               <a:pPr/>
-              <a:t>‹#›</a:t>
+              <a:t>‹Nº›</a:t>
             </a:fld>
             <a:endParaRPr lang="en-US"/>
           </a:p>
@@ -3073,13 +3068,14 @@
 </file>
 
 <file path=ppt/slides/slide1.xml><?xml version="1.0" encoding="utf-8"?>
-<p:sld xmlns:p="http://schemas.openxmlformats.org/presentationml/2006/main" xmlns:a="http://schemas.openxmlformats.org/drawingml/2006/main" xmlns:r="http://schemas.openxmlformats.org/officeDocument/2006/relationships">
+<p:sld xmlns:a="http://schemas.openxmlformats.org/drawingml/2006/main" xmlns:r="http://schemas.openxmlformats.org/officeDocument/2006/relationships" xmlns:p="http://schemas.openxmlformats.org/presentationml/2006/main">
   <p:cSld>
     <p:bg>
       <p:bgPr>
         <a:solidFill>
           <a:srgbClr val="C8E2CC"/>
         </a:solidFill>
+        <a:effectLst/>
       </p:bgPr>
     </p:bg>
     <p:spTree>
@@ -3098,12 +3094,12 @@
       </p:grpSpPr>
       <p:sp>
         <p:nvSpPr>
-          <p:cNvPr name="Freeform 2" id="2"/>
+          <p:cNvPr id="2" name="Freeform 2"/>
           <p:cNvSpPr/>
           <p:nvPr/>
         </p:nvSpPr>
         <p:spPr>
-          <a:xfrm flipH="false" flipV="false" rot="0">
+          <a:xfrm>
             <a:off x="0" y="0"/>
             <a:ext cx="18369643" cy="10287000"/>
           </a:xfrm>
@@ -3112,9 +3108,9 @@
             <a:gdLst/>
             <a:ahLst/>
             <a:cxnLst/>
-            <a:rect r="r" b="b" t="t" l="l"/>
+            <a:rect l="l" t="t" r="r" b="b"/>
             <a:pathLst>
-              <a:path h="10287000" w="18369643">
+              <a:path w="18369643" h="10287000">
                 <a:moveTo>
                   <a:pt x="0" y="0"/>
                 </a:moveTo>
@@ -3137,19 +3133,26 @@
           <a:blipFill>
             <a:blip r:embed="rId2"/>
             <a:stretch>
-              <a:fillRect l="0" t="0" r="0" b="0"/>
+              <a:fillRect/>
             </a:stretch>
           </a:blipFill>
         </p:spPr>
+        <p:txBody>
+          <a:bodyPr/>
+          <a:lstStyle/>
+          <a:p>
+            <a:endParaRPr lang="es-ES"/>
+          </a:p>
+        </p:txBody>
       </p:sp>
       <p:grpSp>
         <p:nvGrpSpPr>
-          <p:cNvPr name="Group 3" id="3"/>
+          <p:cNvPr id="3" name="Group 3"/>
           <p:cNvGrpSpPr/>
           <p:nvPr/>
         </p:nvGrpSpPr>
         <p:grpSpPr>
-          <a:xfrm rot="0">
+          <a:xfrm>
             <a:off x="1597565" y="7195826"/>
             <a:ext cx="3677460" cy="2333935"/>
             <a:chOff x="0" y="0"/>
@@ -3158,12 +3161,12 @@
         </p:grpSpPr>
         <p:sp>
           <p:nvSpPr>
-            <p:cNvPr name="Freeform 4" id="4"/>
+            <p:cNvPr id="4" name="Freeform 4"/>
             <p:cNvSpPr/>
             <p:nvPr/>
           </p:nvSpPr>
           <p:spPr>
-            <a:xfrm flipH="false" flipV="false" rot="0">
+            <a:xfrm>
               <a:off x="0" y="0"/>
               <a:ext cx="1083752" cy="687814"/>
             </a:xfrm>
@@ -3172,9 +3175,9 @@
               <a:gdLst/>
               <a:ahLst/>
               <a:cxnLst/>
-              <a:rect r="r" b="b" t="t" l="l"/>
+              <a:rect l="l" t="t" r="r" b="b"/>
               <a:pathLst>
-                <a:path h="687814" w="1083752">
+                <a:path w="1083752" h="687814">
                   <a:moveTo>
                     <a:pt x="33684" y="0"/>
                   </a:moveTo>
@@ -3218,11 +3221,18 @@
               <a:srgbClr val="82A399"/>
             </a:solidFill>
           </p:spPr>
+          <p:txBody>
+            <a:bodyPr/>
+            <a:lstStyle/>
+            <a:p>
+              <a:endParaRPr lang="es-ES"/>
+            </a:p>
+          </p:txBody>
         </p:sp>
         <p:sp>
           <p:nvSpPr>
-            <p:cNvPr name="TextBox 5" id="5"/>
-            <p:cNvSpPr txBox="true"/>
+            <p:cNvPr id="5" name="TextBox 5"/>
+            <p:cNvSpPr txBox="1"/>
             <p:nvPr/>
           </p:nvSpPr>
           <p:spPr>
@@ -3235,7 +3245,7 @@
             </a:prstGeom>
           </p:spPr>
           <p:txBody>
-            <a:bodyPr anchor="ctr" rtlCol="false" tIns="50800" lIns="50800" bIns="50800" rIns="50800"/>
+            <a:bodyPr lIns="50800" tIns="50800" rIns="50800" bIns="50800" rtlCol="0" anchor="ctr"/>
             <a:lstStyle/>
             <a:p>
               <a:pPr algn="ctr">
@@ -3243,15 +3253,16 @@
                   <a:spcPts val="3254"/>
                 </a:lnSpc>
               </a:pPr>
+              <a:endParaRPr/>
             </a:p>
           </p:txBody>
         </p:sp>
       </p:grpSp>
       <p:pic>
         <p:nvPicPr>
-          <p:cNvPr name="Picture 6" id="6"/>
+          <p:cNvPr id="6" name="Picture 6"/>
           <p:cNvPicPr>
-            <a:picLocks noChangeAspect="true"/>
+            <a:picLocks noChangeAspect="1"/>
           </p:cNvPicPr>
           <p:nvPr/>
         </p:nvPicPr>
@@ -3262,7 +3273,7 @@
           </a:stretch>
         </p:blipFill>
         <p:spPr>
-          <a:xfrm rot="0">
+          <a:xfrm>
             <a:off x="2255323" y="8348789"/>
             <a:ext cx="2361943" cy="1377800"/>
           </a:xfrm>
@@ -3273,12 +3284,12 @@
       </p:pic>
       <p:sp>
         <p:nvSpPr>
-          <p:cNvPr name="TextBox 7" id="7"/>
-          <p:cNvSpPr txBox="true"/>
+          <p:cNvPr id="7" name="TextBox 7"/>
+          <p:cNvSpPr txBox="1"/>
           <p:nvPr/>
         </p:nvSpPr>
         <p:spPr>
-          <a:xfrm rot="0">
+          <a:xfrm>
             <a:off x="2024940" y="7552850"/>
             <a:ext cx="3291978" cy="361315"/>
           </a:xfrm>
@@ -3287,7 +3298,7 @@
           </a:prstGeom>
         </p:spPr>
         <p:txBody>
-          <a:bodyPr anchor="t" rtlCol="false" tIns="0" lIns="0" bIns="0" rIns="0">
+          <a:bodyPr lIns="0" tIns="0" rIns="0" bIns="0" rtlCol="0" anchor="t">
             <a:spAutoFit/>
           </a:bodyPr>
           <a:lstStyle/>
@@ -3298,7 +3309,7 @@
               </a:lnSpc>
             </a:pPr>
             <a:r>
-              <a:rPr lang="en-US" b="true" sz="2299" spc="22">
+              <a:rPr lang="en-US" sz="2299" b="1" spc="22">
                 <a:solidFill>
                   <a:srgbClr val="000000"/>
                 </a:solidFill>
@@ -3314,12 +3325,12 @@
       </p:sp>
       <p:sp>
         <p:nvSpPr>
-          <p:cNvPr name="TextBox 8" id="8"/>
-          <p:cNvSpPr txBox="true"/>
+          <p:cNvPr id="8" name="TextBox 8"/>
+          <p:cNvSpPr txBox="1"/>
           <p:nvPr/>
         </p:nvSpPr>
         <p:spPr>
-          <a:xfrm rot="0">
+          <a:xfrm>
             <a:off x="2053711" y="7959699"/>
             <a:ext cx="2439224" cy="511810"/>
           </a:xfrm>
@@ -3328,7 +3339,7 @@
           </a:prstGeom>
         </p:spPr>
         <p:txBody>
-          <a:bodyPr anchor="t" rtlCol="false" tIns="0" lIns="0" bIns="0" rIns="0">
+          <a:bodyPr lIns="0" tIns="0" rIns="0" bIns="0" rtlCol="0" anchor="t">
             <a:spAutoFit/>
           </a:bodyPr>
           <a:lstStyle/>
@@ -3339,7 +3350,7 @@
               </a:lnSpc>
             </a:pPr>
             <a:r>
-              <a:rPr lang="en-US" sz="3200" b="true">
+              <a:rPr lang="en-US" sz="3200" b="1">
                 <a:solidFill>
                   <a:srgbClr val="000000"/>
                 </a:solidFill>
@@ -3348,31 +3359,19 @@
                 <a:cs typeface="Canva Sans Bold"/>
                 <a:sym typeface="Canva Sans Bold"/>
               </a:rPr>
-              <a:t>17</a:t>
-            </a:r>
-            <a:r>
-              <a:rPr lang="en-US" sz="3200" b="true">
-                <a:solidFill>
-                  <a:srgbClr val="000000"/>
-                </a:solidFill>
-                <a:latin typeface="Canva Sans Bold"/>
-                <a:ea typeface="Canva Sans Bold"/>
-                <a:cs typeface="Canva Sans Bold"/>
-                <a:sym typeface="Canva Sans Bold"/>
-              </a:rPr>
-              <a:t>/10/2025</a:t>
+              <a:t>17/10/2025</a:t>
             </a:r>
           </a:p>
         </p:txBody>
       </p:sp>
       <p:sp>
         <p:nvSpPr>
-          <p:cNvPr name="TextBox 9" id="9"/>
-          <p:cNvSpPr txBox="true"/>
+          <p:cNvPr id="9" name="TextBox 9"/>
+          <p:cNvSpPr txBox="1"/>
           <p:nvPr/>
         </p:nvSpPr>
         <p:spPr>
-          <a:xfrm rot="0">
+          <a:xfrm>
             <a:off x="1310504" y="1678474"/>
             <a:ext cx="5054763" cy="1143000"/>
           </a:xfrm>
@@ -3381,7 +3380,7 @@
           </a:prstGeom>
         </p:spPr>
         <p:txBody>
-          <a:bodyPr anchor="t" rtlCol="false" tIns="0" lIns="0" bIns="0" rIns="0">
+          <a:bodyPr lIns="0" tIns="0" rIns="0" bIns="0" rtlCol="0" anchor="t">
             <a:spAutoFit/>
           </a:bodyPr>
           <a:lstStyle/>
@@ -3395,7 +3394,7 @@
               </a:spcBef>
             </a:pPr>
             <a:r>
-              <a:rPr lang="en-US" b="true" sz="3800">
+              <a:rPr lang="en-US" sz="3800" b="1">
                 <a:solidFill>
                   <a:srgbClr val="517A71"/>
                 </a:solidFill>
@@ -3418,13 +3417,14 @@
 </file>
 
 <file path=ppt/slides/slide2.xml><?xml version="1.0" encoding="utf-8"?>
-<p:sld xmlns:p="http://schemas.openxmlformats.org/presentationml/2006/main" xmlns:a="http://schemas.openxmlformats.org/drawingml/2006/main" xmlns:r="http://schemas.openxmlformats.org/officeDocument/2006/relationships">
+<p:sld xmlns:a="http://schemas.openxmlformats.org/drawingml/2006/main" xmlns:r="http://schemas.openxmlformats.org/officeDocument/2006/relationships" xmlns:p="http://schemas.openxmlformats.org/presentationml/2006/main">
   <p:cSld>
     <p:bg>
       <p:bgPr>
         <a:solidFill>
           <a:srgbClr val="C8E2CC"/>
         </a:solidFill>
+        <a:effectLst/>
       </p:bgPr>
     </p:bg>
     <p:spTree>
@@ -3443,12 +3443,12 @@
       </p:grpSpPr>
       <p:sp>
         <p:nvSpPr>
-          <p:cNvPr name="Freeform 2" id="2"/>
+          <p:cNvPr id="2" name="Freeform 2"/>
           <p:cNvSpPr/>
           <p:nvPr/>
         </p:nvSpPr>
         <p:spPr>
-          <a:xfrm flipH="false" flipV="false" rot="0">
+          <a:xfrm>
             <a:off x="0" y="0"/>
             <a:ext cx="18721742" cy="10390567"/>
           </a:xfrm>
@@ -3457,9 +3457,9 @@
             <a:gdLst/>
             <a:ahLst/>
             <a:cxnLst/>
-            <a:rect r="r" b="b" t="t" l="l"/>
+            <a:rect l="l" t="t" r="r" b="b"/>
             <a:pathLst>
-              <a:path h="10390567" w="18721742">
+              <a:path w="18721742" h="10390567">
                 <a:moveTo>
                   <a:pt x="0" y="0"/>
                 </a:moveTo>
@@ -3482,10 +3482,17 @@
           <a:blipFill>
             <a:blip r:embed="rId2"/>
             <a:stretch>
-              <a:fillRect l="0" t="0" r="0" b="0"/>
+              <a:fillRect/>
             </a:stretch>
           </a:blipFill>
         </p:spPr>
+        <p:txBody>
+          <a:bodyPr/>
+          <a:lstStyle/>
+          <a:p>
+            <a:endParaRPr lang="es-ES"/>
+          </a:p>
+        </p:txBody>
       </p:sp>
     </p:spTree>
   </p:cSld>
@@ -3496,13 +3503,14 @@
 </file>
 
 <file path=ppt/slides/slide3.xml><?xml version="1.0" encoding="utf-8"?>
-<p:sld xmlns:p="http://schemas.openxmlformats.org/presentationml/2006/main" xmlns:a="http://schemas.openxmlformats.org/drawingml/2006/main" xmlns:r="http://schemas.openxmlformats.org/officeDocument/2006/relationships">
+<p:sld xmlns:a="http://schemas.openxmlformats.org/drawingml/2006/main" xmlns:r="http://schemas.openxmlformats.org/officeDocument/2006/relationships" xmlns:p="http://schemas.openxmlformats.org/presentationml/2006/main">
   <p:cSld>
     <p:bg>
       <p:bgPr>
         <a:solidFill>
           <a:srgbClr val="C8E2CC"/>
         </a:solidFill>
+        <a:effectLst/>
       </p:bgPr>
     </p:bg>
     <p:spTree>
@@ -3521,12 +3529,12 @@
       </p:grpSpPr>
       <p:grpSp>
         <p:nvGrpSpPr>
-          <p:cNvPr name="Group 2" id="2"/>
+          <p:cNvPr id="2" name="Group 2"/>
           <p:cNvGrpSpPr/>
           <p:nvPr/>
         </p:nvGrpSpPr>
         <p:grpSpPr>
-          <a:xfrm rot="0">
+          <a:xfrm>
             <a:off x="13555510" y="4962147"/>
             <a:ext cx="7407579" cy="7407579"/>
             <a:chOff x="0" y="0"/>
@@ -3535,12 +3543,12 @@
         </p:grpSpPr>
         <p:sp>
           <p:nvSpPr>
-            <p:cNvPr name="Freeform 3" id="3"/>
+            <p:cNvPr id="3" name="Freeform 3"/>
             <p:cNvSpPr/>
             <p:nvPr/>
           </p:nvSpPr>
           <p:spPr>
-            <a:xfrm flipH="false" flipV="false" rot="0">
+            <a:xfrm>
               <a:off x="0" y="0"/>
               <a:ext cx="812800" cy="812800"/>
             </a:xfrm>
@@ -3549,9 +3557,9 @@
               <a:gdLst/>
               <a:ahLst/>
               <a:cxnLst/>
-              <a:rect r="r" b="b" t="t" l="l"/>
+              <a:rect l="l" t="t" r="r" b="b"/>
               <a:pathLst>
-                <a:path h="812800" w="812800">
+                <a:path w="812800" h="812800">
                   <a:moveTo>
                     <a:pt x="406400" y="0"/>
                   </a:moveTo>
@@ -3585,11 +3593,18 @@
               </a:srgbClr>
             </a:solidFill>
           </p:spPr>
+          <p:txBody>
+            <a:bodyPr/>
+            <a:lstStyle/>
+            <a:p>
+              <a:endParaRPr lang="es-ES"/>
+            </a:p>
+          </p:txBody>
         </p:sp>
         <p:sp>
           <p:nvSpPr>
-            <p:cNvPr name="TextBox 4" id="4"/>
-            <p:cNvSpPr txBox="true"/>
+            <p:cNvPr id="4" name="TextBox 4"/>
+            <p:cNvSpPr txBox="1"/>
             <p:nvPr/>
           </p:nvSpPr>
           <p:spPr>
@@ -3602,7 +3617,7 @@
             </a:prstGeom>
           </p:spPr>
           <p:txBody>
-            <a:bodyPr anchor="ctr" rtlCol="false" tIns="50800" lIns="50800" bIns="50800" rIns="50800"/>
+            <a:bodyPr lIns="50800" tIns="50800" rIns="50800" bIns="50800" rtlCol="0" anchor="ctr"/>
             <a:lstStyle/>
             <a:p>
               <a:pPr algn="ctr">
@@ -3610,18 +3625,19 @@
                   <a:spcPts val="2659"/>
                 </a:lnSpc>
               </a:pPr>
+              <a:endParaRPr/>
             </a:p>
           </p:txBody>
         </p:sp>
       </p:grpSp>
       <p:sp>
         <p:nvSpPr>
-          <p:cNvPr name="Freeform 5" id="5"/>
+          <p:cNvPr id="5" name="Freeform 5"/>
           <p:cNvSpPr/>
           <p:nvPr/>
         </p:nvSpPr>
         <p:spPr>
-          <a:xfrm flipH="false" flipV="false" rot="0">
+          <a:xfrm>
             <a:off x="15119533" y="6405672"/>
             <a:ext cx="2585935" cy="3881328"/>
           </a:xfrm>
@@ -3630,9 +3646,9 @@
             <a:gdLst/>
             <a:ahLst/>
             <a:cxnLst/>
-            <a:rect r="r" b="b" t="t" l="l"/>
+            <a:rect l="l" t="t" r="r" b="b"/>
             <a:pathLst>
-              <a:path h="3881328" w="2585935">
+              <a:path w="2585935" h="3881328">
                 <a:moveTo>
                   <a:pt x="0" y="0"/>
                 </a:moveTo>
@@ -3655,19 +3671,26 @@
           <a:blipFill>
             <a:blip r:embed="rId2"/>
             <a:stretch>
-              <a:fillRect l="0" t="0" r="0" b="0"/>
+              <a:fillRect/>
             </a:stretch>
           </a:blipFill>
         </p:spPr>
+        <p:txBody>
+          <a:bodyPr/>
+          <a:lstStyle/>
+          <a:p>
+            <a:endParaRPr lang="es-ES"/>
+          </a:p>
+        </p:txBody>
       </p:sp>
       <p:sp>
         <p:nvSpPr>
-          <p:cNvPr name="TextBox 6" id="6"/>
-          <p:cNvSpPr txBox="true"/>
+          <p:cNvPr id="6" name="TextBox 6"/>
+          <p:cNvSpPr txBox="1"/>
           <p:nvPr/>
         </p:nvSpPr>
         <p:spPr>
-          <a:xfrm rot="0">
+          <a:xfrm>
             <a:off x="5926045" y="209550"/>
             <a:ext cx="6435910" cy="971550"/>
           </a:xfrm>
@@ -3676,7 +3699,7 @@
           </a:prstGeom>
         </p:spPr>
         <p:txBody>
-          <a:bodyPr anchor="t" rtlCol="false" tIns="0" lIns="0" bIns="0" rIns="0">
+          <a:bodyPr lIns="0" tIns="0" rIns="0" bIns="0" rtlCol="0" anchor="t">
             <a:spAutoFit/>
           </a:bodyPr>
           <a:lstStyle/>
@@ -3687,7 +3710,7 @@
               </a:lnSpc>
             </a:pPr>
             <a:r>
-              <a:rPr lang="en-US" sz="6399" b="true">
+              <a:rPr lang="en-US" sz="6399" b="1">
                 <a:solidFill>
                   <a:srgbClr val="006747"/>
                 </a:solidFill>
@@ -3703,12 +3726,12 @@
       </p:sp>
       <p:sp>
         <p:nvSpPr>
-          <p:cNvPr name="TextBox 7" id="7"/>
-          <p:cNvSpPr txBox="true"/>
+          <p:cNvPr id="7" name="TextBox 7"/>
+          <p:cNvSpPr txBox="1"/>
           <p:nvPr/>
         </p:nvSpPr>
         <p:spPr>
-          <a:xfrm rot="0">
+          <a:xfrm>
             <a:off x="715485" y="3043420"/>
             <a:ext cx="6435910" cy="819150"/>
           </a:xfrm>
@@ -3717,7 +3740,7 @@
           </a:prstGeom>
         </p:spPr>
         <p:txBody>
-          <a:bodyPr anchor="t" rtlCol="false" tIns="0" lIns="0" bIns="0" rIns="0">
+          <a:bodyPr lIns="0" tIns="0" rIns="0" bIns="0" rtlCol="0" anchor="t">
             <a:spAutoFit/>
           </a:bodyPr>
           <a:lstStyle/>
@@ -3728,7 +3751,7 @@
               </a:lnSpc>
             </a:pPr>
             <a:r>
-              <a:rPr lang="en-US" sz="5400" b="true">
+              <a:rPr lang="en-US" sz="5400" b="1">
                 <a:solidFill>
                   <a:srgbClr val="006747"/>
                 </a:solidFill>
@@ -3744,12 +3767,12 @@
       </p:sp>
       <p:sp>
         <p:nvSpPr>
-          <p:cNvPr name="TextBox 8" id="8"/>
-          <p:cNvSpPr txBox="true"/>
+          <p:cNvPr id="8" name="TextBox 8"/>
+          <p:cNvSpPr txBox="1"/>
           <p:nvPr/>
         </p:nvSpPr>
         <p:spPr>
-          <a:xfrm rot="0">
+          <a:xfrm>
             <a:off x="715485" y="4097772"/>
             <a:ext cx="6435910" cy="819150"/>
           </a:xfrm>
@@ -3758,7 +3781,7 @@
           </a:prstGeom>
         </p:spPr>
         <p:txBody>
-          <a:bodyPr anchor="t" rtlCol="false" tIns="0" lIns="0" bIns="0" rIns="0">
+          <a:bodyPr lIns="0" tIns="0" rIns="0" bIns="0" rtlCol="0" anchor="t">
             <a:spAutoFit/>
           </a:bodyPr>
           <a:lstStyle/>
@@ -3769,7 +3792,7 @@
               </a:lnSpc>
             </a:pPr>
             <a:r>
-              <a:rPr lang="en-US" sz="5400" b="true">
+              <a:rPr lang="en-US" sz="5400" b="1">
                 <a:solidFill>
                   <a:srgbClr val="006747"/>
                 </a:solidFill>
@@ -3785,12 +3808,12 @@
       </p:sp>
       <p:sp>
         <p:nvSpPr>
-          <p:cNvPr name="TextBox 9" id="9"/>
-          <p:cNvSpPr txBox="true"/>
+          <p:cNvPr id="9" name="TextBox 9"/>
+          <p:cNvSpPr txBox="1"/>
           <p:nvPr/>
         </p:nvSpPr>
         <p:spPr>
-          <a:xfrm rot="0">
+          <a:xfrm>
             <a:off x="715485" y="5155047"/>
             <a:ext cx="6435910" cy="819150"/>
           </a:xfrm>
@@ -3799,7 +3822,7 @@
           </a:prstGeom>
         </p:spPr>
         <p:txBody>
-          <a:bodyPr anchor="t" rtlCol="false" tIns="0" lIns="0" bIns="0" rIns="0">
+          <a:bodyPr lIns="0" tIns="0" rIns="0" bIns="0" rtlCol="0" anchor="t">
             <a:spAutoFit/>
           </a:bodyPr>
           <a:lstStyle/>
@@ -3810,7 +3833,7 @@
               </a:lnSpc>
             </a:pPr>
             <a:r>
-              <a:rPr lang="en-US" sz="5400" b="true">
+              <a:rPr lang="en-US" sz="5400" b="1">
                 <a:solidFill>
                   <a:srgbClr val="006747"/>
                 </a:solidFill>
@@ -3826,12 +3849,12 @@
       </p:sp>
       <p:sp>
         <p:nvSpPr>
-          <p:cNvPr name="TextBox 10" id="10"/>
-          <p:cNvSpPr txBox="true"/>
+          <p:cNvPr id="10" name="TextBox 10"/>
+          <p:cNvSpPr txBox="1"/>
           <p:nvPr/>
         </p:nvSpPr>
         <p:spPr>
-          <a:xfrm rot="0">
+          <a:xfrm>
             <a:off x="715485" y="6212322"/>
             <a:ext cx="10866225" cy="819150"/>
           </a:xfrm>
@@ -3840,7 +3863,7 @@
           </a:prstGeom>
         </p:spPr>
         <p:txBody>
-          <a:bodyPr anchor="t" rtlCol="false" tIns="0" lIns="0" bIns="0" rIns="0">
+          <a:bodyPr lIns="0" tIns="0" rIns="0" bIns="0" rtlCol="0" anchor="t">
             <a:spAutoFit/>
           </a:bodyPr>
           <a:lstStyle/>
@@ -3851,7 +3874,7 @@
               </a:lnSpc>
             </a:pPr>
             <a:r>
-              <a:rPr lang="en-US" sz="5400" b="true">
+              <a:rPr lang="en-US" sz="5400" b="1">
                 <a:solidFill>
                   <a:srgbClr val="006747"/>
                 </a:solidFill>
@@ -3874,13 +3897,14 @@
 </file>
 
 <file path=ppt/slides/slide4.xml><?xml version="1.0" encoding="utf-8"?>
-<p:sld xmlns:p="http://schemas.openxmlformats.org/presentationml/2006/main" xmlns:a="http://schemas.openxmlformats.org/drawingml/2006/main" xmlns:r="http://schemas.openxmlformats.org/officeDocument/2006/relationships">
+<p:sld xmlns:a="http://schemas.openxmlformats.org/drawingml/2006/main" xmlns:r="http://schemas.openxmlformats.org/officeDocument/2006/relationships" xmlns:p="http://schemas.openxmlformats.org/presentationml/2006/main">
   <p:cSld>
     <p:bg>
       <p:bgPr>
         <a:solidFill>
           <a:srgbClr val="C8E2CC"/>
         </a:solidFill>
+        <a:effectLst/>
       </p:bgPr>
     </p:bg>
     <p:spTree>
@@ -3899,12 +3923,12 @@
       </p:grpSpPr>
       <p:grpSp>
         <p:nvGrpSpPr>
-          <p:cNvPr name="Group 2" id="2"/>
+          <p:cNvPr id="2" name="Group 2"/>
           <p:cNvGrpSpPr/>
           <p:nvPr/>
         </p:nvGrpSpPr>
         <p:grpSpPr>
-          <a:xfrm rot="0">
+          <a:xfrm>
             <a:off x="13555510" y="4889016"/>
             <a:ext cx="7407579" cy="7407579"/>
             <a:chOff x="0" y="0"/>
@@ -3913,12 +3937,12 @@
         </p:grpSpPr>
         <p:sp>
           <p:nvSpPr>
-            <p:cNvPr name="Freeform 3" id="3"/>
+            <p:cNvPr id="3" name="Freeform 3"/>
             <p:cNvSpPr/>
             <p:nvPr/>
           </p:nvSpPr>
           <p:spPr>
-            <a:xfrm flipH="false" flipV="false" rot="0">
+            <a:xfrm>
               <a:off x="0" y="0"/>
               <a:ext cx="812800" cy="812800"/>
             </a:xfrm>
@@ -3927,9 +3951,9 @@
               <a:gdLst/>
               <a:ahLst/>
               <a:cxnLst/>
-              <a:rect r="r" b="b" t="t" l="l"/>
+              <a:rect l="l" t="t" r="r" b="b"/>
               <a:pathLst>
-                <a:path h="812800" w="812800">
+                <a:path w="812800" h="812800">
                   <a:moveTo>
                     <a:pt x="406400" y="0"/>
                   </a:moveTo>
@@ -3963,11 +3987,18 @@
               </a:srgbClr>
             </a:solidFill>
           </p:spPr>
+          <p:txBody>
+            <a:bodyPr/>
+            <a:lstStyle/>
+            <a:p>
+              <a:endParaRPr lang="es-ES"/>
+            </a:p>
+          </p:txBody>
         </p:sp>
         <p:sp>
           <p:nvSpPr>
-            <p:cNvPr name="TextBox 4" id="4"/>
-            <p:cNvSpPr txBox="true"/>
+            <p:cNvPr id="4" name="TextBox 4"/>
+            <p:cNvSpPr txBox="1"/>
             <p:nvPr/>
           </p:nvSpPr>
           <p:spPr>
@@ -3980,7 +4011,7 @@
             </a:prstGeom>
           </p:spPr>
           <p:txBody>
-            <a:bodyPr anchor="ctr" rtlCol="false" tIns="50800" lIns="50800" bIns="50800" rIns="50800"/>
+            <a:bodyPr lIns="50800" tIns="50800" rIns="50800" bIns="50800" rtlCol="0" anchor="ctr"/>
             <a:lstStyle/>
             <a:p>
               <a:pPr algn="ctr">
@@ -3988,18 +4019,19 @@
                   <a:spcPts val="2659"/>
                 </a:lnSpc>
               </a:pPr>
+              <a:endParaRPr/>
             </a:p>
           </p:txBody>
         </p:sp>
       </p:grpSp>
       <p:sp>
         <p:nvSpPr>
-          <p:cNvPr name="Freeform 5" id="5"/>
+          <p:cNvPr id="5" name="Freeform 5"/>
           <p:cNvSpPr/>
           <p:nvPr/>
         </p:nvSpPr>
         <p:spPr>
-          <a:xfrm flipH="false" flipV="false" rot="0">
+          <a:xfrm>
             <a:off x="330845" y="990600"/>
             <a:ext cx="12237949" cy="443626"/>
           </a:xfrm>
@@ -4008,9 +4040,9 @@
             <a:gdLst/>
             <a:ahLst/>
             <a:cxnLst/>
-            <a:rect r="r" b="b" t="t" l="l"/>
+            <a:rect l="l" t="t" r="r" b="b"/>
             <a:pathLst>
-              <a:path h="443626" w="12237949">
+              <a:path w="12237949" h="443626">
                 <a:moveTo>
                   <a:pt x="0" y="0"/>
                 </a:moveTo>
@@ -4033,19 +4065,26 @@
           <a:blipFill>
             <a:blip r:embed="rId2"/>
             <a:stretch>
-              <a:fillRect l="0" t="0" r="0" b="0"/>
+              <a:fillRect/>
             </a:stretch>
           </a:blipFill>
         </p:spPr>
+        <p:txBody>
+          <a:bodyPr/>
+          <a:lstStyle/>
+          <a:p>
+            <a:endParaRPr lang="es-ES"/>
+          </a:p>
+        </p:txBody>
       </p:sp>
       <p:sp>
         <p:nvSpPr>
-          <p:cNvPr name="Freeform 6" id="6"/>
+          <p:cNvPr id="6" name="Freeform 6"/>
           <p:cNvSpPr/>
           <p:nvPr/>
         </p:nvSpPr>
         <p:spPr>
-          <a:xfrm flipH="false" flipV="false" rot="0">
+          <a:xfrm>
             <a:off x="2301755" y="1707366"/>
             <a:ext cx="13950624" cy="8579634"/>
           </a:xfrm>
@@ -4054,9 +4093,9 @@
             <a:gdLst/>
             <a:ahLst/>
             <a:cxnLst/>
-            <a:rect r="r" b="b" t="t" l="l"/>
+            <a:rect l="l" t="t" r="r" b="b"/>
             <a:pathLst>
-              <a:path h="8579634" w="13950624">
+              <a:path w="13950624" h="8579634">
                 <a:moveTo>
                   <a:pt x="0" y="0"/>
                 </a:moveTo>
@@ -4079,19 +4118,26 @@
           <a:blipFill>
             <a:blip r:embed="rId3"/>
             <a:stretch>
-              <a:fillRect l="0" t="0" r="0" b="0"/>
+              <a:fillRect/>
             </a:stretch>
           </a:blipFill>
         </p:spPr>
+        <p:txBody>
+          <a:bodyPr/>
+          <a:lstStyle/>
+          <a:p>
+            <a:endParaRPr lang="es-ES"/>
+          </a:p>
+        </p:txBody>
       </p:sp>
       <p:sp>
         <p:nvSpPr>
-          <p:cNvPr name="TextBox 7" id="7"/>
-          <p:cNvSpPr txBox="true"/>
+          <p:cNvPr id="7" name="TextBox 7"/>
+          <p:cNvSpPr txBox="1"/>
           <p:nvPr/>
         </p:nvSpPr>
         <p:spPr>
-          <a:xfrm rot="0">
+          <a:xfrm>
             <a:off x="330845" y="-9525"/>
             <a:ext cx="15359361" cy="1000125"/>
           </a:xfrm>
@@ -4100,7 +4146,7 @@
           </a:prstGeom>
         </p:spPr>
         <p:txBody>
-          <a:bodyPr anchor="t" rtlCol="false" tIns="0" lIns="0" bIns="0" rIns="0">
+          <a:bodyPr lIns="0" tIns="0" rIns="0" bIns="0" rtlCol="0" anchor="t">
             <a:spAutoFit/>
           </a:bodyPr>
           <a:lstStyle/>
@@ -4120,19 +4166,7 @@
                 <a:cs typeface="Montaser Arabic"/>
                 <a:sym typeface="Montaser Arabic"/>
               </a:rPr>
-              <a:t>01 </a:t>
-            </a:r>
-            <a:r>
-              <a:rPr lang="en-US" sz="6500">
-                <a:solidFill>
-                  <a:srgbClr val="006747"/>
-                </a:solidFill>
-                <a:latin typeface="Montaser Arabic"/>
-                <a:ea typeface="Montaser Arabic"/>
-                <a:cs typeface="Montaser Arabic"/>
-                <a:sym typeface="Montaser Arabic"/>
-              </a:rPr>
-              <a:t>Compromiso sesión anterior</a:t>
+              <a:t>01 Compromiso sesión anterior</a:t>
             </a:r>
           </a:p>
         </p:txBody>
@@ -4146,13 +4180,14 @@
 </file>
 
 <file path=ppt/slides/slide5.xml><?xml version="1.0" encoding="utf-8"?>
-<p:sld xmlns:p="http://schemas.openxmlformats.org/presentationml/2006/main" xmlns:a="http://schemas.openxmlformats.org/drawingml/2006/main" xmlns:r="http://schemas.openxmlformats.org/officeDocument/2006/relationships">
+<p:sld xmlns:a="http://schemas.openxmlformats.org/drawingml/2006/main" xmlns:r="http://schemas.openxmlformats.org/officeDocument/2006/relationships" xmlns:p="http://schemas.openxmlformats.org/presentationml/2006/main">
   <p:cSld>
     <p:bg>
       <p:bgPr>
         <a:solidFill>
           <a:srgbClr val="C8E2CC"/>
         </a:solidFill>
+        <a:effectLst/>
       </p:bgPr>
     </p:bg>
     <p:spTree>
@@ -4171,12 +4206,12 @@
       </p:grpSpPr>
       <p:sp>
         <p:nvSpPr>
-          <p:cNvPr name="Freeform 2" id="2"/>
+          <p:cNvPr id="2" name="Freeform 2"/>
           <p:cNvSpPr/>
           <p:nvPr/>
         </p:nvSpPr>
         <p:spPr>
-          <a:xfrm flipH="false" flipV="false" rot="0">
+          <a:xfrm>
             <a:off x="2238893" y="1862651"/>
             <a:ext cx="13254294" cy="7853169"/>
           </a:xfrm>
@@ -4185,9 +4220,9 @@
             <a:gdLst/>
             <a:ahLst/>
             <a:cxnLst/>
-            <a:rect r="r" b="b" t="t" l="l"/>
+            <a:rect l="l" t="t" r="r" b="b"/>
             <a:pathLst>
-              <a:path h="7853169" w="13254294">
+              <a:path w="13254294" h="7853169">
                 <a:moveTo>
                   <a:pt x="0" y="0"/>
                 </a:moveTo>
@@ -4210,19 +4245,26 @@
           <a:blipFill>
             <a:blip r:embed="rId2"/>
             <a:stretch>
-              <a:fillRect l="0" t="0" r="0" b="0"/>
+              <a:fillRect/>
             </a:stretch>
           </a:blipFill>
         </p:spPr>
+        <p:txBody>
+          <a:bodyPr/>
+          <a:lstStyle/>
+          <a:p>
+            <a:endParaRPr lang="es-ES"/>
+          </a:p>
+        </p:txBody>
       </p:sp>
       <p:sp>
         <p:nvSpPr>
-          <p:cNvPr name="TextBox 3" id="3"/>
-          <p:cNvSpPr txBox="true"/>
+          <p:cNvPr id="3" name="TextBox 3"/>
+          <p:cNvSpPr txBox="1"/>
           <p:nvPr/>
         </p:nvSpPr>
         <p:spPr>
-          <a:xfrm rot="0">
+          <a:xfrm>
             <a:off x="330845" y="-9525"/>
             <a:ext cx="15359361" cy="1000125"/>
           </a:xfrm>
@@ -4231,7 +4273,7 @@
           </a:prstGeom>
         </p:spPr>
         <p:txBody>
-          <a:bodyPr anchor="t" rtlCol="false" tIns="0" lIns="0" bIns="0" rIns="0">
+          <a:bodyPr lIns="0" tIns="0" rIns="0" bIns="0" rtlCol="0" anchor="t">
             <a:spAutoFit/>
           </a:bodyPr>
           <a:lstStyle/>
@@ -4258,12 +4300,12 @@
       </p:sp>
       <p:sp>
         <p:nvSpPr>
-          <p:cNvPr name="TextBox 4" id="4"/>
-          <p:cNvSpPr txBox="true"/>
+          <p:cNvPr id="4" name="TextBox 4"/>
+          <p:cNvSpPr txBox="1"/>
           <p:nvPr/>
         </p:nvSpPr>
         <p:spPr>
-          <a:xfrm rot="0">
+          <a:xfrm>
             <a:off x="772780" y="971550"/>
             <a:ext cx="3327202" cy="414655"/>
           </a:xfrm>
@@ -4272,7 +4314,7 @@
           </a:prstGeom>
         </p:spPr>
         <p:txBody>
-          <a:bodyPr anchor="t" rtlCol="false" tIns="0" lIns="0" bIns="0" rIns="0">
+          <a:bodyPr lIns="0" tIns="0" rIns="0" bIns="0" rtlCol="0" anchor="t">
             <a:spAutoFit/>
           </a:bodyPr>
           <a:lstStyle/>
@@ -4309,7 +4351,7 @@
 </file>
 
 <file path=ppt/slides/slide6.xml><?xml version="1.0" encoding="utf-8"?>
-<p:sld xmlns:p="http://schemas.openxmlformats.org/presentationml/2006/main" xmlns:a="http://schemas.openxmlformats.org/drawingml/2006/main" xmlns:r="http://schemas.openxmlformats.org/officeDocument/2006/relationships">
+<p:sld xmlns:a="http://schemas.openxmlformats.org/drawingml/2006/main" xmlns:r="http://schemas.openxmlformats.org/officeDocument/2006/relationships" xmlns:p="http://schemas.openxmlformats.org/presentationml/2006/main">
   <p:cSld>
     <p:spTree>
       <p:nvGrpSpPr>
@@ -4327,12 +4369,12 @@
       </p:grpSpPr>
       <p:sp>
         <p:nvSpPr>
-          <p:cNvPr name="Freeform 2" id="2"/>
+          <p:cNvPr id="2" name="Freeform 2"/>
           <p:cNvSpPr/>
           <p:nvPr/>
         </p:nvSpPr>
         <p:spPr>
-          <a:xfrm flipH="false" flipV="false" rot="5400000">
+          <a:xfrm rot="5400000">
             <a:off x="4000500" y="-4000500"/>
             <a:ext cx="10287000" cy="18288000"/>
           </a:xfrm>
@@ -4341,9 +4383,9 @@
             <a:gdLst/>
             <a:ahLst/>
             <a:cxnLst/>
-            <a:rect r="r" b="b" t="t" l="l"/>
+            <a:rect l="l" t="t" r="r" b="b"/>
             <a:pathLst>
-              <a:path h="18288000" w="10287000">
+              <a:path w="10287000" h="18288000">
                 <a:moveTo>
                   <a:pt x="0" y="18288000"/>
                 </a:moveTo>
@@ -4366,19 +4408,26 @@
           <a:blipFill>
             <a:blip r:embed="rId2"/>
             <a:stretch>
-              <a:fillRect l="-12888" t="0" r="-12888" b="0"/>
+              <a:fillRect l="-12888" r="-12888"/>
             </a:stretch>
           </a:blipFill>
         </p:spPr>
+        <p:txBody>
+          <a:bodyPr/>
+          <a:lstStyle/>
+          <a:p>
+            <a:endParaRPr lang="es-ES"/>
+          </a:p>
+        </p:txBody>
       </p:sp>
       <p:grpSp>
         <p:nvGrpSpPr>
-          <p:cNvPr name="Group 3" id="3"/>
+          <p:cNvPr id="3" name="Group 3"/>
           <p:cNvGrpSpPr/>
           <p:nvPr/>
         </p:nvGrpSpPr>
         <p:grpSpPr>
-          <a:xfrm rot="0">
+          <a:xfrm>
             <a:off x="524696" y="3508244"/>
             <a:ext cx="1810086" cy="872615"/>
             <a:chOff x="0" y="0"/>
@@ -4387,12 +4436,12 @@
         </p:grpSpPr>
         <p:sp>
           <p:nvSpPr>
-            <p:cNvPr name="Freeform 4" id="4"/>
+            <p:cNvPr id="4" name="Freeform 4"/>
             <p:cNvSpPr/>
             <p:nvPr/>
           </p:nvSpPr>
           <p:spPr>
-            <a:xfrm flipH="false" flipV="false" rot="0">
+            <a:xfrm>
               <a:off x="0" y="0"/>
               <a:ext cx="533435" cy="257161"/>
             </a:xfrm>
@@ -4401,9 +4450,9 @@
               <a:gdLst/>
               <a:ahLst/>
               <a:cxnLst/>
-              <a:rect r="r" b="b" t="t" l="l"/>
+              <a:rect l="l" t="t" r="r" b="b"/>
               <a:pathLst>
-                <a:path h="257161" w="533435">
+                <a:path w="533435" h="257161">
                   <a:moveTo>
                     <a:pt x="68434" y="0"/>
                   </a:moveTo>
@@ -4467,11 +4516,18 @@
               <a:srgbClr val="FF3131"/>
             </a:solidFill>
           </p:spPr>
+          <p:txBody>
+            <a:bodyPr/>
+            <a:lstStyle/>
+            <a:p>
+              <a:endParaRPr lang="es-ES"/>
+            </a:p>
+          </p:txBody>
         </p:sp>
         <p:sp>
           <p:nvSpPr>
-            <p:cNvPr name="TextBox 5" id="5"/>
-            <p:cNvSpPr txBox="true"/>
+            <p:cNvPr id="5" name="TextBox 5"/>
+            <p:cNvSpPr txBox="1"/>
             <p:nvPr/>
           </p:nvSpPr>
           <p:spPr>
@@ -4484,7 +4540,7 @@
             </a:prstGeom>
           </p:spPr>
           <p:txBody>
-            <a:bodyPr anchor="ctr" rtlCol="false" tIns="50800" lIns="50800" bIns="50800" rIns="50800"/>
+            <a:bodyPr lIns="50800" tIns="50800" rIns="50800" bIns="50800" rtlCol="0" anchor="ctr"/>
             <a:lstStyle/>
             <a:p>
               <a:pPr algn="ctr">
@@ -4492,18 +4548,19 @@
                   <a:spcPts val="3254"/>
                 </a:lnSpc>
               </a:pPr>
+              <a:endParaRPr/>
             </a:p>
           </p:txBody>
         </p:sp>
       </p:grpSp>
       <p:grpSp>
         <p:nvGrpSpPr>
-          <p:cNvPr name="Group 6" id="6"/>
+          <p:cNvPr id="6" name="Group 6"/>
           <p:cNvGrpSpPr/>
           <p:nvPr/>
         </p:nvGrpSpPr>
         <p:grpSpPr>
-          <a:xfrm rot="0">
+          <a:xfrm>
             <a:off x="476842" y="7736237"/>
             <a:ext cx="3715880" cy="2258906"/>
             <a:chOff x="0" y="0"/>
@@ -4512,12 +4569,12 @@
         </p:grpSpPr>
         <p:sp>
           <p:nvSpPr>
-            <p:cNvPr name="Freeform 7" id="7"/>
+            <p:cNvPr id="7" name="Freeform 7"/>
             <p:cNvSpPr/>
             <p:nvPr/>
           </p:nvSpPr>
           <p:spPr>
-            <a:xfrm flipH="false" flipV="false" rot="0">
+            <a:xfrm>
               <a:off x="0" y="0"/>
               <a:ext cx="1095075" cy="665702"/>
             </a:xfrm>
@@ -4526,9 +4583,9 @@
               <a:gdLst/>
               <a:ahLst/>
               <a:cxnLst/>
-              <a:rect r="r" b="b" t="t" l="l"/>
+              <a:rect l="l" t="t" r="r" b="b"/>
               <a:pathLst>
-                <a:path h="665702" w="1095075">
+                <a:path w="1095075" h="665702">
                   <a:moveTo>
                     <a:pt x="33335" y="0"/>
                   </a:moveTo>
@@ -4594,11 +4651,18 @@
               <a:miter/>
             </a:ln>
           </p:spPr>
+          <p:txBody>
+            <a:bodyPr/>
+            <a:lstStyle/>
+            <a:p>
+              <a:endParaRPr lang="es-ES"/>
+            </a:p>
+          </p:txBody>
         </p:sp>
         <p:sp>
           <p:nvSpPr>
-            <p:cNvPr name="TextBox 8" id="8"/>
-            <p:cNvSpPr txBox="true"/>
+            <p:cNvPr id="8" name="TextBox 8"/>
+            <p:cNvSpPr txBox="1"/>
             <p:nvPr/>
           </p:nvSpPr>
           <p:spPr>
@@ -4611,7 +4675,7 @@
             </a:prstGeom>
           </p:spPr>
           <p:txBody>
-            <a:bodyPr anchor="ctr" rtlCol="false" tIns="50800" lIns="50800" bIns="50800" rIns="50800"/>
+            <a:bodyPr lIns="50800" tIns="50800" rIns="50800" bIns="50800" rtlCol="0" anchor="ctr"/>
             <a:lstStyle/>
             <a:p>
               <a:pPr algn="ctr">
@@ -4619,18 +4683,19 @@
                   <a:spcPts val="3254"/>
                 </a:lnSpc>
               </a:pPr>
+              <a:endParaRPr/>
             </a:p>
           </p:txBody>
         </p:sp>
       </p:grpSp>
       <p:grpSp>
         <p:nvGrpSpPr>
-          <p:cNvPr name="Group 9" id="9"/>
+          <p:cNvPr id="9" name="Group 9"/>
           <p:cNvGrpSpPr/>
           <p:nvPr/>
         </p:nvGrpSpPr>
         <p:grpSpPr>
-          <a:xfrm rot="0">
+          <a:xfrm>
             <a:off x="524696" y="1002035"/>
             <a:ext cx="3677460" cy="2333935"/>
             <a:chOff x="0" y="0"/>
@@ -4639,12 +4704,12 @@
         </p:grpSpPr>
         <p:sp>
           <p:nvSpPr>
-            <p:cNvPr name="Freeform 10" id="10"/>
+            <p:cNvPr id="10" name="Freeform 10"/>
             <p:cNvSpPr/>
             <p:nvPr/>
           </p:nvSpPr>
           <p:spPr>
-            <a:xfrm flipH="false" flipV="false" rot="0">
+            <a:xfrm>
               <a:off x="0" y="0"/>
               <a:ext cx="1083752" cy="687814"/>
             </a:xfrm>
@@ -4653,9 +4718,9 @@
               <a:gdLst/>
               <a:ahLst/>
               <a:cxnLst/>
-              <a:rect r="r" b="b" t="t" l="l"/>
+              <a:rect l="l" t="t" r="r" b="b"/>
               <a:pathLst>
-                <a:path h="687814" w="1083752">
+                <a:path w="1083752" h="687814">
                   <a:moveTo>
                     <a:pt x="33684" y="0"/>
                   </a:moveTo>
@@ -4699,11 +4764,18 @@
               <a:srgbClr val="FF3131"/>
             </a:solidFill>
           </p:spPr>
+          <p:txBody>
+            <a:bodyPr/>
+            <a:lstStyle/>
+            <a:p>
+              <a:endParaRPr lang="es-ES"/>
+            </a:p>
+          </p:txBody>
         </p:sp>
         <p:sp>
           <p:nvSpPr>
-            <p:cNvPr name="TextBox 11" id="11"/>
-            <p:cNvSpPr txBox="true"/>
+            <p:cNvPr id="11" name="TextBox 11"/>
+            <p:cNvSpPr txBox="1"/>
             <p:nvPr/>
           </p:nvSpPr>
           <p:spPr>
@@ -4716,7 +4788,7 @@
             </a:prstGeom>
           </p:spPr>
           <p:txBody>
-            <a:bodyPr anchor="ctr" rtlCol="false" tIns="50800" lIns="50800" bIns="50800" rIns="50800"/>
+            <a:bodyPr lIns="50800" tIns="50800" rIns="50800" bIns="50800" rtlCol="0" anchor="ctr"/>
             <a:lstStyle/>
             <a:p>
               <a:pPr algn="ctr">
@@ -4724,15 +4796,16 @@
                   <a:spcPts val="3254"/>
                 </a:lnSpc>
               </a:pPr>
+              <a:endParaRPr/>
             </a:p>
           </p:txBody>
         </p:sp>
       </p:grpSp>
       <p:pic>
         <p:nvPicPr>
-          <p:cNvPr name="Picture 12" id="12"/>
+          <p:cNvPr id="12" name="Picture 12"/>
           <p:cNvPicPr>
-            <a:picLocks noChangeAspect="true"/>
+            <a:picLocks noChangeAspect="1"/>
           </p:cNvPicPr>
           <p:nvPr/>
         </p:nvPicPr>
@@ -4743,7 +4816,7 @@
           </a:stretch>
         </p:blipFill>
         <p:spPr>
-          <a:xfrm rot="0">
+          <a:xfrm>
             <a:off x="1313991" y="2048373"/>
             <a:ext cx="2361943" cy="1377800"/>
           </a:xfrm>
@@ -4754,12 +4827,12 @@
       </p:pic>
       <p:grpSp>
         <p:nvGrpSpPr>
-          <p:cNvPr name="Group 13" id="13"/>
+          <p:cNvPr id="13" name="Group 13"/>
           <p:cNvGrpSpPr/>
           <p:nvPr/>
         </p:nvGrpSpPr>
         <p:grpSpPr>
-          <a:xfrm rot="0">
+          <a:xfrm>
             <a:off x="2397272" y="3496242"/>
             <a:ext cx="1810086" cy="872615"/>
             <a:chOff x="0" y="0"/>
@@ -4768,12 +4841,12 @@
         </p:grpSpPr>
         <p:sp>
           <p:nvSpPr>
-            <p:cNvPr name="Freeform 14" id="14"/>
+            <p:cNvPr id="14" name="Freeform 14"/>
             <p:cNvSpPr/>
             <p:nvPr/>
           </p:nvSpPr>
           <p:spPr>
-            <a:xfrm flipH="false" flipV="false" rot="0">
+            <a:xfrm>
               <a:off x="0" y="0"/>
               <a:ext cx="533435" cy="257161"/>
             </a:xfrm>
@@ -4782,9 +4855,9 @@
               <a:gdLst/>
               <a:ahLst/>
               <a:cxnLst/>
-              <a:rect r="r" b="b" t="t" l="l"/>
+              <a:rect l="l" t="t" r="r" b="b"/>
               <a:pathLst>
-                <a:path h="257161" w="533435">
+                <a:path w="533435" h="257161">
                   <a:moveTo>
                     <a:pt x="68434" y="0"/>
                   </a:moveTo>
@@ -4848,11 +4921,18 @@
               <a:srgbClr val="65A6FA"/>
             </a:solidFill>
           </p:spPr>
+          <p:txBody>
+            <a:bodyPr/>
+            <a:lstStyle/>
+            <a:p>
+              <a:endParaRPr lang="es-ES"/>
+            </a:p>
+          </p:txBody>
         </p:sp>
         <p:sp>
           <p:nvSpPr>
-            <p:cNvPr name="TextBox 15" id="15"/>
-            <p:cNvSpPr txBox="true"/>
+            <p:cNvPr id="15" name="TextBox 15"/>
+            <p:cNvSpPr txBox="1"/>
             <p:nvPr/>
           </p:nvSpPr>
           <p:spPr>
@@ -4865,7 +4945,7 @@
             </a:prstGeom>
           </p:spPr>
           <p:txBody>
-            <a:bodyPr anchor="ctr" rtlCol="false" tIns="50800" lIns="50800" bIns="50800" rIns="50800"/>
+            <a:bodyPr lIns="50800" tIns="50800" rIns="50800" bIns="50800" rtlCol="0" anchor="ctr"/>
             <a:lstStyle/>
             <a:p>
               <a:pPr algn="ctr">
@@ -4891,12 +4971,12 @@
       </p:grpSp>
       <p:grpSp>
         <p:nvGrpSpPr>
-          <p:cNvPr name="Group 16" id="16"/>
+          <p:cNvPr id="16" name="Group 16"/>
           <p:cNvGrpSpPr/>
           <p:nvPr/>
         </p:nvGrpSpPr>
         <p:grpSpPr>
-          <a:xfrm rot="0">
+          <a:xfrm>
             <a:off x="527179" y="4469062"/>
             <a:ext cx="1810086" cy="872615"/>
             <a:chOff x="0" y="0"/>
@@ -4905,12 +4985,12 @@
         </p:grpSpPr>
         <p:sp>
           <p:nvSpPr>
-            <p:cNvPr name="Freeform 17" id="17"/>
+            <p:cNvPr id="17" name="Freeform 17"/>
             <p:cNvSpPr/>
             <p:nvPr/>
           </p:nvSpPr>
           <p:spPr>
-            <a:xfrm flipH="false" flipV="false" rot="0">
+            <a:xfrm>
               <a:off x="0" y="0"/>
               <a:ext cx="533435" cy="257161"/>
             </a:xfrm>
@@ -4919,9 +4999,9 @@
               <a:gdLst/>
               <a:ahLst/>
               <a:cxnLst/>
-              <a:rect r="r" b="b" t="t" l="l"/>
+              <a:rect l="l" t="t" r="r" b="b"/>
               <a:pathLst>
-                <a:path h="257161" w="533435">
+                <a:path w="533435" h="257161">
                   <a:moveTo>
                     <a:pt x="68434" y="0"/>
                   </a:moveTo>
@@ -4985,11 +5065,18 @@
               <a:srgbClr val="FF3131"/>
             </a:solidFill>
           </p:spPr>
+          <p:txBody>
+            <a:bodyPr/>
+            <a:lstStyle/>
+            <a:p>
+              <a:endParaRPr lang="es-ES"/>
+            </a:p>
+          </p:txBody>
         </p:sp>
         <p:sp>
           <p:nvSpPr>
-            <p:cNvPr name="TextBox 18" id="18"/>
-            <p:cNvSpPr txBox="true"/>
+            <p:cNvPr id="18" name="TextBox 18"/>
+            <p:cNvSpPr txBox="1"/>
             <p:nvPr/>
           </p:nvSpPr>
           <p:spPr>
@@ -5002,7 +5089,7 @@
             </a:prstGeom>
           </p:spPr>
           <p:txBody>
-            <a:bodyPr anchor="ctr" rtlCol="false" tIns="50800" lIns="50800" bIns="50800" rIns="50800"/>
+            <a:bodyPr lIns="50800" tIns="50800" rIns="50800" bIns="50800" rtlCol="0" anchor="ctr"/>
             <a:lstStyle/>
             <a:p>
               <a:pPr algn="ctr">
@@ -5010,18 +5097,19 @@
                   <a:spcPts val="3254"/>
                 </a:lnSpc>
               </a:pPr>
+              <a:endParaRPr/>
             </a:p>
           </p:txBody>
         </p:sp>
       </p:grpSp>
       <p:grpSp>
         <p:nvGrpSpPr>
-          <p:cNvPr name="Group 19" id="19"/>
+          <p:cNvPr id="19" name="Group 19"/>
           <p:cNvGrpSpPr/>
           <p:nvPr/>
         </p:nvGrpSpPr>
         <p:grpSpPr>
-          <a:xfrm rot="0">
+          <a:xfrm>
             <a:off x="2399755" y="4457060"/>
             <a:ext cx="1810086" cy="872615"/>
             <a:chOff x="0" y="0"/>
@@ -5030,12 +5118,12 @@
         </p:grpSpPr>
         <p:sp>
           <p:nvSpPr>
-            <p:cNvPr name="Freeform 20" id="20"/>
+            <p:cNvPr id="20" name="Freeform 20"/>
             <p:cNvSpPr/>
             <p:nvPr/>
           </p:nvSpPr>
           <p:spPr>
-            <a:xfrm flipH="false" flipV="false" rot="0">
+            <a:xfrm>
               <a:off x="0" y="0"/>
               <a:ext cx="533435" cy="257161"/>
             </a:xfrm>
@@ -5044,9 +5132,9 @@
               <a:gdLst/>
               <a:ahLst/>
               <a:cxnLst/>
-              <a:rect r="r" b="b" t="t" l="l"/>
+              <a:rect l="l" t="t" r="r" b="b"/>
               <a:pathLst>
-                <a:path h="257161" w="533435">
+                <a:path w="533435" h="257161">
                   <a:moveTo>
                     <a:pt x="68434" y="0"/>
                   </a:moveTo>
@@ -5110,11 +5198,18 @@
               <a:srgbClr val="65A6FA"/>
             </a:solidFill>
           </p:spPr>
+          <p:txBody>
+            <a:bodyPr/>
+            <a:lstStyle/>
+            <a:p>
+              <a:endParaRPr lang="es-ES"/>
+            </a:p>
+          </p:txBody>
         </p:sp>
         <p:sp>
           <p:nvSpPr>
-            <p:cNvPr name="TextBox 21" id="21"/>
-            <p:cNvSpPr txBox="true"/>
+            <p:cNvPr id="21" name="TextBox 21"/>
+            <p:cNvSpPr txBox="1"/>
             <p:nvPr/>
           </p:nvSpPr>
           <p:spPr>
@@ -5127,7 +5222,7 @@
             </a:prstGeom>
           </p:spPr>
           <p:txBody>
-            <a:bodyPr anchor="ctr" rtlCol="false" tIns="50800" lIns="50800" bIns="50800" rIns="50800"/>
+            <a:bodyPr lIns="50800" tIns="50800" rIns="50800" bIns="50800" rtlCol="0" anchor="ctr"/>
             <a:lstStyle/>
             <a:p>
               <a:pPr algn="ctr">
@@ -5153,12 +5248,12 @@
       </p:grpSp>
       <p:grpSp>
         <p:nvGrpSpPr>
-          <p:cNvPr name="Group 22" id="22"/>
+          <p:cNvPr id="22" name="Group 22"/>
           <p:cNvGrpSpPr/>
           <p:nvPr/>
         </p:nvGrpSpPr>
         <p:grpSpPr>
-          <a:xfrm rot="0">
+          <a:xfrm>
             <a:off x="476842" y="6069981"/>
             <a:ext cx="3677460" cy="1523380"/>
             <a:chOff x="0" y="0"/>
@@ -5167,12 +5262,12 @@
         </p:grpSpPr>
         <p:sp>
           <p:nvSpPr>
-            <p:cNvPr name="Freeform 23" id="23"/>
+            <p:cNvPr id="23" name="Freeform 23"/>
             <p:cNvSpPr/>
             <p:nvPr/>
           </p:nvSpPr>
           <p:spPr>
-            <a:xfrm flipH="false" flipV="false" rot="0">
+            <a:xfrm>
               <a:off x="0" y="0"/>
               <a:ext cx="1083752" cy="448942"/>
             </a:xfrm>
@@ -5181,9 +5276,9 @@
               <a:gdLst/>
               <a:ahLst/>
               <a:cxnLst/>
-              <a:rect r="r" b="b" t="t" l="l"/>
+              <a:rect l="l" t="t" r="r" b="b"/>
               <a:pathLst>
-                <a:path h="448942" w="1083752">
+                <a:path w="1083752" h="448942">
                   <a:moveTo>
                     <a:pt x="33684" y="0"/>
                   </a:moveTo>
@@ -5234,11 +5329,18 @@
               <a:miter/>
             </a:ln>
           </p:spPr>
+          <p:txBody>
+            <a:bodyPr/>
+            <a:lstStyle/>
+            <a:p>
+              <a:endParaRPr lang="es-ES"/>
+            </a:p>
+          </p:txBody>
         </p:sp>
         <p:sp>
           <p:nvSpPr>
-            <p:cNvPr name="TextBox 24" id="24"/>
-            <p:cNvSpPr txBox="true"/>
+            <p:cNvPr id="24" name="TextBox 24"/>
+            <p:cNvSpPr txBox="1"/>
             <p:nvPr/>
           </p:nvSpPr>
           <p:spPr>
@@ -5251,7 +5353,7 @@
             </a:prstGeom>
           </p:spPr>
           <p:txBody>
-            <a:bodyPr anchor="ctr" rtlCol="false" tIns="50800" lIns="50800" bIns="50800" rIns="50800"/>
+            <a:bodyPr lIns="50800" tIns="50800" rIns="50800" bIns="50800" rtlCol="0" anchor="ctr"/>
             <a:lstStyle/>
             <a:p>
               <a:pPr algn="ctr">
@@ -5259,18 +5361,19 @@
                   <a:spcPts val="3254"/>
                 </a:lnSpc>
               </a:pPr>
+              <a:endParaRPr/>
             </a:p>
           </p:txBody>
         </p:sp>
       </p:grpSp>
       <p:grpSp>
         <p:nvGrpSpPr>
-          <p:cNvPr name="Group 25" id="25"/>
+          <p:cNvPr id="25" name="Group 25"/>
           <p:cNvGrpSpPr/>
           <p:nvPr/>
         </p:nvGrpSpPr>
         <p:grpSpPr>
-          <a:xfrm rot="0">
+          <a:xfrm>
             <a:off x="4694220" y="7558243"/>
             <a:ext cx="5096314" cy="2478460"/>
             <a:chOff x="0" y="0"/>
@@ -5279,12 +5382,12 @@
         </p:grpSpPr>
         <p:sp>
           <p:nvSpPr>
-            <p:cNvPr name="Freeform 26" id="26"/>
+            <p:cNvPr id="26" name="Freeform 26"/>
             <p:cNvSpPr/>
             <p:nvPr/>
           </p:nvSpPr>
           <p:spPr>
-            <a:xfrm flipH="false" flipV="false" rot="0">
+            <a:xfrm>
               <a:off x="0" y="0"/>
               <a:ext cx="1501890" cy="730406"/>
             </a:xfrm>
@@ -5293,9 +5396,9 @@
               <a:gdLst/>
               <a:ahLst/>
               <a:cxnLst/>
-              <a:rect r="r" b="b" t="t" l="l"/>
+              <a:rect l="l" t="t" r="r" b="b"/>
               <a:pathLst>
-                <a:path h="730406" w="1501890">
+                <a:path w="1501890" h="730406">
                   <a:moveTo>
                     <a:pt x="24306" y="0"/>
                   </a:moveTo>
@@ -5346,11 +5449,18 @@
               <a:miter/>
             </a:ln>
           </p:spPr>
+          <p:txBody>
+            <a:bodyPr/>
+            <a:lstStyle/>
+            <a:p>
+              <a:endParaRPr lang="es-ES"/>
+            </a:p>
+          </p:txBody>
         </p:sp>
         <p:sp>
           <p:nvSpPr>
-            <p:cNvPr name="TextBox 27" id="27"/>
-            <p:cNvSpPr txBox="true"/>
+            <p:cNvPr id="27" name="TextBox 27"/>
+            <p:cNvSpPr txBox="1"/>
             <p:nvPr/>
           </p:nvSpPr>
           <p:spPr>
@@ -5363,7 +5473,7 @@
             </a:prstGeom>
           </p:spPr>
           <p:txBody>
-            <a:bodyPr anchor="ctr" rtlCol="false" tIns="50800" lIns="50800" bIns="50800" rIns="50800"/>
+            <a:bodyPr lIns="50800" tIns="50800" rIns="50800" bIns="50800" rtlCol="0" anchor="ctr"/>
             <a:lstStyle/>
             <a:p>
               <a:pPr algn="ctr">
@@ -5371,18 +5481,19 @@
                   <a:spcPts val="3254"/>
                 </a:lnSpc>
               </a:pPr>
+              <a:endParaRPr/>
             </a:p>
           </p:txBody>
         </p:sp>
       </p:grpSp>
       <p:grpSp>
         <p:nvGrpSpPr>
-          <p:cNvPr name="Group 28" id="28"/>
+          <p:cNvPr id="28" name="Group 28"/>
           <p:cNvGrpSpPr/>
           <p:nvPr/>
         </p:nvGrpSpPr>
         <p:grpSpPr>
-          <a:xfrm rot="0">
+          <a:xfrm>
             <a:off x="10171534" y="7271979"/>
             <a:ext cx="8048636" cy="3015021"/>
             <a:chOff x="0" y="0"/>
@@ -5391,12 +5502,12 @@
         </p:grpSpPr>
         <p:sp>
           <p:nvSpPr>
-            <p:cNvPr name="Freeform 29" id="29"/>
+            <p:cNvPr id="29" name="Freeform 29"/>
             <p:cNvSpPr/>
             <p:nvPr/>
           </p:nvSpPr>
           <p:spPr>
-            <a:xfrm flipH="false" flipV="false" rot="0">
+            <a:xfrm>
               <a:off x="0" y="0"/>
               <a:ext cx="2371943" cy="888531"/>
             </a:xfrm>
@@ -5405,9 +5516,9 @@
               <a:gdLst/>
               <a:ahLst/>
               <a:cxnLst/>
-              <a:rect r="r" b="b" t="t" l="l"/>
+              <a:rect l="l" t="t" r="r" b="b"/>
               <a:pathLst>
-                <a:path h="888531" w="2371943">
+                <a:path w="2371943" h="888531">
                   <a:moveTo>
                     <a:pt x="15390" y="0"/>
                   </a:moveTo>
@@ -5463,11 +5574,18 @@
               <a:miter/>
             </a:ln>
           </p:spPr>
+          <p:txBody>
+            <a:bodyPr/>
+            <a:lstStyle/>
+            <a:p>
+              <a:endParaRPr lang="es-ES"/>
+            </a:p>
+          </p:txBody>
         </p:sp>
         <p:sp>
           <p:nvSpPr>
-            <p:cNvPr name="TextBox 30" id="30"/>
-            <p:cNvSpPr txBox="true"/>
+            <p:cNvPr id="30" name="TextBox 30"/>
+            <p:cNvSpPr txBox="1"/>
             <p:nvPr/>
           </p:nvSpPr>
           <p:spPr>
@@ -5480,7 +5598,7 @@
             </a:prstGeom>
           </p:spPr>
           <p:txBody>
-            <a:bodyPr anchor="ctr" rtlCol="false" tIns="50800" lIns="50800" bIns="50800" rIns="50800"/>
+            <a:bodyPr lIns="50800" tIns="50800" rIns="50800" bIns="50800" rtlCol="0" anchor="ctr"/>
             <a:lstStyle/>
             <a:p>
               <a:pPr algn="ctr">
@@ -5488,18 +5606,19 @@
                   <a:spcPts val="3254"/>
                 </a:lnSpc>
               </a:pPr>
+              <a:endParaRPr/>
             </a:p>
           </p:txBody>
         </p:sp>
       </p:grpSp>
       <p:grpSp>
         <p:nvGrpSpPr>
-          <p:cNvPr name="Group 31" id="31"/>
+          <p:cNvPr id="31" name="Group 31"/>
           <p:cNvGrpSpPr/>
           <p:nvPr/>
         </p:nvGrpSpPr>
         <p:grpSpPr>
-          <a:xfrm rot="0">
+          <a:xfrm>
             <a:off x="10492356" y="8185454"/>
             <a:ext cx="798402" cy="798651"/>
             <a:chOff x="0" y="0"/>
@@ -5508,12 +5627,12 @@
         </p:grpSpPr>
         <p:sp>
           <p:nvSpPr>
-            <p:cNvPr name="Freeform 32" id="32"/>
+            <p:cNvPr id="32" name="Freeform 32"/>
             <p:cNvSpPr/>
             <p:nvPr/>
           </p:nvSpPr>
           <p:spPr>
-            <a:xfrm flipH="false" flipV="false" rot="0">
+            <a:xfrm>
               <a:off x="0" y="0"/>
               <a:ext cx="235290" cy="235364"/>
             </a:xfrm>
@@ -5522,9 +5641,9 @@
               <a:gdLst/>
               <a:ahLst/>
               <a:cxnLst/>
-              <a:rect r="r" b="b" t="t" l="l"/>
+              <a:rect l="l" t="t" r="r" b="b"/>
               <a:pathLst>
-                <a:path h="235364" w="235290">
+                <a:path w="235290" h="235364">
                   <a:moveTo>
                     <a:pt x="117645" y="0"/>
                   </a:moveTo>
@@ -5575,11 +5694,18 @@
               <a:miter/>
             </a:ln>
           </p:spPr>
+          <p:txBody>
+            <a:bodyPr/>
+            <a:lstStyle/>
+            <a:p>
+              <a:endParaRPr lang="es-ES"/>
+            </a:p>
+          </p:txBody>
         </p:sp>
         <p:sp>
           <p:nvSpPr>
-            <p:cNvPr name="TextBox 33" id="33"/>
-            <p:cNvSpPr txBox="true"/>
+            <p:cNvPr id="33" name="TextBox 33"/>
+            <p:cNvSpPr txBox="1"/>
             <p:nvPr/>
           </p:nvSpPr>
           <p:spPr>
@@ -5592,7 +5718,7 @@
             </a:prstGeom>
           </p:spPr>
           <p:txBody>
-            <a:bodyPr anchor="ctr" rtlCol="false" tIns="50800" lIns="50800" bIns="50800" rIns="50800"/>
+            <a:bodyPr lIns="50800" tIns="50800" rIns="50800" bIns="50800" rtlCol="0" anchor="ctr"/>
             <a:lstStyle/>
             <a:p>
               <a:pPr algn="ctr">
@@ -5600,18 +5726,19 @@
                   <a:spcPts val="3254"/>
                 </a:lnSpc>
               </a:pPr>
+              <a:endParaRPr/>
             </a:p>
           </p:txBody>
         </p:sp>
       </p:grpSp>
       <p:grpSp>
         <p:nvGrpSpPr>
-          <p:cNvPr name="Group 34" id="34"/>
+          <p:cNvPr id="34" name="Group 34"/>
           <p:cNvGrpSpPr/>
           <p:nvPr/>
         </p:nvGrpSpPr>
         <p:grpSpPr>
-          <a:xfrm rot="0">
+          <a:xfrm>
             <a:off x="2735880" y="7114874"/>
             <a:ext cx="355135" cy="355135"/>
             <a:chOff x="0" y="0"/>
@@ -5620,12 +5747,12 @@
         </p:grpSpPr>
         <p:sp>
           <p:nvSpPr>
-            <p:cNvPr name="Freeform 35" id="35"/>
+            <p:cNvPr id="35" name="Freeform 35"/>
             <p:cNvSpPr/>
             <p:nvPr/>
           </p:nvSpPr>
           <p:spPr>
-            <a:xfrm flipH="false" flipV="false" rot="0">
+            <a:xfrm>
               <a:off x="0" y="0"/>
               <a:ext cx="812800" cy="812800"/>
             </a:xfrm>
@@ -5634,9 +5761,9 @@
               <a:gdLst/>
               <a:ahLst/>
               <a:cxnLst/>
-              <a:rect r="r" b="b" t="t" l="l"/>
+              <a:rect l="l" t="t" r="r" b="b"/>
               <a:pathLst>
-                <a:path h="812800" w="812800">
+                <a:path w="812800" h="812800">
                   <a:moveTo>
                     <a:pt x="406400" y="0"/>
                   </a:moveTo>
@@ -5668,11 +5795,18 @@
               <a:srgbClr val="FF3131"/>
             </a:solidFill>
           </p:spPr>
+          <p:txBody>
+            <a:bodyPr/>
+            <a:lstStyle/>
+            <a:p>
+              <a:endParaRPr lang="es-ES"/>
+            </a:p>
+          </p:txBody>
         </p:sp>
         <p:sp>
           <p:nvSpPr>
-            <p:cNvPr name="TextBox 36" id="36"/>
-            <p:cNvSpPr txBox="true"/>
+            <p:cNvPr id="36" name="TextBox 36"/>
+            <p:cNvSpPr txBox="1"/>
             <p:nvPr/>
           </p:nvSpPr>
           <p:spPr>
@@ -5685,7 +5819,7 @@
             </a:prstGeom>
           </p:spPr>
           <p:txBody>
-            <a:bodyPr anchor="ctr" rtlCol="false" tIns="50800" lIns="50800" bIns="50800" rIns="50800"/>
+            <a:bodyPr lIns="50800" tIns="50800" rIns="50800" bIns="50800" rtlCol="0" anchor="ctr"/>
             <a:lstStyle/>
             <a:p>
               <a:pPr algn="ctr">
@@ -5693,18 +5827,19 @@
                   <a:spcPts val="2210"/>
                 </a:lnSpc>
               </a:pPr>
+              <a:endParaRPr/>
             </a:p>
           </p:txBody>
         </p:sp>
       </p:grpSp>
       <p:grpSp>
         <p:nvGrpSpPr>
-          <p:cNvPr name="Group 37" id="37"/>
+          <p:cNvPr id="37" name="Group 37"/>
           <p:cNvGrpSpPr/>
           <p:nvPr/>
         </p:nvGrpSpPr>
         <p:grpSpPr>
-          <a:xfrm rot="0">
+          <a:xfrm>
             <a:off x="3166537" y="9482830"/>
             <a:ext cx="355135" cy="355135"/>
             <a:chOff x="0" y="0"/>
@@ -5713,12 +5848,12 @@
         </p:grpSpPr>
         <p:sp>
           <p:nvSpPr>
-            <p:cNvPr name="Freeform 38" id="38"/>
+            <p:cNvPr id="38" name="Freeform 38"/>
             <p:cNvSpPr/>
             <p:nvPr/>
           </p:nvSpPr>
           <p:spPr>
-            <a:xfrm flipH="false" flipV="false" rot="0">
+            <a:xfrm>
               <a:off x="0" y="0"/>
               <a:ext cx="812800" cy="812800"/>
             </a:xfrm>
@@ -5727,9 +5862,9 @@
               <a:gdLst/>
               <a:ahLst/>
               <a:cxnLst/>
-              <a:rect r="r" b="b" t="t" l="l"/>
+              <a:rect l="l" t="t" r="r" b="b"/>
               <a:pathLst>
-                <a:path h="812800" w="812800">
+                <a:path w="812800" h="812800">
                   <a:moveTo>
                     <a:pt x="406400" y="0"/>
                   </a:moveTo>
@@ -5761,11 +5896,18 @@
               <a:srgbClr val="FF3131"/>
             </a:solidFill>
           </p:spPr>
+          <p:txBody>
+            <a:bodyPr/>
+            <a:lstStyle/>
+            <a:p>
+              <a:endParaRPr lang="es-ES"/>
+            </a:p>
+          </p:txBody>
         </p:sp>
         <p:sp>
           <p:nvSpPr>
-            <p:cNvPr name="TextBox 39" id="39"/>
-            <p:cNvSpPr txBox="true"/>
+            <p:cNvPr id="39" name="TextBox 39"/>
+            <p:cNvSpPr txBox="1"/>
             <p:nvPr/>
           </p:nvSpPr>
           <p:spPr>
@@ -5778,7 +5920,7 @@
             </a:prstGeom>
           </p:spPr>
           <p:txBody>
-            <a:bodyPr anchor="ctr" rtlCol="false" tIns="50800" lIns="50800" bIns="50800" rIns="50800"/>
+            <a:bodyPr lIns="50800" tIns="50800" rIns="50800" bIns="50800" rtlCol="0" anchor="ctr"/>
             <a:lstStyle/>
             <a:p>
               <a:pPr algn="ctr">
@@ -5786,18 +5928,19 @@
                   <a:spcPts val="2210"/>
                 </a:lnSpc>
               </a:pPr>
+              <a:endParaRPr/>
             </a:p>
           </p:txBody>
         </p:sp>
       </p:grpSp>
       <p:sp>
         <p:nvSpPr>
-          <p:cNvPr name="Freeform 40" id="40"/>
+          <p:cNvPr id="40" name="Freeform 40"/>
           <p:cNvSpPr/>
           <p:nvPr/>
         </p:nvSpPr>
         <p:spPr>
-          <a:xfrm flipH="false" flipV="false" rot="0">
+          <a:xfrm>
             <a:off x="5709086" y="813752"/>
             <a:ext cx="8924897" cy="6478922"/>
           </a:xfrm>
@@ -5806,9 +5949,9 @@
             <a:gdLst/>
             <a:ahLst/>
             <a:cxnLst/>
-            <a:rect r="r" b="b" t="t" l="l"/>
+            <a:rect l="l" t="t" r="r" b="b"/>
             <a:pathLst>
-              <a:path h="6478922" w="8924897">
+              <a:path w="8924897" h="6478922">
                 <a:moveTo>
                   <a:pt x="0" y="0"/>
                 </a:moveTo>
@@ -5831,19 +5974,26 @@
           <a:blipFill>
             <a:blip r:embed="rId4"/>
             <a:stretch>
-              <a:fillRect l="0" t="0" r="0" b="0"/>
+              <a:fillRect/>
             </a:stretch>
           </a:blipFill>
         </p:spPr>
+        <p:txBody>
+          <a:bodyPr/>
+          <a:lstStyle/>
+          <a:p>
+            <a:endParaRPr lang="es-ES"/>
+          </a:p>
+        </p:txBody>
       </p:sp>
       <p:sp>
         <p:nvSpPr>
-          <p:cNvPr name="TextBox 41" id="41"/>
-          <p:cNvSpPr txBox="true"/>
+          <p:cNvPr id="41" name="TextBox 41"/>
+          <p:cNvSpPr txBox="1"/>
           <p:nvPr/>
         </p:nvSpPr>
         <p:spPr>
-          <a:xfrm rot="0">
+          <a:xfrm>
             <a:off x="796268" y="3648070"/>
             <a:ext cx="1462994" cy="549910"/>
           </a:xfrm>
@@ -5852,7 +6002,7 @@
           </a:prstGeom>
         </p:spPr>
         <p:txBody>
-          <a:bodyPr anchor="t" rtlCol="false" tIns="0" lIns="0" bIns="0" rIns="0">
+          <a:bodyPr lIns="0" tIns="0" rIns="0" bIns="0" rtlCol="0" anchor="t">
             <a:spAutoFit/>
           </a:bodyPr>
           <a:lstStyle/>
@@ -5863,7 +6013,7 @@
               </a:lnSpc>
             </a:pPr>
             <a:r>
-              <a:rPr lang="en-US" b="true" sz="1700" spc="17">
+              <a:rPr lang="en-US" sz="1700" b="1" spc="17">
                 <a:solidFill>
                   <a:srgbClr val="DFE7F1"/>
                 </a:solidFill>
@@ -5879,12 +6029,12 @@
       </p:sp>
       <p:sp>
         <p:nvSpPr>
-          <p:cNvPr name="TextBox 42" id="42"/>
-          <p:cNvSpPr txBox="true"/>
+          <p:cNvPr id="42" name="TextBox 42"/>
+          <p:cNvSpPr txBox="1"/>
           <p:nvPr/>
         </p:nvSpPr>
         <p:spPr>
-          <a:xfrm rot="0">
+          <a:xfrm>
             <a:off x="6168075" y="-81598"/>
             <a:ext cx="6435910" cy="819150"/>
           </a:xfrm>
@@ -5893,7 +6043,7 @@
           </a:prstGeom>
         </p:spPr>
         <p:txBody>
-          <a:bodyPr anchor="t" rtlCol="false" tIns="0" lIns="0" bIns="0" rIns="0">
+          <a:bodyPr lIns="0" tIns="0" rIns="0" bIns="0" rtlCol="0" anchor="t">
             <a:spAutoFit/>
           </a:bodyPr>
           <a:lstStyle/>
@@ -5904,7 +6054,7 @@
               </a:lnSpc>
             </a:pPr>
             <a:r>
-              <a:rPr lang="en-US" sz="5400" b="true">
+              <a:rPr lang="en-US" sz="5400" b="1">
                 <a:solidFill>
                   <a:srgbClr val="006747"/>
                 </a:solidFill>
@@ -5920,12 +6070,12 @@
       </p:sp>
       <p:sp>
         <p:nvSpPr>
-          <p:cNvPr name="TextBox 43" id="43"/>
-          <p:cNvSpPr txBox="true"/>
+          <p:cNvPr id="43" name="TextBox 43"/>
+          <p:cNvSpPr txBox="1"/>
           <p:nvPr/>
         </p:nvSpPr>
         <p:spPr>
-          <a:xfrm rot="0">
+          <a:xfrm>
             <a:off x="756398" y="6137317"/>
             <a:ext cx="2178667" cy="273685"/>
           </a:xfrm>
@@ -5934,7 +6084,7 @@
           </a:prstGeom>
         </p:spPr>
         <p:txBody>
-          <a:bodyPr anchor="t" rtlCol="false" tIns="0" lIns="0" bIns="0" rIns="0">
+          <a:bodyPr lIns="0" tIns="0" rIns="0" bIns="0" rtlCol="0" anchor="t">
             <a:spAutoFit/>
           </a:bodyPr>
           <a:lstStyle/>
@@ -5945,7 +6095,7 @@
               </a:lnSpc>
             </a:pPr>
             <a:r>
-              <a:rPr lang="en-US" sz="1700" spc="17" b="true">
+              <a:rPr lang="en-US" sz="1700" b="1" spc="17">
                 <a:solidFill>
                   <a:srgbClr val="000000"/>
                 </a:solidFill>
@@ -5961,12 +6111,12 @@
       </p:sp>
       <p:sp>
         <p:nvSpPr>
-          <p:cNvPr name="TextBox 44" id="44"/>
-          <p:cNvSpPr txBox="true"/>
+          <p:cNvPr id="44" name="TextBox 44"/>
+          <p:cNvSpPr txBox="1"/>
           <p:nvPr/>
         </p:nvSpPr>
         <p:spPr>
-          <a:xfrm rot="0">
+          <a:xfrm>
             <a:off x="2729597" y="6108081"/>
             <a:ext cx="962196" cy="327025"/>
           </a:xfrm>
@@ -5975,7 +6125,7 @@
           </a:prstGeom>
         </p:spPr>
         <p:txBody>
-          <a:bodyPr anchor="t" rtlCol="false" tIns="0" lIns="0" bIns="0" rIns="0">
+          <a:bodyPr lIns="0" tIns="0" rIns="0" bIns="0" rtlCol="0" anchor="t">
             <a:spAutoFit/>
           </a:bodyPr>
           <a:lstStyle/>
@@ -5986,7 +6136,7 @@
               </a:lnSpc>
             </a:pPr>
             <a:r>
-              <a:rPr lang="en-US" sz="2000" b="true">
+              <a:rPr lang="en-US" sz="2000" b="1">
                 <a:solidFill>
                   <a:srgbClr val="FF3131"/>
                 </a:solidFill>
@@ -6002,12 +6152,12 @@
       </p:sp>
       <p:sp>
         <p:nvSpPr>
-          <p:cNvPr name="TextBox 45" id="45"/>
-          <p:cNvSpPr txBox="true"/>
+          <p:cNvPr id="45" name="TextBox 45"/>
+          <p:cNvSpPr txBox="1"/>
           <p:nvPr/>
         </p:nvSpPr>
         <p:spPr>
-          <a:xfrm rot="0">
+          <a:xfrm>
             <a:off x="1083608" y="1252434"/>
             <a:ext cx="3291978" cy="361315"/>
           </a:xfrm>
@@ -6016,7 +6166,7 @@
           </a:prstGeom>
         </p:spPr>
         <p:txBody>
-          <a:bodyPr anchor="t" rtlCol="false" tIns="0" lIns="0" bIns="0" rIns="0">
+          <a:bodyPr lIns="0" tIns="0" rIns="0" bIns="0" rtlCol="0" anchor="t">
             <a:spAutoFit/>
           </a:bodyPr>
           <a:lstStyle/>
@@ -6027,7 +6177,7 @@
               </a:lnSpc>
             </a:pPr>
             <a:r>
-              <a:rPr lang="en-US" b="true" sz="2299" spc="22">
+              <a:rPr lang="en-US" sz="2299" b="1" spc="22">
                 <a:solidFill>
                   <a:srgbClr val="EDEDED"/>
                 </a:solidFill>
@@ -6043,12 +6193,12 @@
       </p:sp>
       <p:sp>
         <p:nvSpPr>
-          <p:cNvPr name="TextBox 46" id="46"/>
-          <p:cNvSpPr txBox="true"/>
+          <p:cNvPr id="46" name="TextBox 46"/>
+          <p:cNvSpPr txBox="1"/>
           <p:nvPr/>
         </p:nvSpPr>
         <p:spPr>
-          <a:xfrm rot="0">
+          <a:xfrm>
             <a:off x="1112379" y="1659283"/>
             <a:ext cx="2439224" cy="511810"/>
           </a:xfrm>
@@ -6057,7 +6207,7 @@
           </a:prstGeom>
         </p:spPr>
         <p:txBody>
-          <a:bodyPr anchor="t" rtlCol="false" tIns="0" lIns="0" bIns="0" rIns="0">
+          <a:bodyPr lIns="0" tIns="0" rIns="0" bIns="0" rtlCol="0" anchor="t">
             <a:spAutoFit/>
           </a:bodyPr>
           <a:lstStyle/>
@@ -6068,7 +6218,7 @@
               </a:lnSpc>
             </a:pPr>
             <a:r>
-              <a:rPr lang="en-US" sz="3200" b="true">
+              <a:rPr lang="en-US" sz="3200" b="1">
                 <a:solidFill>
                   <a:srgbClr val="EDEDED"/>
                 </a:solidFill>
@@ -6077,31 +6227,19 @@
                 <a:cs typeface="Canva Sans Bold"/>
                 <a:sym typeface="Canva Sans Bold"/>
               </a:rPr>
-              <a:t>17</a:t>
-            </a:r>
-            <a:r>
-              <a:rPr lang="en-US" sz="3200" b="true">
-                <a:solidFill>
-                  <a:srgbClr val="EDEDED"/>
-                </a:solidFill>
-                <a:latin typeface="Canva Sans Bold"/>
-                <a:ea typeface="Canva Sans Bold"/>
-                <a:cs typeface="Canva Sans Bold"/>
-                <a:sym typeface="Canva Sans Bold"/>
-              </a:rPr>
-              <a:t>/10/2025</a:t>
+              <a:t>17/10/2025</a:t>
             </a:r>
           </a:p>
         </p:txBody>
       </p:sp>
       <p:sp>
         <p:nvSpPr>
-          <p:cNvPr name="TextBox 47" id="47"/>
-          <p:cNvSpPr txBox="true"/>
+          <p:cNvPr id="47" name="TextBox 47"/>
+          <p:cNvSpPr txBox="1"/>
           <p:nvPr/>
         </p:nvSpPr>
         <p:spPr>
-          <a:xfrm rot="0">
+          <a:xfrm>
             <a:off x="982598" y="4608887"/>
             <a:ext cx="1384144" cy="549910"/>
           </a:xfrm>
@@ -6110,7 +6248,7 @@
           </a:prstGeom>
         </p:spPr>
         <p:txBody>
-          <a:bodyPr anchor="t" rtlCol="false" tIns="0" lIns="0" bIns="0" rIns="0">
+          <a:bodyPr lIns="0" tIns="0" rIns="0" bIns="0" rtlCol="0" anchor="t">
             <a:spAutoFit/>
           </a:bodyPr>
           <a:lstStyle/>
@@ -6121,7 +6259,7 @@
               </a:lnSpc>
             </a:pPr>
             <a:r>
-              <a:rPr lang="en-US" b="true" sz="1700" spc="17">
+              <a:rPr lang="en-US" sz="1700" b="1" spc="17">
                 <a:solidFill>
                   <a:srgbClr val="DFE7F1"/>
                 </a:solidFill>
@@ -6140,7 +6278,7 @@
               </a:lnSpc>
             </a:pPr>
             <a:r>
-              <a:rPr lang="en-US" b="true" sz="1700" spc="17">
+              <a:rPr lang="en-US" sz="1700" b="1" spc="17">
                 <a:solidFill>
                   <a:srgbClr val="DFE7F1"/>
                 </a:solidFill>
@@ -6156,12 +6294,12 @@
       </p:sp>
       <p:sp>
         <p:nvSpPr>
-          <p:cNvPr name="TextBox 48" id="48"/>
-          <p:cNvSpPr txBox="true"/>
+          <p:cNvPr id="48" name="TextBox 48"/>
+          <p:cNvSpPr txBox="1"/>
           <p:nvPr/>
         </p:nvSpPr>
         <p:spPr>
-          <a:xfrm rot="0">
+          <a:xfrm>
             <a:off x="770476" y="6477677"/>
             <a:ext cx="2359377" cy="273685"/>
           </a:xfrm>
@@ -6170,7 +6308,7 @@
           </a:prstGeom>
         </p:spPr>
         <p:txBody>
-          <a:bodyPr anchor="t" rtlCol="false" tIns="0" lIns="0" bIns="0" rIns="0">
+          <a:bodyPr lIns="0" tIns="0" rIns="0" bIns="0" rtlCol="0" anchor="t">
             <a:spAutoFit/>
           </a:bodyPr>
           <a:lstStyle/>
@@ -6181,7 +6319,7 @@
               </a:lnSpc>
             </a:pPr>
             <a:r>
-              <a:rPr lang="en-US" sz="1700" spc="17" b="true">
+              <a:rPr lang="en-US" sz="1700" b="1" spc="17">
                 <a:solidFill>
                   <a:srgbClr val="000000"/>
                 </a:solidFill>
@@ -6197,12 +6335,12 @@
       </p:sp>
       <p:sp>
         <p:nvSpPr>
-          <p:cNvPr name="TextBox 49" id="49"/>
-          <p:cNvSpPr txBox="true"/>
+          <p:cNvPr id="49" name="TextBox 49"/>
+          <p:cNvSpPr txBox="1"/>
           <p:nvPr/>
         </p:nvSpPr>
         <p:spPr>
-          <a:xfrm rot="0">
+          <a:xfrm>
             <a:off x="2729597" y="6448441"/>
             <a:ext cx="962196" cy="327025"/>
           </a:xfrm>
@@ -6211,7 +6349,7 @@
           </a:prstGeom>
         </p:spPr>
         <p:txBody>
-          <a:bodyPr anchor="t" rtlCol="false" tIns="0" lIns="0" bIns="0" rIns="0">
+          <a:bodyPr lIns="0" tIns="0" rIns="0" bIns="0" rtlCol="0" anchor="t">
             <a:spAutoFit/>
           </a:bodyPr>
           <a:lstStyle/>
@@ -6222,7 +6360,7 @@
               </a:lnSpc>
             </a:pPr>
             <a:r>
-              <a:rPr lang="en-US" sz="2000" b="true">
+              <a:rPr lang="en-US" sz="2000" b="1">
                 <a:solidFill>
                   <a:srgbClr val="FF3131"/>
                 </a:solidFill>
@@ -6238,12 +6376,12 @@
       </p:sp>
       <p:sp>
         <p:nvSpPr>
-          <p:cNvPr name="TextBox 50" id="50"/>
-          <p:cNvSpPr txBox="true"/>
+          <p:cNvPr id="50" name="TextBox 50"/>
+          <p:cNvSpPr txBox="1"/>
           <p:nvPr/>
         </p:nvSpPr>
         <p:spPr>
-          <a:xfrm rot="0">
+          <a:xfrm>
             <a:off x="756398" y="6790706"/>
             <a:ext cx="1193766" cy="273685"/>
           </a:xfrm>
@@ -6252,7 +6390,7 @@
           </a:prstGeom>
         </p:spPr>
         <p:txBody>
-          <a:bodyPr anchor="t" rtlCol="false" tIns="0" lIns="0" bIns="0" rIns="0">
+          <a:bodyPr lIns="0" tIns="0" rIns="0" bIns="0" rtlCol="0" anchor="t">
             <a:spAutoFit/>
           </a:bodyPr>
           <a:lstStyle/>
@@ -6263,7 +6401,7 @@
               </a:lnSpc>
             </a:pPr>
             <a:r>
-              <a:rPr lang="en-US" sz="1700" spc="17" b="true">
+              <a:rPr lang="en-US" sz="1700" b="1" spc="17">
                 <a:solidFill>
                   <a:srgbClr val="000000"/>
                 </a:solidFill>
@@ -6279,12 +6417,12 @@
       </p:sp>
       <p:sp>
         <p:nvSpPr>
-          <p:cNvPr name="TextBox 51" id="51"/>
-          <p:cNvSpPr txBox="true"/>
+          <p:cNvPr id="51" name="TextBox 51"/>
+          <p:cNvSpPr txBox="1"/>
           <p:nvPr/>
         </p:nvSpPr>
         <p:spPr>
-          <a:xfrm rot="0">
+          <a:xfrm>
             <a:off x="2804629" y="6768799"/>
             <a:ext cx="693438" cy="327025"/>
           </a:xfrm>
@@ -6293,7 +6431,7 @@
           </a:prstGeom>
         </p:spPr>
         <p:txBody>
-          <a:bodyPr anchor="t" rtlCol="false" tIns="0" lIns="0" bIns="0" rIns="0">
+          <a:bodyPr lIns="0" tIns="0" rIns="0" bIns="0" rtlCol="0" anchor="t">
             <a:spAutoFit/>
           </a:bodyPr>
           <a:lstStyle/>
@@ -6304,7 +6442,7 @@
               </a:lnSpc>
             </a:pPr>
             <a:r>
-              <a:rPr lang="en-US" sz="2000" b="true">
+              <a:rPr lang="en-US" sz="2000" b="1">
                 <a:solidFill>
                   <a:srgbClr val="FF3131"/>
                 </a:solidFill>
@@ -6320,12 +6458,12 @@
       </p:sp>
       <p:sp>
         <p:nvSpPr>
-          <p:cNvPr name="TextBox 52" id="52"/>
-          <p:cNvSpPr txBox="true"/>
+          <p:cNvPr id="52" name="TextBox 52"/>
+          <p:cNvSpPr txBox="1"/>
           <p:nvPr/>
         </p:nvSpPr>
         <p:spPr>
-          <a:xfrm rot="0">
+          <a:xfrm>
             <a:off x="556224" y="5545471"/>
             <a:ext cx="2787880" cy="353060"/>
           </a:xfrm>
@@ -6334,7 +6472,7 @@
           </a:prstGeom>
         </p:spPr>
         <p:txBody>
-          <a:bodyPr anchor="t" rtlCol="false" tIns="0" lIns="0" bIns="0" rIns="0">
+          <a:bodyPr lIns="0" tIns="0" rIns="0" bIns="0" rtlCol="0" anchor="t">
             <a:spAutoFit/>
           </a:bodyPr>
           <a:lstStyle/>
@@ -6345,7 +6483,7 @@
               </a:lnSpc>
             </a:pPr>
             <a:r>
-              <a:rPr lang="en-US" b="true" sz="2199" i="true" spc="21">
+              <a:rPr lang="en-US" sz="2199" b="1" i="1" spc="21">
                 <a:solidFill>
                   <a:srgbClr val="000000"/>
                 </a:solidFill>
@@ -6361,12 +6499,12 @@
       </p:sp>
       <p:sp>
         <p:nvSpPr>
-          <p:cNvPr name="TextBox 53" id="53"/>
-          <p:cNvSpPr txBox="true"/>
+          <p:cNvPr id="53" name="TextBox 53"/>
+          <p:cNvSpPr txBox="1"/>
           <p:nvPr/>
         </p:nvSpPr>
         <p:spPr>
-          <a:xfrm rot="0">
+          <a:xfrm>
             <a:off x="863357" y="8239241"/>
             <a:ext cx="3110245" cy="299720"/>
           </a:xfrm>
@@ -6375,7 +6513,7 @@
           </a:prstGeom>
         </p:spPr>
         <p:txBody>
-          <a:bodyPr anchor="t" rtlCol="false" tIns="0" lIns="0" bIns="0" rIns="0">
+          <a:bodyPr lIns="0" tIns="0" rIns="0" bIns="0" rtlCol="0" anchor="t">
             <a:spAutoFit/>
           </a:bodyPr>
           <a:lstStyle/>
@@ -6386,7 +6524,7 @@
               </a:lnSpc>
             </a:pPr>
             <a:r>
-              <a:rPr lang="en-US" sz="1899" spc="18" b="true">
+              <a:rPr lang="en-US" sz="1899" b="1" spc="18">
                 <a:solidFill>
                   <a:srgbClr val="000000"/>
                 </a:solidFill>
@@ -6402,12 +6540,12 @@
       </p:sp>
       <p:sp>
         <p:nvSpPr>
-          <p:cNvPr name="TextBox 54" id="54"/>
-          <p:cNvSpPr txBox="true"/>
+          <p:cNvPr id="54" name="TextBox 54"/>
+          <p:cNvSpPr txBox="1"/>
           <p:nvPr/>
         </p:nvSpPr>
         <p:spPr>
-          <a:xfrm rot="0">
+          <a:xfrm>
             <a:off x="3049422" y="8197398"/>
             <a:ext cx="1238190" cy="450215"/>
           </a:xfrm>
@@ -6416,7 +6554,7 @@
           </a:prstGeom>
         </p:spPr>
         <p:txBody>
-          <a:bodyPr anchor="t" rtlCol="false" tIns="0" lIns="0" bIns="0" rIns="0">
+          <a:bodyPr lIns="0" tIns="0" rIns="0" bIns="0" rtlCol="0" anchor="t">
             <a:spAutoFit/>
           </a:bodyPr>
           <a:lstStyle/>
@@ -6427,7 +6565,7 @@
               </a:lnSpc>
             </a:pPr>
             <a:r>
-              <a:rPr lang="en-US" sz="2799" b="true">
+              <a:rPr lang="en-US" sz="2799" b="1">
                 <a:solidFill>
                   <a:srgbClr val="FF3131"/>
                 </a:solidFill>
@@ -6443,12 +6581,12 @@
       </p:sp>
       <p:sp>
         <p:nvSpPr>
-          <p:cNvPr name="TextBox 55" id="55"/>
-          <p:cNvSpPr txBox="true"/>
+          <p:cNvPr id="55" name="TextBox 55"/>
+          <p:cNvSpPr txBox="1"/>
           <p:nvPr/>
         </p:nvSpPr>
         <p:spPr>
-          <a:xfrm rot="0">
+          <a:xfrm>
             <a:off x="851903" y="8638088"/>
             <a:ext cx="2755793" cy="299720"/>
           </a:xfrm>
@@ -6457,7 +6595,7 @@
           </a:prstGeom>
         </p:spPr>
         <p:txBody>
-          <a:bodyPr anchor="t" rtlCol="false" tIns="0" lIns="0" bIns="0" rIns="0">
+          <a:bodyPr lIns="0" tIns="0" rIns="0" bIns="0" rtlCol="0" anchor="t">
             <a:spAutoFit/>
           </a:bodyPr>
           <a:lstStyle/>
@@ -6468,7 +6606,7 @@
               </a:lnSpc>
             </a:pPr>
             <a:r>
-              <a:rPr lang="en-US" sz="1899" spc="18" b="true">
+              <a:rPr lang="en-US" sz="1899" b="1" spc="18">
                 <a:solidFill>
                   <a:srgbClr val="000000"/>
                 </a:solidFill>
@@ -6484,12 +6622,12 @@
       </p:sp>
       <p:sp>
         <p:nvSpPr>
-          <p:cNvPr name="TextBox 56" id="56"/>
-          <p:cNvSpPr txBox="true"/>
+          <p:cNvPr id="56" name="TextBox 56"/>
+          <p:cNvSpPr txBox="1"/>
           <p:nvPr/>
         </p:nvSpPr>
         <p:spPr>
-          <a:xfrm rot="0">
+          <a:xfrm>
             <a:off x="3071353" y="8601575"/>
             <a:ext cx="1238190" cy="450215"/>
           </a:xfrm>
@@ -6498,7 +6636,7 @@
           </a:prstGeom>
         </p:spPr>
         <p:txBody>
-          <a:bodyPr anchor="t" rtlCol="false" tIns="0" lIns="0" bIns="0" rIns="0">
+          <a:bodyPr lIns="0" tIns="0" rIns="0" bIns="0" rtlCol="0" anchor="t">
             <a:spAutoFit/>
           </a:bodyPr>
           <a:lstStyle/>
@@ -6509,7 +6647,7 @@
               </a:lnSpc>
             </a:pPr>
             <a:r>
-              <a:rPr lang="en-US" sz="2799" b="true">
+              <a:rPr lang="en-US" sz="2799" b="1">
                 <a:solidFill>
                   <a:srgbClr val="FF3131"/>
                 </a:solidFill>
@@ -6525,12 +6663,12 @@
       </p:sp>
       <p:sp>
         <p:nvSpPr>
-          <p:cNvPr name="TextBox 57" id="57"/>
-          <p:cNvSpPr txBox="true"/>
+          <p:cNvPr id="57" name="TextBox 57"/>
+          <p:cNvSpPr txBox="1"/>
           <p:nvPr/>
         </p:nvSpPr>
         <p:spPr>
-          <a:xfrm rot="0">
+          <a:xfrm>
             <a:off x="851903" y="9032740"/>
             <a:ext cx="2627914" cy="299720"/>
           </a:xfrm>
@@ -6539,7 +6677,7 @@
           </a:prstGeom>
         </p:spPr>
         <p:txBody>
-          <a:bodyPr anchor="t" rtlCol="false" tIns="0" lIns="0" bIns="0" rIns="0">
+          <a:bodyPr lIns="0" tIns="0" rIns="0" bIns="0" rtlCol="0" anchor="t">
             <a:spAutoFit/>
           </a:bodyPr>
           <a:lstStyle/>
@@ -6550,7 +6688,7 @@
               </a:lnSpc>
             </a:pPr>
             <a:r>
-              <a:rPr lang="en-US" sz="1899" spc="18" b="true">
+              <a:rPr lang="en-US" sz="1899" b="1" spc="18">
                 <a:solidFill>
                   <a:srgbClr val="000000"/>
                 </a:solidFill>
@@ -6566,12 +6704,12 @@
       </p:sp>
       <p:sp>
         <p:nvSpPr>
-          <p:cNvPr name="TextBox 58" id="58"/>
-          <p:cNvSpPr txBox="true"/>
+          <p:cNvPr id="58" name="TextBox 58"/>
+          <p:cNvSpPr txBox="1"/>
           <p:nvPr/>
         </p:nvSpPr>
         <p:spPr>
-          <a:xfrm rot="0">
+          <a:xfrm>
             <a:off x="3091015" y="8994515"/>
             <a:ext cx="693438" cy="450215"/>
           </a:xfrm>
@@ -6580,7 +6718,7 @@
           </a:prstGeom>
         </p:spPr>
         <p:txBody>
-          <a:bodyPr anchor="t" rtlCol="false" tIns="0" lIns="0" bIns="0" rIns="0">
+          <a:bodyPr lIns="0" tIns="0" rIns="0" bIns="0" rtlCol="0" anchor="t">
             <a:spAutoFit/>
           </a:bodyPr>
           <a:lstStyle/>
@@ -6591,7 +6729,7 @@
               </a:lnSpc>
             </a:pPr>
             <a:r>
-              <a:rPr lang="en-US" sz="2799" b="true">
+              <a:rPr lang="en-US" sz="2799" b="1">
                 <a:solidFill>
                   <a:srgbClr val="FF3131"/>
                 </a:solidFill>
@@ -6607,12 +6745,12 @@
       </p:sp>
       <p:sp>
         <p:nvSpPr>
-          <p:cNvPr name="TextBox 59" id="59"/>
-          <p:cNvSpPr txBox="true"/>
+          <p:cNvPr id="59" name="TextBox 59"/>
+          <p:cNvSpPr txBox="1"/>
           <p:nvPr/>
         </p:nvSpPr>
         <p:spPr>
-          <a:xfrm rot="0">
+          <a:xfrm>
             <a:off x="524696" y="7762230"/>
             <a:ext cx="2787880" cy="353060"/>
           </a:xfrm>
@@ -6621,7 +6759,7 @@
           </a:prstGeom>
         </p:spPr>
         <p:txBody>
-          <a:bodyPr anchor="t" rtlCol="false" tIns="0" lIns="0" bIns="0" rIns="0">
+          <a:bodyPr lIns="0" tIns="0" rIns="0" bIns="0" rtlCol="0" anchor="t">
             <a:spAutoFit/>
           </a:bodyPr>
           <a:lstStyle/>
@@ -6632,7 +6770,7 @@
               </a:lnSpc>
             </a:pPr>
             <a:r>
-              <a:rPr lang="en-US" b="true" sz="2199" i="true" spc="21">
+              <a:rPr lang="en-US" sz="2199" b="1" i="1" spc="21">
                 <a:solidFill>
                   <a:srgbClr val="000000"/>
                 </a:solidFill>
@@ -6648,12 +6786,12 @@
       </p:sp>
       <p:sp>
         <p:nvSpPr>
-          <p:cNvPr name="TextBox 60" id="60"/>
-          <p:cNvSpPr txBox="true"/>
+          <p:cNvPr id="60" name="TextBox 60"/>
+          <p:cNvSpPr txBox="1"/>
           <p:nvPr/>
         </p:nvSpPr>
         <p:spPr>
-          <a:xfrm rot="0">
+          <a:xfrm>
             <a:off x="754049" y="7146306"/>
             <a:ext cx="1097410" cy="273685"/>
           </a:xfrm>
@@ -6662,7 +6800,7 @@
           </a:prstGeom>
         </p:spPr>
         <p:txBody>
-          <a:bodyPr anchor="t" rtlCol="false" tIns="0" lIns="0" bIns="0" rIns="0">
+          <a:bodyPr lIns="0" tIns="0" rIns="0" bIns="0" rtlCol="0" anchor="t">
             <a:spAutoFit/>
           </a:bodyPr>
           <a:lstStyle/>
@@ -6673,7 +6811,7 @@
               </a:lnSpc>
             </a:pPr>
             <a:r>
-              <a:rPr lang="en-US" sz="1700" spc="17" b="true">
+              <a:rPr lang="en-US" sz="1700" b="1" spc="17">
                 <a:solidFill>
                   <a:srgbClr val="000000"/>
                 </a:solidFill>
@@ -6689,12 +6827,12 @@
       </p:sp>
       <p:sp>
         <p:nvSpPr>
-          <p:cNvPr name="TextBox 61" id="61"/>
-          <p:cNvSpPr txBox="true"/>
+          <p:cNvPr id="61" name="TextBox 61"/>
+          <p:cNvSpPr txBox="1"/>
           <p:nvPr/>
         </p:nvSpPr>
         <p:spPr>
-          <a:xfrm rot="0">
+          <a:xfrm>
             <a:off x="4959140" y="7753895"/>
             <a:ext cx="2787880" cy="353060"/>
           </a:xfrm>
@@ -6703,7 +6841,7 @@
           </a:prstGeom>
         </p:spPr>
         <p:txBody>
-          <a:bodyPr anchor="t" rtlCol="false" tIns="0" lIns="0" bIns="0" rIns="0">
+          <a:bodyPr lIns="0" tIns="0" rIns="0" bIns="0" rtlCol="0" anchor="t">
             <a:spAutoFit/>
           </a:bodyPr>
           <a:lstStyle/>
@@ -6714,7 +6852,7 @@
               </a:lnSpc>
             </a:pPr>
             <a:r>
-              <a:rPr lang="en-US" b="true" sz="2199" i="true" spc="21">
+              <a:rPr lang="en-US" sz="2199" b="1" i="1" spc="21">
                 <a:solidFill>
                   <a:srgbClr val="000000"/>
                 </a:solidFill>
@@ -6730,12 +6868,12 @@
       </p:sp>
       <p:sp>
         <p:nvSpPr>
-          <p:cNvPr name="TextBox 62" id="62"/>
-          <p:cNvSpPr txBox="true"/>
+          <p:cNvPr id="62" name="TextBox 62"/>
+          <p:cNvSpPr txBox="1"/>
           <p:nvPr/>
         </p:nvSpPr>
         <p:spPr>
-          <a:xfrm rot="0">
+          <a:xfrm>
             <a:off x="12603985" y="7586890"/>
             <a:ext cx="3605967" cy="353060"/>
           </a:xfrm>
@@ -6744,7 +6882,7 @@
           </a:prstGeom>
         </p:spPr>
         <p:txBody>
-          <a:bodyPr anchor="t" rtlCol="false" tIns="0" lIns="0" bIns="0" rIns="0">
+          <a:bodyPr lIns="0" tIns="0" rIns="0" bIns="0" rtlCol="0" anchor="t">
             <a:spAutoFit/>
           </a:bodyPr>
           <a:lstStyle/>
@@ -6755,7 +6893,7 @@
               </a:lnSpc>
             </a:pPr>
             <a:r>
-              <a:rPr lang="en-US" b="true" sz="2199" i="true" spc="21">
+              <a:rPr lang="en-US" sz="2199" b="1" i="1" spc="21">
                 <a:solidFill>
                   <a:srgbClr val="000000"/>
                 </a:solidFill>
@@ -6771,12 +6909,12 @@
       </p:sp>
       <p:sp>
         <p:nvSpPr>
-          <p:cNvPr name="TextBox 63" id="63"/>
-          <p:cNvSpPr txBox="true"/>
+          <p:cNvPr id="63" name="TextBox 63"/>
+          <p:cNvSpPr txBox="1"/>
           <p:nvPr/>
         </p:nvSpPr>
         <p:spPr>
-          <a:xfrm rot="0">
+          <a:xfrm>
             <a:off x="10569383" y="8379576"/>
             <a:ext cx="644348" cy="361315"/>
           </a:xfrm>
@@ -6785,7 +6923,7 @@
           </a:prstGeom>
         </p:spPr>
         <p:txBody>
-          <a:bodyPr anchor="t" rtlCol="false" tIns="0" lIns="0" bIns="0" rIns="0">
+          <a:bodyPr lIns="0" tIns="0" rIns="0" bIns="0" rtlCol="0" anchor="t">
             <a:spAutoFit/>
           </a:bodyPr>
           <a:lstStyle/>
@@ -6796,7 +6934,7 @@
               </a:lnSpc>
             </a:pPr>
             <a:r>
-              <a:rPr lang="en-US" sz="2299" b="true">
+              <a:rPr lang="en-US" sz="2299" b="1">
                 <a:solidFill>
                   <a:srgbClr val="FFFFFF"/>
                 </a:solidFill>
@@ -6812,12 +6950,12 @@
       </p:sp>
       <p:sp>
         <p:nvSpPr>
-          <p:cNvPr name="TextBox 64" id="64"/>
-          <p:cNvSpPr txBox="true"/>
+          <p:cNvPr id="64" name="TextBox 64"/>
+          <p:cNvSpPr txBox="1"/>
           <p:nvPr/>
         </p:nvSpPr>
         <p:spPr>
-          <a:xfrm rot="0">
+          <a:xfrm>
             <a:off x="11502896" y="7962672"/>
             <a:ext cx="6151112" cy="2360295"/>
           </a:xfrm>
@@ -6826,7 +6964,7 @@
           </a:prstGeom>
         </p:spPr>
         <p:txBody>
-          <a:bodyPr anchor="t" rtlCol="false" tIns="0" lIns="0" bIns="0" rIns="0">
+          <a:bodyPr lIns="0" tIns="0" rIns="0" bIns="0" rtlCol="0" anchor="t">
             <a:spAutoFit/>
           </a:bodyPr>
           <a:lstStyle/>
@@ -6837,7 +6975,7 @@
               </a:lnSpc>
             </a:pPr>
             <a:r>
-              <a:rPr lang="en-US" sz="1400" spc="14" b="true">
+              <a:rPr lang="en-US" sz="1400" b="1" spc="14">
                 <a:solidFill>
                   <a:srgbClr val="000000"/>
                 </a:solidFill>
@@ -6856,7 +6994,7 @@
               </a:lnSpc>
             </a:pPr>
             <a:r>
-              <a:rPr lang="en-US" sz="1400" spc="14" b="true">
+              <a:rPr lang="en-US" sz="1400" b="1" spc="14">
                 <a:solidFill>
                   <a:srgbClr val="000000"/>
                 </a:solidFill>
@@ -6875,7 +7013,7 @@
               </a:lnSpc>
             </a:pPr>
             <a:r>
-              <a:rPr lang="en-US" sz="1400" spc="14" b="true">
+              <a:rPr lang="en-US" sz="1400" b="1" spc="14">
                 <a:solidFill>
                   <a:srgbClr val="000000"/>
                 </a:solidFill>
@@ -6894,7 +7032,7 @@
               </a:lnSpc>
             </a:pPr>
             <a:r>
-              <a:rPr lang="en-US" sz="1400" spc="14" b="true">
+              <a:rPr lang="en-US" sz="1400" b="1" spc="14">
                 <a:solidFill>
                   <a:srgbClr val="000000"/>
                 </a:solidFill>
@@ -6912,26 +7050,35 @@
                 <a:spcPts val="2469"/>
               </a:lnSpc>
             </a:pPr>
+            <a:endParaRPr lang="en-US" sz="1400" b="1" spc="14">
+              <a:solidFill>
+                <a:srgbClr val="000000"/>
+              </a:solidFill>
+              <a:latin typeface="Canva Sans Bold"/>
+              <a:ea typeface="Canva Sans Bold"/>
+              <a:cs typeface="Canva Sans Bold"/>
+              <a:sym typeface="Canva Sans Bold"/>
+            </a:endParaRPr>
           </a:p>
         </p:txBody>
       </p:sp>
       <p:sp>
         <p:nvSpPr>
-          <p:cNvPr name="TextBox 65" id="65"/>
-          <p:cNvSpPr txBox="true"/>
+          <p:cNvPr id="65" name="TextBox 65"/>
+          <p:cNvSpPr txBox="1"/>
           <p:nvPr/>
         </p:nvSpPr>
         <p:spPr>
-          <a:xfrm rot="0">
+          <a:xfrm>
             <a:off x="4959140" y="8299883"/>
-            <a:ext cx="4302956" cy="872490"/>
+            <a:ext cx="4302956" cy="1165704"/>
           </a:xfrm>
           <a:prstGeom prst="rect">
             <a:avLst/>
           </a:prstGeom>
         </p:spPr>
         <p:txBody>
-          <a:bodyPr anchor="t" rtlCol="false" tIns="0" lIns="0" bIns="0" rIns="0">
+          <a:bodyPr lIns="0" tIns="0" rIns="0" bIns="0" rtlCol="0" anchor="t">
             <a:spAutoFit/>
           </a:bodyPr>
           <a:lstStyle/>
@@ -6942,7 +7089,7 @@
               </a:lnSpc>
             </a:pPr>
             <a:r>
-              <a:rPr lang="en-US" sz="1800" spc="18" b="true">
+              <a:rPr lang="es-ES" sz="1800" b="1" spc="18" dirty="0">
                 <a:solidFill>
                   <a:srgbClr val="000000"/>
                 </a:solidFill>
@@ -6951,19 +7098,28 @@
                 <a:cs typeface="Canva Sans Medium"/>
                 <a:sym typeface="Canva Sans Medium"/>
               </a:rPr>
-              <a:t>Se logro implementar la IA nutricional para plan de alimentación para mascota .</a:t>
+              <a:t>Se logro implementar IA la cual, utilizando los datos de mascota y despensa, genera una receta con instrucciones para preparar.</a:t>
             </a:r>
+            <a:endParaRPr lang="en-US" sz="1800" b="1" spc="18" dirty="0">
+              <a:solidFill>
+                <a:srgbClr val="000000"/>
+              </a:solidFill>
+              <a:latin typeface="Canva Sans Medium"/>
+              <a:ea typeface="Canva Sans Medium"/>
+              <a:cs typeface="Canva Sans Medium"/>
+              <a:sym typeface="Canva Sans Medium"/>
+            </a:endParaRPr>
           </a:p>
         </p:txBody>
       </p:sp>
       <p:sp>
         <p:nvSpPr>
-          <p:cNvPr name="TextBox 66" id="66"/>
-          <p:cNvSpPr txBox="true"/>
+          <p:cNvPr id="66" name="TextBox 66"/>
+          <p:cNvSpPr txBox="1"/>
           <p:nvPr/>
         </p:nvSpPr>
         <p:spPr>
-          <a:xfrm rot="0">
+          <a:xfrm>
             <a:off x="863357" y="9435205"/>
             <a:ext cx="982375" cy="299720"/>
           </a:xfrm>
@@ -6972,7 +7128,7 @@
           </a:prstGeom>
         </p:spPr>
         <p:txBody>
-          <a:bodyPr anchor="t" rtlCol="false" tIns="0" lIns="0" bIns="0" rIns="0">
+          <a:bodyPr lIns="0" tIns="0" rIns="0" bIns="0" rtlCol="0" anchor="t">
             <a:spAutoFit/>
           </a:bodyPr>
           <a:lstStyle/>
@@ -6983,7 +7139,7 @@
               </a:lnSpc>
             </a:pPr>
             <a:r>
-              <a:rPr lang="en-US" sz="1899" spc="18" b="true">
+              <a:rPr lang="en-US" sz="1899" b="1" spc="18">
                 <a:solidFill>
                   <a:srgbClr val="000000"/>
                 </a:solidFill>
@@ -7006,7 +7162,7 @@
 </file>
 
 <file path=ppt/slides/slide7.xml><?xml version="1.0" encoding="utf-8"?>
-<p:sld xmlns:p="http://schemas.openxmlformats.org/presentationml/2006/main" xmlns:a="http://schemas.openxmlformats.org/drawingml/2006/main" xmlns:r="http://schemas.openxmlformats.org/officeDocument/2006/relationships">
+<p:sld xmlns:a="http://schemas.openxmlformats.org/drawingml/2006/main" xmlns:r="http://schemas.openxmlformats.org/officeDocument/2006/relationships" xmlns:p="http://schemas.openxmlformats.org/presentationml/2006/main">
   <p:cSld>
     <p:spTree>
       <p:nvGrpSpPr>
@@ -7024,12 +7180,12 @@
       </p:grpSpPr>
       <p:sp>
         <p:nvSpPr>
-          <p:cNvPr name="Freeform 2" id="2"/>
+          <p:cNvPr id="2" name="Freeform 2"/>
           <p:cNvSpPr/>
           <p:nvPr/>
         </p:nvSpPr>
         <p:spPr>
-          <a:xfrm flipH="false" flipV="false" rot="5400000">
+          <a:xfrm rot="5400000">
             <a:off x="4000500" y="-4000500"/>
             <a:ext cx="10287000" cy="18288000"/>
           </a:xfrm>
@@ -7038,9 +7194,9 @@
             <a:gdLst/>
             <a:ahLst/>
             <a:cxnLst/>
-            <a:rect r="r" b="b" t="t" l="l"/>
+            <a:rect l="l" t="t" r="r" b="b"/>
             <a:pathLst>
-              <a:path h="18288000" w="10287000">
+              <a:path w="10287000" h="18288000">
                 <a:moveTo>
                   <a:pt x="0" y="18288000"/>
                 </a:moveTo>
@@ -7063,44 +7219,99 @@
           <a:blipFill>
             <a:blip r:embed="rId2"/>
             <a:stretch>
-              <a:fillRect l="-12888" t="0" r="-12888" b="0"/>
+              <a:fillRect l="-12888" r="-12888"/>
             </a:stretch>
           </a:blipFill>
         </p:spPr>
+        <p:txBody>
+          <a:bodyPr/>
+          <a:lstStyle/>
+          <a:p>
+            <a:endParaRPr lang="es-ES"/>
+          </a:p>
+        </p:txBody>
       </p:sp>
       <p:graphicFrame>
         <p:nvGraphicFramePr>
-          <p:cNvPr name="Table 3" id="3"/>
+          <p:cNvPr id="3" name="Table 3"/>
           <p:cNvGraphicFramePr>
-            <a:graphicFrameLocks noGrp="true"/>
+            <a:graphicFrameLocks noGrp="1"/>
           </p:cNvGraphicFramePr>
           <p:nvPr/>
         </p:nvGraphicFramePr>
         <p:xfrm>
           <a:off x="428238" y="857250"/>
-          <a:ext cx="16576008" cy="5628099"/>
+          <a:ext cx="16576010" cy="5628099"/>
         </p:xfrm>
         <a:graphic>
           <a:graphicData uri="http://schemas.openxmlformats.org/drawingml/2006/table">
             <a:tbl>
               <a:tblPr/>
               <a:tblGrid>
-                <a:gridCol w="1051325"/>
-                <a:gridCol w="3498394"/>
-                <a:gridCol w="1861366"/>
-                <a:gridCol w="2446197"/>
-                <a:gridCol w="1785345"/>
-                <a:gridCol w="1973872"/>
-                <a:gridCol w="1728646"/>
-                <a:gridCol w="2230865"/>
+                <a:gridCol w="1051325">
+                  <a:extLst>
+                    <a:ext uri="{9D8B030D-6E8A-4147-A177-3AD203B41FA5}">
+                      <a16:colId xmlns:a16="http://schemas.microsoft.com/office/drawing/2014/main" val="20000"/>
+                    </a:ext>
+                  </a:extLst>
+                </a:gridCol>
+                <a:gridCol w="3498394">
+                  <a:extLst>
+                    <a:ext uri="{9D8B030D-6E8A-4147-A177-3AD203B41FA5}">
+                      <a16:colId xmlns:a16="http://schemas.microsoft.com/office/drawing/2014/main" val="20001"/>
+                    </a:ext>
+                  </a:extLst>
+                </a:gridCol>
+                <a:gridCol w="1861366">
+                  <a:extLst>
+                    <a:ext uri="{9D8B030D-6E8A-4147-A177-3AD203B41FA5}">
+                      <a16:colId xmlns:a16="http://schemas.microsoft.com/office/drawing/2014/main" val="20002"/>
+                    </a:ext>
+                  </a:extLst>
+                </a:gridCol>
+                <a:gridCol w="2446197">
+                  <a:extLst>
+                    <a:ext uri="{9D8B030D-6E8A-4147-A177-3AD203B41FA5}">
+                      <a16:colId xmlns:a16="http://schemas.microsoft.com/office/drawing/2014/main" val="20003"/>
+                    </a:ext>
+                  </a:extLst>
+                </a:gridCol>
+                <a:gridCol w="1785345">
+                  <a:extLst>
+                    <a:ext uri="{9D8B030D-6E8A-4147-A177-3AD203B41FA5}">
+                      <a16:colId xmlns:a16="http://schemas.microsoft.com/office/drawing/2014/main" val="20004"/>
+                    </a:ext>
+                  </a:extLst>
+                </a:gridCol>
+                <a:gridCol w="1973872">
+                  <a:extLst>
+                    <a:ext uri="{9D8B030D-6E8A-4147-A177-3AD203B41FA5}">
+                      <a16:colId xmlns:a16="http://schemas.microsoft.com/office/drawing/2014/main" val="20005"/>
+                    </a:ext>
+                  </a:extLst>
+                </a:gridCol>
+                <a:gridCol w="1728646">
+                  <a:extLst>
+                    <a:ext uri="{9D8B030D-6E8A-4147-A177-3AD203B41FA5}">
+                      <a16:colId xmlns:a16="http://schemas.microsoft.com/office/drawing/2014/main" val="20006"/>
+                    </a:ext>
+                  </a:extLst>
+                </a:gridCol>
+                <a:gridCol w="2230865">
+                  <a:extLst>
+                    <a:ext uri="{9D8B030D-6E8A-4147-A177-3AD203B41FA5}">
+                      <a16:colId xmlns:a16="http://schemas.microsoft.com/office/drawing/2014/main" val="20007"/>
+                    </a:ext>
+                  </a:extLst>
+                </a:gridCol>
               </a:tblGrid>
               <a:tr h="1352179">
                 <a:tc>
                   <a:txBody>
-                    <a:bodyPr anchor="t" rtlCol="false"/>
+                    <a:bodyPr/>
                     <a:lstStyle/>
                     <a:p>
-                      <a:pPr algn="ctr" marL="0" indent="0" lvl="0">
+                      <a:pPr marL="0" lvl="0" indent="0" algn="ctr">
                         <a:lnSpc>
                           <a:spcPts val="2380"/>
                         </a:lnSpc>
@@ -7110,7 +7321,7 @@
                         <a:defRPr/>
                       </a:pPr>
                       <a:r>
-                        <a:rPr lang="en-US" b="true" sz="1700" strike="noStrike" u="none">
+                        <a:rPr lang="en-US" sz="1700" b="1" u="none" strike="noStrike">
                           <a:solidFill>
                             <a:srgbClr val="FFFFFF"/>
                           </a:solidFill>
@@ -7125,7 +7336,7 @@
                     </a:p>
                   </a:txBody>
                   <a:tcPr marL="190500" marR="190500" marT="190500" marB="190500" anchor="ctr">
-                    <a:lnL cmpd="sng" algn="ctr" cap="flat" w="38100">
+                    <a:lnL w="38100" cap="flat" cmpd="sng" algn="ctr">
                       <a:solidFill>
                         <a:srgbClr val="FF9999"/>
                       </a:solidFill>
@@ -7134,7 +7345,7 @@
                       <a:headEnd type="none" w="med" len="med"/>
                       <a:tailEnd type="none" w="med" len="med"/>
                     </a:lnL>
-                    <a:lnR cmpd="sng" algn="ctr" cap="flat" w="38100">
+                    <a:lnR w="38100" cap="flat" cmpd="sng" algn="ctr">
                       <a:solidFill>
                         <a:srgbClr val="FF9999"/>
                       </a:solidFill>
@@ -7143,7 +7354,7 @@
                       <a:headEnd type="none" w="med" len="med"/>
                       <a:tailEnd type="none" w="med" len="med"/>
                     </a:lnR>
-                    <a:lnT cmpd="sng" algn="ctr" cap="flat" w="38100">
+                    <a:lnT w="38100" cap="flat" cmpd="sng" algn="ctr">
                       <a:solidFill>
                         <a:srgbClr val="FF9999"/>
                       </a:solidFill>
@@ -7152,7 +7363,7 @@
                       <a:headEnd type="none" w="med" len="med"/>
                       <a:tailEnd type="none" w="med" len="med"/>
                     </a:lnT>
-                    <a:lnB cmpd="sng" algn="ctr" cap="flat" w="38100">
+                    <a:lnB w="38100" cap="flat" cmpd="sng" algn="ctr">
                       <a:solidFill>
                         <a:srgbClr val="FF9999"/>
                       </a:solidFill>
@@ -7168,10 +7379,10 @@
                 </a:tc>
                 <a:tc>
                   <a:txBody>
-                    <a:bodyPr anchor="t" rtlCol="false"/>
+                    <a:bodyPr/>
                     <a:lstStyle/>
                     <a:p>
-                      <a:pPr algn="ctr" marL="0" indent="0" lvl="0">
+                      <a:pPr marL="0" lvl="0" indent="0" algn="ctr">
                         <a:lnSpc>
                           <a:spcPts val="2380"/>
                         </a:lnSpc>
@@ -7181,7 +7392,7 @@
                         <a:defRPr/>
                       </a:pPr>
                       <a:r>
-                        <a:rPr lang="en-US" b="true" sz="1700" strike="noStrike" u="none">
+                        <a:rPr lang="en-US" sz="1700" b="1" u="none" strike="noStrike">
                           <a:solidFill>
                             <a:srgbClr val="FFFFFF"/>
                           </a:solidFill>
@@ -7196,7 +7407,7 @@
                     </a:p>
                   </a:txBody>
                   <a:tcPr marL="190500" marR="190500" marT="190500" marB="190500" anchor="ctr">
-                    <a:lnL cmpd="sng" algn="ctr" cap="flat" w="38100">
+                    <a:lnL w="38100" cap="flat" cmpd="sng" algn="ctr">
                       <a:solidFill>
                         <a:srgbClr val="FF9999"/>
                       </a:solidFill>
@@ -7205,7 +7416,7 @@
                       <a:headEnd type="none" w="med" len="med"/>
                       <a:tailEnd type="none" w="med" len="med"/>
                     </a:lnL>
-                    <a:lnR cmpd="sng" algn="ctr" cap="flat" w="38100">
+                    <a:lnR w="38100" cap="flat" cmpd="sng" algn="ctr">
                       <a:solidFill>
                         <a:srgbClr val="FF9999"/>
                       </a:solidFill>
@@ -7214,7 +7425,7 @@
                       <a:headEnd type="none" w="med" len="med"/>
                       <a:tailEnd type="none" w="med" len="med"/>
                     </a:lnR>
-                    <a:lnT cmpd="sng" algn="ctr" cap="flat" w="38100">
+                    <a:lnT w="38100" cap="flat" cmpd="sng" algn="ctr">
                       <a:solidFill>
                         <a:srgbClr val="FF9999"/>
                       </a:solidFill>
@@ -7223,7 +7434,7 @@
                       <a:headEnd type="none" w="med" len="med"/>
                       <a:tailEnd type="none" w="med" len="med"/>
                     </a:lnT>
-                    <a:lnB cmpd="sng" algn="ctr" cap="flat" w="38100">
+                    <a:lnB w="38100" cap="flat" cmpd="sng" algn="ctr">
                       <a:solidFill>
                         <a:srgbClr val="FF9999"/>
                       </a:solidFill>
@@ -7239,10 +7450,10 @@
                 </a:tc>
                 <a:tc>
                   <a:txBody>
-                    <a:bodyPr anchor="t" rtlCol="false"/>
+                    <a:bodyPr/>
                     <a:lstStyle/>
                     <a:p>
-                      <a:pPr algn="ctr" marL="0" indent="0" lvl="0">
+                      <a:pPr marL="0" lvl="0" indent="0" algn="ctr">
                         <a:lnSpc>
                           <a:spcPts val="2380"/>
                         </a:lnSpc>
@@ -7252,7 +7463,7 @@
                         <a:defRPr/>
                       </a:pPr>
                       <a:r>
-                        <a:rPr lang="en-US" b="true" sz="1700">
+                        <a:rPr lang="en-US" sz="1700" b="1">
                           <a:solidFill>
                             <a:srgbClr val="FFFFFF"/>
                           </a:solidFill>
@@ -7267,7 +7478,7 @@
                     </a:p>
                   </a:txBody>
                   <a:tcPr marL="190500" marR="190500" marT="190500" marB="190500" anchor="ctr">
-                    <a:lnL cmpd="sng" algn="ctr" cap="flat" w="38100">
+                    <a:lnL w="38100" cap="flat" cmpd="sng" algn="ctr">
                       <a:solidFill>
                         <a:srgbClr val="FF9999"/>
                       </a:solidFill>
@@ -7276,7 +7487,7 @@
                       <a:headEnd type="none" w="med" len="med"/>
                       <a:tailEnd type="none" w="med" len="med"/>
                     </a:lnL>
-                    <a:lnR cmpd="sng" algn="ctr" cap="flat" w="38100">
+                    <a:lnR w="38100" cap="flat" cmpd="sng" algn="ctr">
                       <a:solidFill>
                         <a:srgbClr val="FF9999"/>
                       </a:solidFill>
@@ -7285,7 +7496,7 @@
                       <a:headEnd type="none" w="med" len="med"/>
                       <a:tailEnd type="none" w="med" len="med"/>
                     </a:lnR>
-                    <a:lnT cmpd="sng" algn="ctr" cap="flat" w="38100">
+                    <a:lnT w="38100" cap="flat" cmpd="sng" algn="ctr">
                       <a:solidFill>
                         <a:srgbClr val="FF9999"/>
                       </a:solidFill>
@@ -7294,7 +7505,7 @@
                       <a:headEnd type="none" w="med" len="med"/>
                       <a:tailEnd type="none" w="med" len="med"/>
                     </a:lnT>
-                    <a:lnB cmpd="sng" algn="ctr" cap="flat" w="38100">
+                    <a:lnB w="38100" cap="flat" cmpd="sng" algn="ctr">
                       <a:solidFill>
                         <a:srgbClr val="FF9999"/>
                       </a:solidFill>
@@ -7310,10 +7521,10 @@
                 </a:tc>
                 <a:tc>
                   <a:txBody>
-                    <a:bodyPr anchor="t" rtlCol="false"/>
+                    <a:bodyPr/>
                     <a:lstStyle/>
                     <a:p>
-                      <a:pPr algn="ctr" marL="0" indent="0" lvl="0">
+                      <a:pPr marL="0" lvl="0" indent="0" algn="ctr">
                         <a:lnSpc>
                           <a:spcPts val="2380"/>
                         </a:lnSpc>
@@ -7323,7 +7534,7 @@
                         <a:defRPr/>
                       </a:pPr>
                       <a:r>
-                        <a:rPr lang="en-US" b="true" sz="1700" strike="noStrike" u="none">
+                        <a:rPr lang="en-US" sz="1700" b="1" u="none" strike="noStrike">
                           <a:solidFill>
                             <a:srgbClr val="FFFFFF"/>
                           </a:solidFill>
@@ -7338,7 +7549,7 @@
                     </a:p>
                   </a:txBody>
                   <a:tcPr marL="190500" marR="190500" marT="190500" marB="190500" anchor="ctr">
-                    <a:lnL cmpd="sng" algn="ctr" cap="flat" w="38100">
+                    <a:lnL w="38100" cap="flat" cmpd="sng" algn="ctr">
                       <a:solidFill>
                         <a:srgbClr val="FF9999"/>
                       </a:solidFill>
@@ -7347,7 +7558,7 @@
                       <a:headEnd type="none" w="med" len="med"/>
                       <a:tailEnd type="none" w="med" len="med"/>
                     </a:lnL>
-                    <a:lnR cmpd="sng" algn="ctr" cap="flat" w="38100">
+                    <a:lnR w="38100" cap="flat" cmpd="sng" algn="ctr">
                       <a:solidFill>
                         <a:srgbClr val="FF9999"/>
                       </a:solidFill>
@@ -7356,7 +7567,7 @@
                       <a:headEnd type="none" w="med" len="med"/>
                       <a:tailEnd type="none" w="med" len="med"/>
                     </a:lnR>
-                    <a:lnT cmpd="sng" algn="ctr" cap="flat" w="38100">
+                    <a:lnT w="38100" cap="flat" cmpd="sng" algn="ctr">
                       <a:solidFill>
                         <a:srgbClr val="FF9999"/>
                       </a:solidFill>
@@ -7365,7 +7576,7 @@
                       <a:headEnd type="none" w="med" len="med"/>
                       <a:tailEnd type="none" w="med" len="med"/>
                     </a:lnT>
-                    <a:lnB cmpd="sng" algn="ctr" cap="flat" w="38100">
+                    <a:lnB w="38100" cap="flat" cmpd="sng" algn="ctr">
                       <a:solidFill>
                         <a:srgbClr val="FF9999"/>
                       </a:solidFill>
@@ -7381,10 +7592,10 @@
                 </a:tc>
                 <a:tc>
                   <a:txBody>
-                    <a:bodyPr anchor="t" rtlCol="false"/>
+                    <a:bodyPr/>
                     <a:lstStyle/>
                     <a:p>
-                      <a:pPr algn="ctr" marL="0" indent="0" lvl="0">
+                      <a:pPr marL="0" lvl="0" indent="0" algn="ctr">
                         <a:lnSpc>
                           <a:spcPts val="2380"/>
                         </a:lnSpc>
@@ -7394,7 +7605,7 @@
                         <a:defRPr/>
                       </a:pPr>
                       <a:r>
-                        <a:rPr lang="en-US" b="true" sz="1700" strike="noStrike" u="none">
+                        <a:rPr lang="en-US" sz="1700" b="1" u="none" strike="noStrike">
                           <a:solidFill>
                             <a:srgbClr val="FFFFFF"/>
                           </a:solidFill>
@@ -7409,7 +7620,7 @@
                     </a:p>
                   </a:txBody>
                   <a:tcPr marL="190500" marR="190500" marT="190500" marB="190500" anchor="ctr">
-                    <a:lnL cmpd="sng" algn="ctr" cap="flat" w="38100">
+                    <a:lnL w="38100" cap="flat" cmpd="sng" algn="ctr">
                       <a:solidFill>
                         <a:srgbClr val="FF9999"/>
                       </a:solidFill>
@@ -7418,7 +7629,7 @@
                       <a:headEnd type="none" w="med" len="med"/>
                       <a:tailEnd type="none" w="med" len="med"/>
                     </a:lnL>
-                    <a:lnR cmpd="sng" algn="ctr" cap="flat" w="38100">
+                    <a:lnR w="38100" cap="flat" cmpd="sng" algn="ctr">
                       <a:solidFill>
                         <a:srgbClr val="FF9999"/>
                       </a:solidFill>
@@ -7427,7 +7638,7 @@
                       <a:headEnd type="none" w="med" len="med"/>
                       <a:tailEnd type="none" w="med" len="med"/>
                     </a:lnR>
-                    <a:lnT cmpd="sng" algn="ctr" cap="flat" w="38100">
+                    <a:lnT w="38100" cap="flat" cmpd="sng" algn="ctr">
                       <a:solidFill>
                         <a:srgbClr val="FF9999"/>
                       </a:solidFill>
@@ -7436,7 +7647,7 @@
                       <a:headEnd type="none" w="med" len="med"/>
                       <a:tailEnd type="none" w="med" len="med"/>
                     </a:lnT>
-                    <a:lnB cmpd="sng" algn="ctr" cap="flat" w="38100">
+                    <a:lnB w="38100" cap="flat" cmpd="sng" algn="ctr">
                       <a:solidFill>
                         <a:srgbClr val="FF9999"/>
                       </a:solidFill>
@@ -7452,10 +7663,10 @@
                 </a:tc>
                 <a:tc>
                   <a:txBody>
-                    <a:bodyPr anchor="t" rtlCol="false"/>
+                    <a:bodyPr/>
                     <a:lstStyle/>
                     <a:p>
-                      <a:pPr algn="ctr" marL="0" indent="0" lvl="0">
+                      <a:pPr marL="0" lvl="0" indent="0" algn="ctr">
                         <a:lnSpc>
                           <a:spcPts val="2380"/>
                         </a:lnSpc>
@@ -7465,7 +7676,7 @@
                         <a:defRPr/>
                       </a:pPr>
                       <a:r>
-                        <a:rPr lang="en-US" b="true" sz="1700" strike="noStrike" u="none">
+                        <a:rPr lang="en-US" sz="1700" b="1" u="none" strike="noStrike">
                           <a:solidFill>
                             <a:srgbClr val="FFFFFF"/>
                           </a:solidFill>
@@ -7480,7 +7691,7 @@
                     </a:p>
                   </a:txBody>
                   <a:tcPr marL="190500" marR="190500" marT="190500" marB="190500" anchor="ctr">
-                    <a:lnL cmpd="sng" algn="ctr" cap="flat" w="38100">
+                    <a:lnL w="38100" cap="flat" cmpd="sng" algn="ctr">
                       <a:solidFill>
                         <a:srgbClr val="FF9999"/>
                       </a:solidFill>
@@ -7489,7 +7700,7 @@
                       <a:headEnd type="none" w="med" len="med"/>
                       <a:tailEnd type="none" w="med" len="med"/>
                     </a:lnL>
-                    <a:lnR cmpd="sng" algn="ctr" cap="flat" w="38100">
+                    <a:lnR w="38100" cap="flat" cmpd="sng" algn="ctr">
                       <a:solidFill>
                         <a:srgbClr val="FF9999"/>
                       </a:solidFill>
@@ -7498,7 +7709,7 @@
                       <a:headEnd type="none" w="med" len="med"/>
                       <a:tailEnd type="none" w="med" len="med"/>
                     </a:lnR>
-                    <a:lnT cmpd="sng" algn="ctr" cap="flat" w="38100">
+                    <a:lnT w="38100" cap="flat" cmpd="sng" algn="ctr">
                       <a:solidFill>
                         <a:srgbClr val="FF9999"/>
                       </a:solidFill>
@@ -7507,7 +7718,7 @@
                       <a:headEnd type="none" w="med" len="med"/>
                       <a:tailEnd type="none" w="med" len="med"/>
                     </a:lnT>
-                    <a:lnB cmpd="sng" algn="ctr" cap="flat" w="38100">
+                    <a:lnB w="38100" cap="flat" cmpd="sng" algn="ctr">
                       <a:solidFill>
                         <a:srgbClr val="FF9999"/>
                       </a:solidFill>
@@ -7523,10 +7734,10 @@
                 </a:tc>
                 <a:tc>
                   <a:txBody>
-                    <a:bodyPr anchor="t" rtlCol="false"/>
+                    <a:bodyPr/>
                     <a:lstStyle/>
                     <a:p>
-                      <a:pPr algn="ctr" marL="0" indent="0" lvl="0">
+                      <a:pPr marL="0" lvl="0" indent="0" algn="ctr">
                         <a:lnSpc>
                           <a:spcPts val="2380"/>
                         </a:lnSpc>
@@ -7536,7 +7747,7 @@
                         <a:defRPr/>
                       </a:pPr>
                       <a:r>
-                        <a:rPr lang="en-US" b="true" sz="1700" strike="noStrike" u="none">
+                        <a:rPr lang="en-US" sz="1700" b="1" u="none" strike="noStrike">
                           <a:solidFill>
                             <a:srgbClr val="FFFFFF"/>
                           </a:solidFill>
@@ -7551,7 +7762,7 @@
                     </a:p>
                   </a:txBody>
                   <a:tcPr marL="190500" marR="190500" marT="190500" marB="190500" anchor="ctr">
-                    <a:lnL cmpd="sng" algn="ctr" cap="flat" w="38100">
+                    <a:lnL w="38100" cap="flat" cmpd="sng" algn="ctr">
                       <a:solidFill>
                         <a:srgbClr val="FF9999"/>
                       </a:solidFill>
@@ -7560,7 +7771,7 @@
                       <a:headEnd type="none" w="med" len="med"/>
                       <a:tailEnd type="none" w="med" len="med"/>
                     </a:lnL>
-                    <a:lnR cmpd="sng" algn="ctr" cap="flat" w="38100">
+                    <a:lnR w="38100" cap="flat" cmpd="sng" algn="ctr">
                       <a:solidFill>
                         <a:srgbClr val="FF9999"/>
                       </a:solidFill>
@@ -7569,7 +7780,7 @@
                       <a:headEnd type="none" w="med" len="med"/>
                       <a:tailEnd type="none" w="med" len="med"/>
                     </a:lnR>
-                    <a:lnT cmpd="sng" algn="ctr" cap="flat" w="38100">
+                    <a:lnT w="38100" cap="flat" cmpd="sng" algn="ctr">
                       <a:solidFill>
                         <a:srgbClr val="FF9999"/>
                       </a:solidFill>
@@ -7578,7 +7789,7 @@
                       <a:headEnd type="none" w="med" len="med"/>
                       <a:tailEnd type="none" w="med" len="med"/>
                     </a:lnT>
-                    <a:lnB cmpd="sng" algn="ctr" cap="flat" w="38100">
+                    <a:lnB w="38100" cap="flat" cmpd="sng" algn="ctr">
                       <a:solidFill>
                         <a:srgbClr val="FF9999"/>
                       </a:solidFill>
@@ -7594,10 +7805,10 @@
                 </a:tc>
                 <a:tc>
                   <a:txBody>
-                    <a:bodyPr anchor="t" rtlCol="false"/>
+                    <a:bodyPr/>
                     <a:lstStyle/>
                     <a:p>
-                      <a:pPr algn="ctr" marL="0" indent="0" lvl="0">
+                      <a:pPr marL="0" lvl="0" indent="0" algn="ctr">
                         <a:lnSpc>
                           <a:spcPts val="2380"/>
                         </a:lnSpc>
@@ -7607,7 +7818,7 @@
                         <a:defRPr/>
                       </a:pPr>
                       <a:r>
-                        <a:rPr lang="en-US" b="true" sz="1700" strike="noStrike" u="none">
+                        <a:rPr lang="en-US" sz="1700" b="1" u="none" strike="noStrike">
                           <a:solidFill>
                             <a:srgbClr val="FFFFFF"/>
                           </a:solidFill>
@@ -7622,7 +7833,7 @@
                     </a:p>
                   </a:txBody>
                   <a:tcPr marL="190500" marR="190500" marT="190500" marB="190500" anchor="ctr">
-                    <a:lnL cmpd="sng" algn="ctr" cap="flat" w="38100">
+                    <a:lnL w="38100" cap="flat" cmpd="sng" algn="ctr">
                       <a:solidFill>
                         <a:srgbClr val="FF9999"/>
                       </a:solidFill>
@@ -7631,7 +7842,7 @@
                       <a:headEnd type="none" w="med" len="med"/>
                       <a:tailEnd type="none" w="med" len="med"/>
                     </a:lnL>
-                    <a:lnR cmpd="sng" algn="ctr" cap="flat" w="38100">
+                    <a:lnR w="38100" cap="flat" cmpd="sng" algn="ctr">
                       <a:solidFill>
                         <a:srgbClr val="FF9999"/>
                       </a:solidFill>
@@ -7640,7 +7851,7 @@
                       <a:headEnd type="none" w="med" len="med"/>
                       <a:tailEnd type="none" w="med" len="med"/>
                     </a:lnR>
-                    <a:lnT cmpd="sng" algn="ctr" cap="flat" w="38100">
+                    <a:lnT w="38100" cap="flat" cmpd="sng" algn="ctr">
                       <a:solidFill>
                         <a:srgbClr val="FF9999"/>
                       </a:solidFill>
@@ -7649,7 +7860,7 @@
                       <a:headEnd type="none" w="med" len="med"/>
                       <a:tailEnd type="none" w="med" len="med"/>
                     </a:lnT>
-                    <a:lnB cmpd="sng" algn="ctr" cap="flat" w="38100">
+                    <a:lnB w="38100" cap="flat" cmpd="sng" algn="ctr">
                       <a:solidFill>
                         <a:srgbClr val="FF9999"/>
                       </a:solidFill>
@@ -7663,14 +7874,19 @@
                     </a:solidFill>
                   </a:tcPr>
                 </a:tc>
+                <a:extLst>
+                  <a:ext uri="{0D108BD9-81ED-4DB2-BD59-A6C34878D82A}">
+                    <a16:rowId xmlns:a16="http://schemas.microsoft.com/office/drawing/2014/main" val="10000"/>
+                  </a:ext>
+                </a:extLst>
               </a:tr>
               <a:tr h="1850855">
                 <a:tc>
                   <a:txBody>
-                    <a:bodyPr anchor="t" rtlCol="false"/>
+                    <a:bodyPr/>
                     <a:lstStyle/>
                     <a:p>
-                      <a:pPr algn="ctr" marL="0" indent="0" lvl="0">
+                      <a:pPr marL="0" lvl="0" indent="0" algn="ctr">
                         <a:lnSpc>
                           <a:spcPts val="2380"/>
                         </a:lnSpc>
@@ -7680,7 +7896,7 @@
                         <a:defRPr/>
                       </a:pPr>
                       <a:r>
-                        <a:rPr lang="en-US" b="true" sz="1700" strike="noStrike" u="none">
+                        <a:rPr lang="en-US" sz="1700" b="1" u="none" strike="noStrike">
                           <a:solidFill>
                             <a:srgbClr val="000000"/>
                           </a:solidFill>
@@ -7695,7 +7911,7 @@
                     </a:p>
                   </a:txBody>
                   <a:tcPr marL="190500" marR="190500" marT="190500" marB="190500" anchor="ctr">
-                    <a:lnL cmpd="sng" algn="ctr" cap="flat" w="38100">
+                    <a:lnL w="38100" cap="flat" cmpd="sng" algn="ctr">
                       <a:solidFill>
                         <a:srgbClr val="FF9999"/>
                       </a:solidFill>
@@ -7704,7 +7920,7 @@
                       <a:headEnd type="none" w="med" len="med"/>
                       <a:tailEnd type="none" w="med" len="med"/>
                     </a:lnL>
-                    <a:lnR cmpd="sng" algn="ctr" cap="flat" w="38100">
+                    <a:lnR w="38100" cap="flat" cmpd="sng" algn="ctr">
                       <a:solidFill>
                         <a:srgbClr val="FF9999"/>
                       </a:solidFill>
@@ -7713,7 +7929,7 @@
                       <a:headEnd type="none" w="med" len="med"/>
                       <a:tailEnd type="none" w="med" len="med"/>
                     </a:lnR>
-                    <a:lnT cmpd="sng" algn="ctr" cap="flat" w="38100">
+                    <a:lnT w="38100" cap="flat" cmpd="sng" algn="ctr">
                       <a:solidFill>
                         <a:srgbClr val="FF9999"/>
                       </a:solidFill>
@@ -7722,7 +7938,7 @@
                       <a:headEnd type="none" w="med" len="med"/>
                       <a:tailEnd type="none" w="med" len="med"/>
                     </a:lnT>
-                    <a:lnB cmpd="sng" algn="ctr" cap="flat" w="38100">
+                    <a:lnB w="38100" cap="flat" cmpd="sng" algn="ctr">
                       <a:solidFill>
                         <a:srgbClr val="FF9999"/>
                       </a:solidFill>
@@ -7738,10 +7954,10 @@
                 </a:tc>
                 <a:tc>
                   <a:txBody>
-                    <a:bodyPr anchor="t" rtlCol="false"/>
+                    <a:bodyPr/>
                     <a:lstStyle/>
                     <a:p>
-                      <a:pPr algn="ctr" marL="0" indent="0" lvl="0">
+                      <a:pPr marL="0" lvl="0" indent="0" algn="ctr">
                         <a:lnSpc>
                           <a:spcPts val="2380"/>
                         </a:lnSpc>
@@ -7751,7 +7967,7 @@
                         <a:defRPr/>
                       </a:pPr>
                       <a:r>
-                        <a:rPr lang="en-US" b="true" sz="1700" strike="noStrike" u="none">
+                        <a:rPr lang="en-US" sz="1700" b="1" u="none" strike="noStrike">
                           <a:solidFill>
                             <a:srgbClr val="000000"/>
                           </a:solidFill>
@@ -7766,7 +7982,7 @@
                     </a:p>
                   </a:txBody>
                   <a:tcPr marL="190500" marR="190500" marT="190500" marB="190500" anchor="ctr">
-                    <a:lnL cmpd="sng" algn="ctr" cap="flat" w="38100">
+                    <a:lnL w="38100" cap="flat" cmpd="sng" algn="ctr">
                       <a:solidFill>
                         <a:srgbClr val="FF9999"/>
                       </a:solidFill>
@@ -7775,7 +7991,7 @@
                       <a:headEnd type="none" w="med" len="med"/>
                       <a:tailEnd type="none" w="med" len="med"/>
                     </a:lnL>
-                    <a:lnR cmpd="sng" algn="ctr" cap="flat" w="38100">
+                    <a:lnR w="38100" cap="flat" cmpd="sng" algn="ctr">
                       <a:solidFill>
                         <a:srgbClr val="FF9999"/>
                       </a:solidFill>
@@ -7784,7 +8000,7 @@
                       <a:headEnd type="none" w="med" len="med"/>
                       <a:tailEnd type="none" w="med" len="med"/>
                     </a:lnR>
-                    <a:lnT cmpd="sng" algn="ctr" cap="flat" w="38100">
+                    <a:lnT w="38100" cap="flat" cmpd="sng" algn="ctr">
                       <a:solidFill>
                         <a:srgbClr val="FF9999"/>
                       </a:solidFill>
@@ -7793,7 +8009,7 @@
                       <a:headEnd type="none" w="med" len="med"/>
                       <a:tailEnd type="none" w="med" len="med"/>
                     </a:lnT>
-                    <a:lnB cmpd="sng" algn="ctr" cap="flat" w="38100">
+                    <a:lnB w="38100" cap="flat" cmpd="sng" algn="ctr">
                       <a:solidFill>
                         <a:srgbClr val="FF9999"/>
                       </a:solidFill>
@@ -7809,10 +8025,10 @@
                 </a:tc>
                 <a:tc>
                   <a:txBody>
-                    <a:bodyPr anchor="t" rtlCol="false"/>
+                    <a:bodyPr/>
                     <a:lstStyle/>
                     <a:p>
-                      <a:pPr algn="ctr" marL="0" indent="0" lvl="0">
+                      <a:pPr marL="0" lvl="0" indent="0" algn="ctr">
                         <a:lnSpc>
                           <a:spcPts val="2380"/>
                         </a:lnSpc>
@@ -7822,7 +8038,7 @@
                         <a:defRPr/>
                       </a:pPr>
                       <a:r>
-                        <a:rPr lang="en-US" b="true" sz="1700">
+                        <a:rPr lang="en-US" sz="1700" b="1">
                           <a:solidFill>
                             <a:srgbClr val="000000"/>
                           </a:solidFill>
@@ -7837,7 +8053,7 @@
                     </a:p>
                   </a:txBody>
                   <a:tcPr marL="190500" marR="190500" marT="190500" marB="190500" anchor="ctr">
-                    <a:lnL cmpd="sng" algn="ctr" cap="flat" w="38100">
+                    <a:lnL w="38100" cap="flat" cmpd="sng" algn="ctr">
                       <a:solidFill>
                         <a:srgbClr val="FF9999"/>
                       </a:solidFill>
@@ -7846,7 +8062,7 @@
                       <a:headEnd type="none" w="med" len="med"/>
                       <a:tailEnd type="none" w="med" len="med"/>
                     </a:lnL>
-                    <a:lnR cmpd="sng" algn="ctr" cap="flat" w="38100">
+                    <a:lnR w="38100" cap="flat" cmpd="sng" algn="ctr">
                       <a:solidFill>
                         <a:srgbClr val="FF9999"/>
                       </a:solidFill>
@@ -7855,7 +8071,7 @@
                       <a:headEnd type="none" w="med" len="med"/>
                       <a:tailEnd type="none" w="med" len="med"/>
                     </a:lnR>
-                    <a:lnT cmpd="sng" algn="ctr" cap="flat" w="38100">
+                    <a:lnT w="38100" cap="flat" cmpd="sng" algn="ctr">
                       <a:solidFill>
                         <a:srgbClr val="FF9999"/>
                       </a:solidFill>
@@ -7864,7 +8080,7 @@
                       <a:headEnd type="none" w="med" len="med"/>
                       <a:tailEnd type="none" w="med" len="med"/>
                     </a:lnT>
-                    <a:lnB cmpd="sng" algn="ctr" cap="flat" w="38100">
+                    <a:lnB w="38100" cap="flat" cmpd="sng" algn="ctr">
                       <a:solidFill>
                         <a:srgbClr val="FF9999"/>
                       </a:solidFill>
@@ -7880,10 +8096,10 @@
                 </a:tc>
                 <a:tc>
                   <a:txBody>
-                    <a:bodyPr anchor="t" rtlCol="false"/>
+                    <a:bodyPr/>
                     <a:lstStyle/>
                     <a:p>
-                      <a:pPr algn="ctr" marL="0" indent="0" lvl="0">
+                      <a:pPr marL="0" lvl="0" indent="0" algn="ctr">
                         <a:lnSpc>
                           <a:spcPts val="2240"/>
                         </a:lnSpc>
@@ -7893,7 +8109,7 @@
                         <a:defRPr/>
                       </a:pPr>
                       <a:r>
-                        <a:rPr lang="en-US" b="true" sz="1600" strike="noStrike" u="none">
+                        <a:rPr lang="en-US" sz="1600" b="1" u="none" strike="noStrike">
                           <a:solidFill>
                             <a:srgbClr val="000000"/>
                           </a:solidFill>
@@ -7908,7 +8124,7 @@
                     </a:p>
                   </a:txBody>
                   <a:tcPr marL="190500" marR="190500" marT="190500" marB="190500" anchor="ctr">
-                    <a:lnL cmpd="sng" algn="ctr" cap="flat" w="38100">
+                    <a:lnL w="38100" cap="flat" cmpd="sng" algn="ctr">
                       <a:solidFill>
                         <a:srgbClr val="FF9999"/>
                       </a:solidFill>
@@ -7917,7 +8133,7 @@
                       <a:headEnd type="none" w="med" len="med"/>
                       <a:tailEnd type="none" w="med" len="med"/>
                     </a:lnL>
-                    <a:lnR cmpd="sng" algn="ctr" cap="flat" w="38100">
+                    <a:lnR w="38100" cap="flat" cmpd="sng" algn="ctr">
                       <a:solidFill>
                         <a:srgbClr val="FF9999"/>
                       </a:solidFill>
@@ -7926,7 +8142,7 @@
                       <a:headEnd type="none" w="med" len="med"/>
                       <a:tailEnd type="none" w="med" len="med"/>
                     </a:lnR>
-                    <a:lnT cmpd="sng" algn="ctr" cap="flat" w="38100">
+                    <a:lnT w="38100" cap="flat" cmpd="sng" algn="ctr">
                       <a:solidFill>
                         <a:srgbClr val="FF9999"/>
                       </a:solidFill>
@@ -7935,7 +8151,7 @@
                       <a:headEnd type="none" w="med" len="med"/>
                       <a:tailEnd type="none" w="med" len="med"/>
                     </a:lnT>
-                    <a:lnB cmpd="sng" algn="ctr" cap="flat" w="38100">
+                    <a:lnB w="38100" cap="flat" cmpd="sng" algn="ctr">
                       <a:solidFill>
                         <a:srgbClr val="FF9999"/>
                       </a:solidFill>
@@ -7951,10 +8167,10 @@
                 </a:tc>
                 <a:tc>
                   <a:txBody>
-                    <a:bodyPr anchor="t" rtlCol="false"/>
+                    <a:bodyPr/>
                     <a:lstStyle/>
                     <a:p>
-                      <a:pPr algn="ctr" marL="0" indent="0" lvl="0">
+                      <a:pPr marL="0" lvl="0" indent="0" algn="ctr">
                         <a:lnSpc>
                           <a:spcPts val="2380"/>
                         </a:lnSpc>
@@ -7964,7 +8180,7 @@
                         <a:defRPr/>
                       </a:pPr>
                       <a:r>
-                        <a:rPr lang="en-US" b="true" sz="1700" strike="noStrike" u="none">
+                        <a:rPr lang="en-US" sz="1700" b="1" u="none" strike="noStrike">
                           <a:solidFill>
                             <a:srgbClr val="000000"/>
                           </a:solidFill>
@@ -7979,7 +8195,7 @@
                     </a:p>
                   </a:txBody>
                   <a:tcPr marL="190500" marR="190500" marT="190500" marB="190500" anchor="ctr">
-                    <a:lnL cmpd="sng" algn="ctr" cap="flat" w="38100">
+                    <a:lnL w="38100" cap="flat" cmpd="sng" algn="ctr">
                       <a:solidFill>
                         <a:srgbClr val="FF9999"/>
                       </a:solidFill>
@@ -7988,7 +8204,7 @@
                       <a:headEnd type="none" w="med" len="med"/>
                       <a:tailEnd type="none" w="med" len="med"/>
                     </a:lnL>
-                    <a:lnR cmpd="sng" algn="ctr" cap="flat" w="38100">
+                    <a:lnR w="38100" cap="flat" cmpd="sng" algn="ctr">
                       <a:solidFill>
                         <a:srgbClr val="FF9999"/>
                       </a:solidFill>
@@ -7997,7 +8213,7 @@
                       <a:headEnd type="none" w="med" len="med"/>
                       <a:tailEnd type="none" w="med" len="med"/>
                     </a:lnR>
-                    <a:lnT cmpd="sng" algn="ctr" cap="flat" w="38100">
+                    <a:lnT w="38100" cap="flat" cmpd="sng" algn="ctr">
                       <a:solidFill>
                         <a:srgbClr val="FF9999"/>
                       </a:solidFill>
@@ -8006,7 +8222,7 @@
                       <a:headEnd type="none" w="med" len="med"/>
                       <a:tailEnd type="none" w="med" len="med"/>
                     </a:lnT>
-                    <a:lnB cmpd="sng" algn="ctr" cap="flat" w="38100">
+                    <a:lnB w="38100" cap="flat" cmpd="sng" algn="ctr">
                       <a:solidFill>
                         <a:srgbClr val="FF9999"/>
                       </a:solidFill>
@@ -8022,10 +8238,10 @@
                 </a:tc>
                 <a:tc>
                   <a:txBody>
-                    <a:bodyPr anchor="t" rtlCol="false"/>
+                    <a:bodyPr/>
                     <a:lstStyle/>
                     <a:p>
-                      <a:pPr algn="ctr" marL="0" indent="0" lvl="0">
+                      <a:pPr marL="0" lvl="0" indent="0" algn="ctr">
                         <a:lnSpc>
                           <a:spcPts val="2380"/>
                         </a:lnSpc>
@@ -8035,7 +8251,7 @@
                         <a:defRPr/>
                       </a:pPr>
                       <a:r>
-                        <a:rPr lang="en-US" b="true" sz="1700" strike="noStrike" u="none">
+                        <a:rPr lang="en-US" sz="1700" b="1" u="none" strike="noStrike">
                           <a:solidFill>
                             <a:srgbClr val="000000"/>
                           </a:solidFill>
@@ -8050,7 +8266,7 @@
                     </a:p>
                   </a:txBody>
                   <a:tcPr marL="190500" marR="190500" marT="190500" marB="190500" anchor="ctr">
-                    <a:lnL cmpd="sng" algn="ctr" cap="flat" w="38100">
+                    <a:lnL w="38100" cap="flat" cmpd="sng" algn="ctr">
                       <a:solidFill>
                         <a:srgbClr val="FF9999"/>
                       </a:solidFill>
@@ -8059,7 +8275,7 @@
                       <a:headEnd type="none" w="med" len="med"/>
                       <a:tailEnd type="none" w="med" len="med"/>
                     </a:lnL>
-                    <a:lnR cmpd="sng" algn="ctr" cap="flat" w="38100">
+                    <a:lnR w="38100" cap="flat" cmpd="sng" algn="ctr">
                       <a:solidFill>
                         <a:srgbClr val="FF9999"/>
                       </a:solidFill>
@@ -8068,7 +8284,7 @@
                       <a:headEnd type="none" w="med" len="med"/>
                       <a:tailEnd type="none" w="med" len="med"/>
                     </a:lnR>
-                    <a:lnT cmpd="sng" algn="ctr" cap="flat" w="38100">
+                    <a:lnT w="38100" cap="flat" cmpd="sng" algn="ctr">
                       <a:solidFill>
                         <a:srgbClr val="FF9999"/>
                       </a:solidFill>
@@ -8077,7 +8293,7 @@
                       <a:headEnd type="none" w="med" len="med"/>
                       <a:tailEnd type="none" w="med" len="med"/>
                     </a:lnT>
-                    <a:lnB cmpd="sng" algn="ctr" cap="flat" w="38100">
+                    <a:lnB w="38100" cap="flat" cmpd="sng" algn="ctr">
                       <a:solidFill>
                         <a:srgbClr val="FF9999"/>
                       </a:solidFill>
@@ -8093,10 +8309,10 @@
                 </a:tc>
                 <a:tc>
                   <a:txBody>
-                    <a:bodyPr anchor="t" rtlCol="false"/>
+                    <a:bodyPr/>
                     <a:lstStyle/>
                     <a:p>
-                      <a:pPr algn="ctr" marL="0" indent="0" lvl="0">
+                      <a:pPr marL="0" lvl="0" indent="0" algn="ctr">
                         <a:lnSpc>
                           <a:spcPts val="2380"/>
                         </a:lnSpc>
@@ -8106,7 +8322,7 @@
                         <a:defRPr/>
                       </a:pPr>
                       <a:r>
-                        <a:rPr lang="en-US" b="true" sz="1700" strike="noStrike" u="none">
+                        <a:rPr lang="en-US" sz="1700" b="1" u="none" strike="noStrike">
                           <a:solidFill>
                             <a:srgbClr val="000000"/>
                           </a:solidFill>
@@ -8121,7 +8337,7 @@
                     </a:p>
                   </a:txBody>
                   <a:tcPr marL="190500" marR="190500" marT="190500" marB="190500" anchor="ctr">
-                    <a:lnL cmpd="sng" algn="ctr" cap="flat" w="38100">
+                    <a:lnL w="38100" cap="flat" cmpd="sng" algn="ctr">
                       <a:solidFill>
                         <a:srgbClr val="FF9999"/>
                       </a:solidFill>
@@ -8130,7 +8346,7 @@
                       <a:headEnd type="none" w="med" len="med"/>
                       <a:tailEnd type="none" w="med" len="med"/>
                     </a:lnL>
-                    <a:lnR cmpd="sng" algn="ctr" cap="flat" w="38100">
+                    <a:lnR w="38100" cap="flat" cmpd="sng" algn="ctr">
                       <a:solidFill>
                         <a:srgbClr val="FF9999"/>
                       </a:solidFill>
@@ -8139,7 +8355,7 @@
                       <a:headEnd type="none" w="med" len="med"/>
                       <a:tailEnd type="none" w="med" len="med"/>
                     </a:lnR>
-                    <a:lnT cmpd="sng" algn="ctr" cap="flat" w="38100">
+                    <a:lnT w="38100" cap="flat" cmpd="sng" algn="ctr">
                       <a:solidFill>
                         <a:srgbClr val="FF9999"/>
                       </a:solidFill>
@@ -8148,7 +8364,7 @@
                       <a:headEnd type="none" w="med" len="med"/>
                       <a:tailEnd type="none" w="med" len="med"/>
                     </a:lnT>
-                    <a:lnB cmpd="sng" algn="ctr" cap="flat" w="38100">
+                    <a:lnB w="38100" cap="flat" cmpd="sng" algn="ctr">
                       <a:solidFill>
                         <a:srgbClr val="FF9999"/>
                       </a:solidFill>
@@ -8164,10 +8380,10 @@
                 </a:tc>
                 <a:tc>
                   <a:txBody>
-                    <a:bodyPr anchor="t" rtlCol="false"/>
+                    <a:bodyPr/>
                     <a:lstStyle/>
                     <a:p>
-                      <a:pPr algn="ctr" marL="0" indent="0" lvl="0">
+                      <a:pPr marL="0" lvl="0" indent="0" algn="ctr">
                         <a:lnSpc>
                           <a:spcPts val="2380"/>
                         </a:lnSpc>
@@ -8177,7 +8393,7 @@
                         <a:defRPr/>
                       </a:pPr>
                       <a:r>
-                        <a:rPr lang="en-US" b="true" sz="1700" strike="noStrike" u="none">
+                        <a:rPr lang="en-US" sz="1700" b="1" u="none" strike="noStrike">
                           <a:solidFill>
                             <a:srgbClr val="000000"/>
                           </a:solidFill>
@@ -8192,7 +8408,7 @@
                     </a:p>
                   </a:txBody>
                   <a:tcPr marL="190500" marR="190500" marT="190500" marB="190500" anchor="ctr">
-                    <a:lnL cmpd="sng" algn="ctr" cap="flat" w="38100">
+                    <a:lnL w="38100" cap="flat" cmpd="sng" algn="ctr">
                       <a:solidFill>
                         <a:srgbClr val="FF9999"/>
                       </a:solidFill>
@@ -8201,7 +8417,7 @@
                       <a:headEnd type="none" w="med" len="med"/>
                       <a:tailEnd type="none" w="med" len="med"/>
                     </a:lnL>
-                    <a:lnR cmpd="sng" algn="ctr" cap="flat" w="38100">
+                    <a:lnR w="38100" cap="flat" cmpd="sng" algn="ctr">
                       <a:solidFill>
                         <a:srgbClr val="FF9999"/>
                       </a:solidFill>
@@ -8210,7 +8426,7 @@
                       <a:headEnd type="none" w="med" len="med"/>
                       <a:tailEnd type="none" w="med" len="med"/>
                     </a:lnR>
-                    <a:lnT cmpd="sng" algn="ctr" cap="flat" w="38100">
+                    <a:lnT w="38100" cap="flat" cmpd="sng" algn="ctr">
                       <a:solidFill>
                         <a:srgbClr val="FF9999"/>
                       </a:solidFill>
@@ -8219,7 +8435,7 @@
                       <a:headEnd type="none" w="med" len="med"/>
                       <a:tailEnd type="none" w="med" len="med"/>
                     </a:lnT>
-                    <a:lnB cmpd="sng" algn="ctr" cap="flat" w="38100">
+                    <a:lnB w="38100" cap="flat" cmpd="sng" algn="ctr">
                       <a:solidFill>
                         <a:srgbClr val="FF9999"/>
                       </a:solidFill>
@@ -8233,14 +8449,19 @@
                     </a:solidFill>
                   </a:tcPr>
                 </a:tc>
+                <a:extLst>
+                  <a:ext uri="{0D108BD9-81ED-4DB2-BD59-A6C34878D82A}">
+                    <a16:rowId xmlns:a16="http://schemas.microsoft.com/office/drawing/2014/main" val="10001"/>
+                  </a:ext>
+                </a:extLst>
               </a:tr>
               <a:tr h="1370174">
                 <a:tc>
                   <a:txBody>
-                    <a:bodyPr anchor="t" rtlCol="false"/>
+                    <a:bodyPr/>
                     <a:lstStyle/>
                     <a:p>
-                      <a:pPr algn="ctr" marL="0" indent="0" lvl="0">
+                      <a:pPr marL="0" lvl="0" indent="0" algn="ctr">
                         <a:lnSpc>
                           <a:spcPts val="2380"/>
                         </a:lnSpc>
@@ -8250,7 +8471,7 @@
                         <a:defRPr/>
                       </a:pPr>
                       <a:r>
-                        <a:rPr lang="en-US" b="true" sz="1700" strike="noStrike" u="none">
+                        <a:rPr lang="en-US" sz="1700" b="1" u="none" strike="noStrike">
                           <a:solidFill>
                             <a:srgbClr val="000000"/>
                           </a:solidFill>
@@ -8265,7 +8486,7 @@
                     </a:p>
                   </a:txBody>
                   <a:tcPr marL="190500" marR="190500" marT="190500" marB="190500" anchor="ctr">
-                    <a:lnL cmpd="sng" algn="ctr" cap="flat" w="38100">
+                    <a:lnL w="38100" cap="flat" cmpd="sng" algn="ctr">
                       <a:solidFill>
                         <a:srgbClr val="FF9999"/>
                       </a:solidFill>
@@ -8274,7 +8495,7 @@
                       <a:headEnd type="none" w="med" len="med"/>
                       <a:tailEnd type="none" w="med" len="med"/>
                     </a:lnL>
-                    <a:lnR cmpd="sng" algn="ctr" cap="flat" w="38100">
+                    <a:lnR w="38100" cap="flat" cmpd="sng" algn="ctr">
                       <a:solidFill>
                         <a:srgbClr val="FF9999"/>
                       </a:solidFill>
@@ -8283,7 +8504,7 @@
                       <a:headEnd type="none" w="med" len="med"/>
                       <a:tailEnd type="none" w="med" len="med"/>
                     </a:lnR>
-                    <a:lnT cmpd="sng" algn="ctr" cap="flat" w="38100">
+                    <a:lnT w="38100" cap="flat" cmpd="sng" algn="ctr">
                       <a:solidFill>
                         <a:srgbClr val="FF9999"/>
                       </a:solidFill>
@@ -8292,7 +8513,7 @@
                       <a:headEnd type="none" w="med" len="med"/>
                       <a:tailEnd type="none" w="med" len="med"/>
                     </a:lnT>
-                    <a:lnB cmpd="sng" algn="ctr" cap="flat" w="38100">
+                    <a:lnB w="38100" cap="flat" cmpd="sng" algn="ctr">
                       <a:solidFill>
                         <a:srgbClr val="FF9999"/>
                       </a:solidFill>
@@ -8308,10 +8529,10 @@
                 </a:tc>
                 <a:tc>
                   <a:txBody>
-                    <a:bodyPr anchor="t" rtlCol="false"/>
+                    <a:bodyPr/>
                     <a:lstStyle/>
                     <a:p>
-                      <a:pPr algn="ctr" marL="0" indent="0" lvl="0">
+                      <a:pPr marL="0" lvl="0" indent="0" algn="ctr">
                         <a:lnSpc>
                           <a:spcPts val="2380"/>
                         </a:lnSpc>
@@ -8321,7 +8542,7 @@
                         <a:defRPr/>
                       </a:pPr>
                       <a:r>
-                        <a:rPr lang="en-US" b="true" sz="1700" strike="noStrike" u="none">
+                        <a:rPr lang="en-US" sz="1700" b="1" u="none" strike="noStrike">
                           <a:solidFill>
                             <a:srgbClr val="000000"/>
                           </a:solidFill>
@@ -8336,7 +8557,7 @@
                     </a:p>
                   </a:txBody>
                   <a:tcPr marL="190500" marR="190500" marT="190500" marB="190500" anchor="ctr">
-                    <a:lnL cmpd="sng" algn="ctr" cap="flat" w="38100">
+                    <a:lnL w="38100" cap="flat" cmpd="sng" algn="ctr">
                       <a:solidFill>
                         <a:srgbClr val="FF9999"/>
                       </a:solidFill>
@@ -8345,7 +8566,7 @@
                       <a:headEnd type="none" w="med" len="med"/>
                       <a:tailEnd type="none" w="med" len="med"/>
                     </a:lnL>
-                    <a:lnR cmpd="sng" algn="ctr" cap="flat" w="38100">
+                    <a:lnR w="38100" cap="flat" cmpd="sng" algn="ctr">
                       <a:solidFill>
                         <a:srgbClr val="FF9999"/>
                       </a:solidFill>
@@ -8354,7 +8575,7 @@
                       <a:headEnd type="none" w="med" len="med"/>
                       <a:tailEnd type="none" w="med" len="med"/>
                     </a:lnR>
-                    <a:lnT cmpd="sng" algn="ctr" cap="flat" w="38100">
+                    <a:lnT w="38100" cap="flat" cmpd="sng" algn="ctr">
                       <a:solidFill>
                         <a:srgbClr val="FF9999"/>
                       </a:solidFill>
@@ -8363,7 +8584,7 @@
                       <a:headEnd type="none" w="med" len="med"/>
                       <a:tailEnd type="none" w="med" len="med"/>
                     </a:lnT>
-                    <a:lnB cmpd="sng" algn="ctr" cap="flat" w="38100">
+                    <a:lnB w="38100" cap="flat" cmpd="sng" algn="ctr">
                       <a:solidFill>
                         <a:srgbClr val="FF9999"/>
                       </a:solidFill>
@@ -8379,10 +8600,10 @@
                 </a:tc>
                 <a:tc>
                   <a:txBody>
-                    <a:bodyPr anchor="t" rtlCol="false"/>
+                    <a:bodyPr/>
                     <a:lstStyle/>
                     <a:p>
-                      <a:pPr algn="ctr" marL="0" indent="0" lvl="0">
+                      <a:pPr marL="0" lvl="0" indent="0" algn="ctr">
                         <a:lnSpc>
                           <a:spcPts val="2380"/>
                         </a:lnSpc>
@@ -8392,7 +8613,7 @@
                         <a:defRPr/>
                       </a:pPr>
                       <a:r>
-                        <a:rPr lang="en-US" b="true" sz="1700">
+                        <a:rPr lang="en-US" sz="1700" b="1">
                           <a:solidFill>
                             <a:srgbClr val="000000"/>
                           </a:solidFill>
@@ -8407,7 +8628,7 @@
                     </a:p>
                   </a:txBody>
                   <a:tcPr marL="190500" marR="190500" marT="190500" marB="190500" anchor="ctr">
-                    <a:lnL cmpd="sng" algn="ctr" cap="flat" w="38100">
+                    <a:lnL w="38100" cap="flat" cmpd="sng" algn="ctr">
                       <a:solidFill>
                         <a:srgbClr val="FF9999"/>
                       </a:solidFill>
@@ -8416,7 +8637,7 @@
                       <a:headEnd type="none" w="med" len="med"/>
                       <a:tailEnd type="none" w="med" len="med"/>
                     </a:lnL>
-                    <a:lnR cmpd="sng" algn="ctr" cap="flat" w="38100">
+                    <a:lnR w="38100" cap="flat" cmpd="sng" algn="ctr">
                       <a:solidFill>
                         <a:srgbClr val="FF9999"/>
                       </a:solidFill>
@@ -8425,7 +8646,7 @@
                       <a:headEnd type="none" w="med" len="med"/>
                       <a:tailEnd type="none" w="med" len="med"/>
                     </a:lnR>
-                    <a:lnT cmpd="sng" algn="ctr" cap="flat" w="38100">
+                    <a:lnT w="38100" cap="flat" cmpd="sng" algn="ctr">
                       <a:solidFill>
                         <a:srgbClr val="FF9999"/>
                       </a:solidFill>
@@ -8434,7 +8655,7 @@
                       <a:headEnd type="none" w="med" len="med"/>
                       <a:tailEnd type="none" w="med" len="med"/>
                     </a:lnT>
-                    <a:lnB cmpd="sng" algn="ctr" cap="flat" w="38100">
+                    <a:lnB w="38100" cap="flat" cmpd="sng" algn="ctr">
                       <a:solidFill>
                         <a:srgbClr val="FF9999"/>
                       </a:solidFill>
@@ -8450,10 +8671,10 @@
                 </a:tc>
                 <a:tc>
                   <a:txBody>
-                    <a:bodyPr anchor="t" rtlCol="false"/>
+                    <a:bodyPr/>
                     <a:lstStyle/>
                     <a:p>
-                      <a:pPr algn="ctr" marL="0" indent="0" lvl="0">
+                      <a:pPr marL="0" lvl="0" indent="0" algn="ctr">
                         <a:lnSpc>
                           <a:spcPts val="2380"/>
                         </a:lnSpc>
@@ -8463,7 +8684,7 @@
                         <a:defRPr/>
                       </a:pPr>
                       <a:r>
-                        <a:rPr lang="en-US" b="true" sz="1700">
+                        <a:rPr lang="en-US" sz="1700" b="1">
                           <a:solidFill>
                             <a:srgbClr val="000000"/>
                           </a:solidFill>
@@ -8475,7 +8696,7 @@
                         <a:t>V</a:t>
                       </a:r>
                       <a:r>
-                        <a:rPr lang="en-US" b="true" sz="1700" strike="noStrike" u="none">
+                        <a:rPr lang="en-US" sz="1700" b="1" u="none" strike="noStrike">
                           <a:solidFill>
                             <a:srgbClr val="000000"/>
                           </a:solidFill>
@@ -8490,7 +8711,7 @@
                     </a:p>
                   </a:txBody>
                   <a:tcPr marL="190500" marR="190500" marT="190500" marB="190500" anchor="ctr">
-                    <a:lnL cmpd="sng" algn="ctr" cap="flat" w="38100">
+                    <a:lnL w="38100" cap="flat" cmpd="sng" algn="ctr">
                       <a:solidFill>
                         <a:srgbClr val="FF9999"/>
                       </a:solidFill>
@@ -8499,7 +8720,7 @@
                       <a:headEnd type="none" w="med" len="med"/>
                       <a:tailEnd type="none" w="med" len="med"/>
                     </a:lnL>
-                    <a:lnR cmpd="sng" algn="ctr" cap="flat" w="38100">
+                    <a:lnR w="38100" cap="flat" cmpd="sng" algn="ctr">
                       <a:solidFill>
                         <a:srgbClr val="FF9999"/>
                       </a:solidFill>
@@ -8508,7 +8729,7 @@
                       <a:headEnd type="none" w="med" len="med"/>
                       <a:tailEnd type="none" w="med" len="med"/>
                     </a:lnR>
-                    <a:lnT cmpd="sng" algn="ctr" cap="flat" w="38100">
+                    <a:lnT w="38100" cap="flat" cmpd="sng" algn="ctr">
                       <a:solidFill>
                         <a:srgbClr val="FF9999"/>
                       </a:solidFill>
@@ -8517,7 +8738,7 @@
                       <a:headEnd type="none" w="med" len="med"/>
                       <a:tailEnd type="none" w="med" len="med"/>
                     </a:lnT>
-                    <a:lnB cmpd="sng" algn="ctr" cap="flat" w="38100">
+                    <a:lnB w="38100" cap="flat" cmpd="sng" algn="ctr">
                       <a:solidFill>
                         <a:srgbClr val="FF9999"/>
                       </a:solidFill>
@@ -8533,10 +8754,10 @@
                 </a:tc>
                 <a:tc>
                   <a:txBody>
-                    <a:bodyPr anchor="t" rtlCol="false"/>
+                    <a:bodyPr/>
                     <a:lstStyle/>
                     <a:p>
-                      <a:pPr algn="ctr" marL="0" indent="0" lvl="0">
+                      <a:pPr marL="0" lvl="0" indent="0" algn="ctr">
                         <a:lnSpc>
                           <a:spcPts val="2380"/>
                         </a:lnSpc>
@@ -8546,7 +8767,7 @@
                         <a:defRPr/>
                       </a:pPr>
                       <a:r>
-                        <a:rPr lang="en-US" b="true" sz="1700" strike="noStrike" u="none">
+                        <a:rPr lang="en-US" sz="1700" b="1" u="none" strike="noStrike">
                           <a:solidFill>
                             <a:srgbClr val="000000"/>
                           </a:solidFill>
@@ -8561,7 +8782,7 @@
                     </a:p>
                   </a:txBody>
                   <a:tcPr marL="190500" marR="190500" marT="190500" marB="190500" anchor="ctr">
-                    <a:lnL cmpd="sng" algn="ctr" cap="flat" w="38100">
+                    <a:lnL w="38100" cap="flat" cmpd="sng" algn="ctr">
                       <a:solidFill>
                         <a:srgbClr val="FF9999"/>
                       </a:solidFill>
@@ -8570,7 +8791,7 @@
                       <a:headEnd type="none" w="med" len="med"/>
                       <a:tailEnd type="none" w="med" len="med"/>
                     </a:lnL>
-                    <a:lnR cmpd="sng" algn="ctr" cap="flat" w="38100">
+                    <a:lnR w="38100" cap="flat" cmpd="sng" algn="ctr">
                       <a:solidFill>
                         <a:srgbClr val="FF9999"/>
                       </a:solidFill>
@@ -8579,7 +8800,7 @@
                       <a:headEnd type="none" w="med" len="med"/>
                       <a:tailEnd type="none" w="med" len="med"/>
                     </a:lnR>
-                    <a:lnT cmpd="sng" algn="ctr" cap="flat" w="38100">
+                    <a:lnT w="38100" cap="flat" cmpd="sng" algn="ctr">
                       <a:solidFill>
                         <a:srgbClr val="FF9999"/>
                       </a:solidFill>
@@ -8588,7 +8809,7 @@
                       <a:headEnd type="none" w="med" len="med"/>
                       <a:tailEnd type="none" w="med" len="med"/>
                     </a:lnT>
-                    <a:lnB cmpd="sng" algn="ctr" cap="flat" w="38100">
+                    <a:lnB w="38100" cap="flat" cmpd="sng" algn="ctr">
                       <a:solidFill>
                         <a:srgbClr val="FF9999"/>
                       </a:solidFill>
@@ -8604,10 +8825,10 @@
                 </a:tc>
                 <a:tc>
                   <a:txBody>
-                    <a:bodyPr anchor="t" rtlCol="false"/>
+                    <a:bodyPr/>
                     <a:lstStyle/>
                     <a:p>
-                      <a:pPr algn="ctr" marL="0" indent="0" lvl="0">
+                      <a:pPr marL="0" lvl="0" indent="0" algn="ctr">
                         <a:lnSpc>
                           <a:spcPts val="2380"/>
                         </a:lnSpc>
@@ -8617,7 +8838,7 @@
                         <a:defRPr/>
                       </a:pPr>
                       <a:r>
-                        <a:rPr lang="en-US" b="true" sz="1700" strike="noStrike" u="none">
+                        <a:rPr lang="en-US" sz="1700" b="1" u="none" strike="noStrike">
                           <a:solidFill>
                             <a:srgbClr val="000000"/>
                           </a:solidFill>
@@ -8632,7 +8853,7 @@
                     </a:p>
                   </a:txBody>
                   <a:tcPr marL="190500" marR="190500" marT="190500" marB="190500" anchor="ctr">
-                    <a:lnL cmpd="sng" algn="ctr" cap="flat" w="38100">
+                    <a:lnL w="38100" cap="flat" cmpd="sng" algn="ctr">
                       <a:solidFill>
                         <a:srgbClr val="FF9999"/>
                       </a:solidFill>
@@ -8641,7 +8862,7 @@
                       <a:headEnd type="none" w="med" len="med"/>
                       <a:tailEnd type="none" w="med" len="med"/>
                     </a:lnL>
-                    <a:lnR cmpd="sng" algn="ctr" cap="flat" w="38100">
+                    <a:lnR w="38100" cap="flat" cmpd="sng" algn="ctr">
                       <a:solidFill>
                         <a:srgbClr val="FF9999"/>
                       </a:solidFill>
@@ -8650,7 +8871,7 @@
                       <a:headEnd type="none" w="med" len="med"/>
                       <a:tailEnd type="none" w="med" len="med"/>
                     </a:lnR>
-                    <a:lnT cmpd="sng" algn="ctr" cap="flat" w="38100">
+                    <a:lnT w="38100" cap="flat" cmpd="sng" algn="ctr">
                       <a:solidFill>
                         <a:srgbClr val="FF9999"/>
                       </a:solidFill>
@@ -8659,7 +8880,7 @@
                       <a:headEnd type="none" w="med" len="med"/>
                       <a:tailEnd type="none" w="med" len="med"/>
                     </a:lnT>
-                    <a:lnB cmpd="sng" algn="ctr" cap="flat" w="38100">
+                    <a:lnB w="38100" cap="flat" cmpd="sng" algn="ctr">
                       <a:solidFill>
                         <a:srgbClr val="FF9999"/>
                       </a:solidFill>
@@ -8675,10 +8896,10 @@
                 </a:tc>
                 <a:tc>
                   <a:txBody>
-                    <a:bodyPr anchor="t" rtlCol="false"/>
+                    <a:bodyPr/>
                     <a:lstStyle/>
                     <a:p>
-                      <a:pPr algn="ctr" marL="0" indent="0" lvl="0">
+                      <a:pPr marL="0" lvl="0" indent="0" algn="ctr">
                         <a:lnSpc>
                           <a:spcPts val="2380"/>
                         </a:lnSpc>
@@ -8688,7 +8909,7 @@
                         <a:defRPr/>
                       </a:pPr>
                       <a:r>
-                        <a:rPr lang="en-US" b="true" sz="1700" strike="noStrike" u="none">
+                        <a:rPr lang="en-US" sz="1700" b="1" u="none" strike="noStrike">
                           <a:solidFill>
                             <a:srgbClr val="000000"/>
                           </a:solidFill>
@@ -8703,7 +8924,7 @@
                     </a:p>
                   </a:txBody>
                   <a:tcPr marL="190500" marR="190500" marT="190500" marB="190500" anchor="ctr">
-                    <a:lnL cmpd="sng" algn="ctr" cap="flat" w="38100">
+                    <a:lnL w="38100" cap="flat" cmpd="sng" algn="ctr">
                       <a:solidFill>
                         <a:srgbClr val="FF9999"/>
                       </a:solidFill>
@@ -8712,7 +8933,7 @@
                       <a:headEnd type="none" w="med" len="med"/>
                       <a:tailEnd type="none" w="med" len="med"/>
                     </a:lnL>
-                    <a:lnR cmpd="sng" algn="ctr" cap="flat" w="38100">
+                    <a:lnR w="38100" cap="flat" cmpd="sng" algn="ctr">
                       <a:solidFill>
                         <a:srgbClr val="FF9999"/>
                       </a:solidFill>
@@ -8721,7 +8942,7 @@
                       <a:headEnd type="none" w="med" len="med"/>
                       <a:tailEnd type="none" w="med" len="med"/>
                     </a:lnR>
-                    <a:lnT cmpd="sng" algn="ctr" cap="flat" w="38100">
+                    <a:lnT w="38100" cap="flat" cmpd="sng" algn="ctr">
                       <a:solidFill>
                         <a:srgbClr val="FF9999"/>
                       </a:solidFill>
@@ -8730,7 +8951,7 @@
                       <a:headEnd type="none" w="med" len="med"/>
                       <a:tailEnd type="none" w="med" len="med"/>
                     </a:lnT>
-                    <a:lnB cmpd="sng" algn="ctr" cap="flat" w="38100">
+                    <a:lnB w="38100" cap="flat" cmpd="sng" algn="ctr">
                       <a:solidFill>
                         <a:srgbClr val="FF9999"/>
                       </a:solidFill>
@@ -8746,10 +8967,10 @@
                 </a:tc>
                 <a:tc>
                   <a:txBody>
-                    <a:bodyPr anchor="t" rtlCol="false"/>
+                    <a:bodyPr/>
                     <a:lstStyle/>
                     <a:p>
-                      <a:pPr algn="ctr" marL="0" indent="0" lvl="0">
+                      <a:pPr marL="0" lvl="0" indent="0" algn="ctr">
                         <a:lnSpc>
                           <a:spcPts val="2380"/>
                         </a:lnSpc>
@@ -8759,7 +8980,7 @@
                         <a:defRPr/>
                       </a:pPr>
                       <a:r>
-                        <a:rPr lang="en-US" b="true" sz="1700" strike="noStrike" u="none">
+                        <a:rPr lang="en-US" sz="1700" b="1" u="none" strike="noStrike">
                           <a:solidFill>
                             <a:srgbClr val="000000"/>
                           </a:solidFill>
@@ -8774,7 +8995,7 @@
                     </a:p>
                   </a:txBody>
                   <a:tcPr marL="190500" marR="190500" marT="190500" marB="190500" anchor="ctr">
-                    <a:lnL cmpd="sng" algn="ctr" cap="flat" w="38100">
+                    <a:lnL w="38100" cap="flat" cmpd="sng" algn="ctr">
                       <a:solidFill>
                         <a:srgbClr val="FF9999"/>
                       </a:solidFill>
@@ -8783,7 +9004,7 @@
                       <a:headEnd type="none" w="med" len="med"/>
                       <a:tailEnd type="none" w="med" len="med"/>
                     </a:lnL>
-                    <a:lnR cmpd="sng" algn="ctr" cap="flat" w="38100">
+                    <a:lnR w="38100" cap="flat" cmpd="sng" algn="ctr">
                       <a:solidFill>
                         <a:srgbClr val="FF9999"/>
                       </a:solidFill>
@@ -8792,7 +9013,7 @@
                       <a:headEnd type="none" w="med" len="med"/>
                       <a:tailEnd type="none" w="med" len="med"/>
                     </a:lnR>
-                    <a:lnT cmpd="sng" algn="ctr" cap="flat" w="38100">
+                    <a:lnT w="38100" cap="flat" cmpd="sng" algn="ctr">
                       <a:solidFill>
                         <a:srgbClr val="FF9999"/>
                       </a:solidFill>
@@ -8801,7 +9022,7 @@
                       <a:headEnd type="none" w="med" len="med"/>
                       <a:tailEnd type="none" w="med" len="med"/>
                     </a:lnT>
-                    <a:lnB cmpd="sng" algn="ctr" cap="flat" w="38100">
+                    <a:lnB w="38100" cap="flat" cmpd="sng" algn="ctr">
                       <a:solidFill>
                         <a:srgbClr val="FF9999"/>
                       </a:solidFill>
@@ -8815,14 +9036,19 @@
                     </a:solidFill>
                   </a:tcPr>
                 </a:tc>
+                <a:extLst>
+                  <a:ext uri="{0D108BD9-81ED-4DB2-BD59-A6C34878D82A}">
+                    <a16:rowId xmlns:a16="http://schemas.microsoft.com/office/drawing/2014/main" val="10002"/>
+                  </a:ext>
+                </a:extLst>
               </a:tr>
               <a:tr h="1054891">
                 <a:tc>
                   <a:txBody>
-                    <a:bodyPr anchor="t" rtlCol="false"/>
+                    <a:bodyPr/>
                     <a:lstStyle/>
                     <a:p>
-                      <a:pPr algn="ctr" marL="0" indent="0" lvl="0">
+                      <a:pPr marL="0" lvl="0" indent="0" algn="ctr">
                         <a:lnSpc>
                           <a:spcPts val="2380"/>
                         </a:lnSpc>
@@ -8832,7 +9058,7 @@
                         <a:defRPr/>
                       </a:pPr>
                       <a:r>
-                        <a:rPr lang="en-US" b="true" sz="1700" strike="noStrike" u="none">
+                        <a:rPr lang="en-US" sz="1700" b="1" u="none" strike="noStrike">
                           <a:solidFill>
                             <a:srgbClr val="000000"/>
                           </a:solidFill>
@@ -8847,7 +9073,7 @@
                     </a:p>
                   </a:txBody>
                   <a:tcPr marL="190500" marR="190500" marT="190500" marB="190500" anchor="ctr">
-                    <a:lnL cmpd="sng" algn="ctr" cap="flat" w="38100">
+                    <a:lnL w="38100" cap="flat" cmpd="sng" algn="ctr">
                       <a:solidFill>
                         <a:srgbClr val="FF9999"/>
                       </a:solidFill>
@@ -8856,7 +9082,7 @@
                       <a:headEnd type="none" w="med" len="med"/>
                       <a:tailEnd type="none" w="med" len="med"/>
                     </a:lnL>
-                    <a:lnR cmpd="sng" algn="ctr" cap="flat" w="38100">
+                    <a:lnR w="38100" cap="flat" cmpd="sng" algn="ctr">
                       <a:solidFill>
                         <a:srgbClr val="FF9999"/>
                       </a:solidFill>
@@ -8865,7 +9091,7 @@
                       <a:headEnd type="none" w="med" len="med"/>
                       <a:tailEnd type="none" w="med" len="med"/>
                     </a:lnR>
-                    <a:lnT cmpd="sng" algn="ctr" cap="flat" w="38100">
+                    <a:lnT w="38100" cap="flat" cmpd="sng" algn="ctr">
                       <a:solidFill>
                         <a:srgbClr val="FF9999"/>
                       </a:solidFill>
@@ -8874,7 +9100,7 @@
                       <a:headEnd type="none" w="med" len="med"/>
                       <a:tailEnd type="none" w="med" len="med"/>
                     </a:lnT>
-                    <a:lnB cmpd="sng" algn="ctr" cap="flat" w="38100">
+                    <a:lnB w="38100" cap="flat" cmpd="sng" algn="ctr">
                       <a:solidFill>
                         <a:srgbClr val="FF9999"/>
                       </a:solidFill>
@@ -8890,10 +9116,10 @@
                 </a:tc>
                 <a:tc>
                   <a:txBody>
-                    <a:bodyPr anchor="t" rtlCol="false"/>
+                    <a:bodyPr/>
                     <a:lstStyle/>
                     <a:p>
-                      <a:pPr algn="ctr" marL="0" indent="0" lvl="0">
+                      <a:pPr marL="0" lvl="0" indent="0" algn="ctr">
                         <a:lnSpc>
                           <a:spcPts val="2380"/>
                         </a:lnSpc>
@@ -8903,7 +9129,7 @@
                         <a:defRPr/>
                       </a:pPr>
                       <a:r>
-                        <a:rPr lang="en-US" b="true" sz="1700" strike="noStrike" u="none">
+                        <a:rPr lang="en-US" sz="1700" b="1" u="none" strike="noStrike">
                           <a:solidFill>
                             <a:srgbClr val="000000"/>
                           </a:solidFill>
@@ -8918,7 +9144,7 @@
                     </a:p>
                   </a:txBody>
                   <a:tcPr marL="190500" marR="190500" marT="190500" marB="190500" anchor="ctr">
-                    <a:lnL cmpd="sng" algn="ctr" cap="flat" w="38100">
+                    <a:lnL w="38100" cap="flat" cmpd="sng" algn="ctr">
                       <a:solidFill>
                         <a:srgbClr val="FF9999"/>
                       </a:solidFill>
@@ -8927,7 +9153,7 @@
                       <a:headEnd type="none" w="med" len="med"/>
                       <a:tailEnd type="none" w="med" len="med"/>
                     </a:lnL>
-                    <a:lnR cmpd="sng" algn="ctr" cap="flat" w="38100">
+                    <a:lnR w="38100" cap="flat" cmpd="sng" algn="ctr">
                       <a:solidFill>
                         <a:srgbClr val="FF9999"/>
                       </a:solidFill>
@@ -8936,7 +9162,7 @@
                       <a:headEnd type="none" w="med" len="med"/>
                       <a:tailEnd type="none" w="med" len="med"/>
                     </a:lnR>
-                    <a:lnT cmpd="sng" algn="ctr" cap="flat" w="38100">
+                    <a:lnT w="38100" cap="flat" cmpd="sng" algn="ctr">
                       <a:solidFill>
                         <a:srgbClr val="FF9999"/>
                       </a:solidFill>
@@ -8945,7 +9171,7 @@
                       <a:headEnd type="none" w="med" len="med"/>
                       <a:tailEnd type="none" w="med" len="med"/>
                     </a:lnT>
-                    <a:lnB cmpd="sng" algn="ctr" cap="flat" w="38100">
+                    <a:lnB w="38100" cap="flat" cmpd="sng" algn="ctr">
                       <a:solidFill>
                         <a:srgbClr val="FF9999"/>
                       </a:solidFill>
@@ -8961,10 +9187,10 @@
                 </a:tc>
                 <a:tc>
                   <a:txBody>
-                    <a:bodyPr anchor="t" rtlCol="false"/>
+                    <a:bodyPr/>
                     <a:lstStyle/>
                     <a:p>
-                      <a:pPr algn="ctr" marL="0" indent="0" lvl="0">
+                      <a:pPr marL="0" lvl="0" indent="0" algn="ctr">
                         <a:lnSpc>
                           <a:spcPts val="2380"/>
                         </a:lnSpc>
@@ -8974,7 +9200,7 @@
                         <a:defRPr/>
                       </a:pPr>
                       <a:r>
-                        <a:rPr lang="en-US" b="true" sz="1700">
+                        <a:rPr lang="en-US" sz="1700" b="1">
                           <a:solidFill>
                             <a:srgbClr val="000000"/>
                           </a:solidFill>
@@ -8989,7 +9215,7 @@
                     </a:p>
                   </a:txBody>
                   <a:tcPr marL="190500" marR="190500" marT="190500" marB="190500" anchor="ctr">
-                    <a:lnL cmpd="sng" algn="ctr" cap="flat" w="38100">
+                    <a:lnL w="38100" cap="flat" cmpd="sng" algn="ctr">
                       <a:solidFill>
                         <a:srgbClr val="FF9999"/>
                       </a:solidFill>
@@ -8998,7 +9224,7 @@
                       <a:headEnd type="none" w="med" len="med"/>
                       <a:tailEnd type="none" w="med" len="med"/>
                     </a:lnL>
-                    <a:lnR cmpd="sng" algn="ctr" cap="flat" w="38100">
+                    <a:lnR w="38100" cap="flat" cmpd="sng" algn="ctr">
                       <a:solidFill>
                         <a:srgbClr val="FF9999"/>
                       </a:solidFill>
@@ -9007,7 +9233,7 @@
                       <a:headEnd type="none" w="med" len="med"/>
                       <a:tailEnd type="none" w="med" len="med"/>
                     </a:lnR>
-                    <a:lnT cmpd="sng" algn="ctr" cap="flat" w="38100">
+                    <a:lnT w="38100" cap="flat" cmpd="sng" algn="ctr">
                       <a:solidFill>
                         <a:srgbClr val="FF9999"/>
                       </a:solidFill>
@@ -9016,7 +9242,7 @@
                       <a:headEnd type="none" w="med" len="med"/>
                       <a:tailEnd type="none" w="med" len="med"/>
                     </a:lnT>
-                    <a:lnB cmpd="sng" algn="ctr" cap="flat" w="38100">
+                    <a:lnB w="38100" cap="flat" cmpd="sng" algn="ctr">
                       <a:solidFill>
                         <a:srgbClr val="FF9999"/>
                       </a:solidFill>
@@ -9032,10 +9258,10 @@
                 </a:tc>
                 <a:tc>
                   <a:txBody>
-                    <a:bodyPr anchor="t" rtlCol="false"/>
+                    <a:bodyPr/>
                     <a:lstStyle/>
                     <a:p>
-                      <a:pPr algn="ctr" marL="0" indent="0" lvl="0">
+                      <a:pPr marL="0" lvl="0" indent="0" algn="ctr">
                         <a:lnSpc>
                           <a:spcPts val="2380"/>
                         </a:lnSpc>
@@ -9045,7 +9271,7 @@
                         <a:defRPr/>
                       </a:pPr>
                       <a:r>
-                        <a:rPr lang="en-US" b="true" sz="1700" strike="noStrike" u="none">
+                        <a:rPr lang="en-US" sz="1700" b="1" u="none" strike="noStrike">
                           <a:solidFill>
                             <a:srgbClr val="000000"/>
                           </a:solidFill>
@@ -9060,7 +9286,7 @@
                     </a:p>
                   </a:txBody>
                   <a:tcPr marL="190500" marR="190500" marT="190500" marB="190500" anchor="ctr">
-                    <a:lnL cmpd="sng" algn="ctr" cap="flat" w="38100">
+                    <a:lnL w="38100" cap="flat" cmpd="sng" algn="ctr">
                       <a:solidFill>
                         <a:srgbClr val="FF9999"/>
                       </a:solidFill>
@@ -9069,7 +9295,7 @@
                       <a:headEnd type="none" w="med" len="med"/>
                       <a:tailEnd type="none" w="med" len="med"/>
                     </a:lnL>
-                    <a:lnR cmpd="sng" algn="ctr" cap="flat" w="38100">
+                    <a:lnR w="38100" cap="flat" cmpd="sng" algn="ctr">
                       <a:solidFill>
                         <a:srgbClr val="FF9999"/>
                       </a:solidFill>
@@ -9078,7 +9304,7 @@
                       <a:headEnd type="none" w="med" len="med"/>
                       <a:tailEnd type="none" w="med" len="med"/>
                     </a:lnR>
-                    <a:lnT cmpd="sng" algn="ctr" cap="flat" w="38100">
+                    <a:lnT w="38100" cap="flat" cmpd="sng" algn="ctr">
                       <a:solidFill>
                         <a:srgbClr val="FF9999"/>
                       </a:solidFill>
@@ -9087,7 +9313,7 @@
                       <a:headEnd type="none" w="med" len="med"/>
                       <a:tailEnd type="none" w="med" len="med"/>
                     </a:lnT>
-                    <a:lnB cmpd="sng" algn="ctr" cap="flat" w="38100">
+                    <a:lnB w="38100" cap="flat" cmpd="sng" algn="ctr">
                       <a:solidFill>
                         <a:srgbClr val="FF9999"/>
                       </a:solidFill>
@@ -9103,10 +9329,10 @@
                 </a:tc>
                 <a:tc>
                   <a:txBody>
-                    <a:bodyPr anchor="t" rtlCol="false"/>
+                    <a:bodyPr/>
                     <a:lstStyle/>
                     <a:p>
-                      <a:pPr algn="ctr" marL="0" indent="0" lvl="0">
+                      <a:pPr marL="0" lvl="0" indent="0" algn="ctr">
                         <a:lnSpc>
                           <a:spcPts val="2380"/>
                         </a:lnSpc>
@@ -9116,7 +9342,7 @@
                         <a:defRPr/>
                       </a:pPr>
                       <a:r>
-                        <a:rPr lang="en-US" b="true" sz="1700" strike="noStrike" u="none">
+                        <a:rPr lang="en-US" sz="1700" b="1" u="none" strike="noStrike">
                           <a:solidFill>
                             <a:srgbClr val="000000"/>
                           </a:solidFill>
@@ -9131,7 +9357,7 @@
                     </a:p>
                   </a:txBody>
                   <a:tcPr marL="190500" marR="190500" marT="190500" marB="190500" anchor="ctr">
-                    <a:lnL cmpd="sng" algn="ctr" cap="flat" w="38100">
+                    <a:lnL w="38100" cap="flat" cmpd="sng" algn="ctr">
                       <a:solidFill>
                         <a:srgbClr val="FF9999"/>
                       </a:solidFill>
@@ -9140,7 +9366,7 @@
                       <a:headEnd type="none" w="med" len="med"/>
                       <a:tailEnd type="none" w="med" len="med"/>
                     </a:lnL>
-                    <a:lnR cmpd="sng" algn="ctr" cap="flat" w="38100">
+                    <a:lnR w="38100" cap="flat" cmpd="sng" algn="ctr">
                       <a:solidFill>
                         <a:srgbClr val="FF9999"/>
                       </a:solidFill>
@@ -9149,7 +9375,7 @@
                       <a:headEnd type="none" w="med" len="med"/>
                       <a:tailEnd type="none" w="med" len="med"/>
                     </a:lnR>
-                    <a:lnT cmpd="sng" algn="ctr" cap="flat" w="38100">
+                    <a:lnT w="38100" cap="flat" cmpd="sng" algn="ctr">
                       <a:solidFill>
                         <a:srgbClr val="FF9999"/>
                       </a:solidFill>
@@ -9158,7 +9384,7 @@
                       <a:headEnd type="none" w="med" len="med"/>
                       <a:tailEnd type="none" w="med" len="med"/>
                     </a:lnT>
-                    <a:lnB cmpd="sng" algn="ctr" cap="flat" w="38100">
+                    <a:lnB w="38100" cap="flat" cmpd="sng" algn="ctr">
                       <a:solidFill>
                         <a:srgbClr val="FF9999"/>
                       </a:solidFill>
@@ -9174,10 +9400,10 @@
                 </a:tc>
                 <a:tc>
                   <a:txBody>
-                    <a:bodyPr anchor="t" rtlCol="false"/>
+                    <a:bodyPr/>
                     <a:lstStyle/>
                     <a:p>
-                      <a:pPr algn="ctr" marL="0" indent="0" lvl="0">
+                      <a:pPr marL="0" lvl="0" indent="0" algn="ctr">
                         <a:lnSpc>
                           <a:spcPts val="2380"/>
                         </a:lnSpc>
@@ -9187,7 +9413,7 @@
                         <a:defRPr/>
                       </a:pPr>
                       <a:r>
-                        <a:rPr lang="en-US" b="true" sz="1700" strike="noStrike" u="none">
+                        <a:rPr lang="en-US" sz="1700" b="1" u="none" strike="noStrike">
                           <a:solidFill>
                             <a:srgbClr val="000000"/>
                           </a:solidFill>
@@ -9202,7 +9428,7 @@
                     </a:p>
                   </a:txBody>
                   <a:tcPr marL="190500" marR="190500" marT="190500" marB="190500" anchor="ctr">
-                    <a:lnL cmpd="sng" algn="ctr" cap="flat" w="38100">
+                    <a:lnL w="38100" cap="flat" cmpd="sng" algn="ctr">
                       <a:solidFill>
                         <a:srgbClr val="FF9999"/>
                       </a:solidFill>
@@ -9211,7 +9437,7 @@
                       <a:headEnd type="none" w="med" len="med"/>
                       <a:tailEnd type="none" w="med" len="med"/>
                     </a:lnL>
-                    <a:lnR cmpd="sng" algn="ctr" cap="flat" w="38100">
+                    <a:lnR w="38100" cap="flat" cmpd="sng" algn="ctr">
                       <a:solidFill>
                         <a:srgbClr val="FF9999"/>
                       </a:solidFill>
@@ -9220,7 +9446,7 @@
                       <a:headEnd type="none" w="med" len="med"/>
                       <a:tailEnd type="none" w="med" len="med"/>
                     </a:lnR>
-                    <a:lnT cmpd="sng" algn="ctr" cap="flat" w="38100">
+                    <a:lnT w="38100" cap="flat" cmpd="sng" algn="ctr">
                       <a:solidFill>
                         <a:srgbClr val="FF9999"/>
                       </a:solidFill>
@@ -9229,7 +9455,7 @@
                       <a:headEnd type="none" w="med" len="med"/>
                       <a:tailEnd type="none" w="med" len="med"/>
                     </a:lnT>
-                    <a:lnB cmpd="sng" algn="ctr" cap="flat" w="38100">
+                    <a:lnB w="38100" cap="flat" cmpd="sng" algn="ctr">
                       <a:solidFill>
                         <a:srgbClr val="FF9999"/>
                       </a:solidFill>
@@ -9245,10 +9471,10 @@
                 </a:tc>
                 <a:tc>
                   <a:txBody>
-                    <a:bodyPr anchor="t" rtlCol="false"/>
+                    <a:bodyPr/>
                     <a:lstStyle/>
                     <a:p>
-                      <a:pPr algn="ctr" marL="0" indent="0" lvl="0">
+                      <a:pPr marL="0" lvl="0" indent="0" algn="ctr">
                         <a:lnSpc>
                           <a:spcPts val="2380"/>
                         </a:lnSpc>
@@ -9258,7 +9484,7 @@
                         <a:defRPr/>
                       </a:pPr>
                       <a:r>
-                        <a:rPr lang="en-US" b="true" sz="1700" strike="noStrike" u="none">
+                        <a:rPr lang="en-US" sz="1700" b="1" u="none" strike="noStrike">
                           <a:solidFill>
                             <a:srgbClr val="000000"/>
                           </a:solidFill>
@@ -9273,7 +9499,7 @@
                     </a:p>
                   </a:txBody>
                   <a:tcPr marL="190500" marR="190500" marT="190500" marB="190500" anchor="ctr">
-                    <a:lnL cmpd="sng" algn="ctr" cap="flat" w="38100">
+                    <a:lnL w="38100" cap="flat" cmpd="sng" algn="ctr">
                       <a:solidFill>
                         <a:srgbClr val="FF9999"/>
                       </a:solidFill>
@@ -9282,7 +9508,7 @@
                       <a:headEnd type="none" w="med" len="med"/>
                       <a:tailEnd type="none" w="med" len="med"/>
                     </a:lnL>
-                    <a:lnR cmpd="sng" algn="ctr" cap="flat" w="38100">
+                    <a:lnR w="38100" cap="flat" cmpd="sng" algn="ctr">
                       <a:solidFill>
                         <a:srgbClr val="FF9999"/>
                       </a:solidFill>
@@ -9291,7 +9517,7 @@
                       <a:headEnd type="none" w="med" len="med"/>
                       <a:tailEnd type="none" w="med" len="med"/>
                     </a:lnR>
-                    <a:lnT cmpd="sng" algn="ctr" cap="flat" w="38100">
+                    <a:lnT w="38100" cap="flat" cmpd="sng" algn="ctr">
                       <a:solidFill>
                         <a:srgbClr val="FF9999"/>
                       </a:solidFill>
@@ -9300,7 +9526,7 @@
                       <a:headEnd type="none" w="med" len="med"/>
                       <a:tailEnd type="none" w="med" len="med"/>
                     </a:lnT>
-                    <a:lnB cmpd="sng" algn="ctr" cap="flat" w="38100">
+                    <a:lnB w="38100" cap="flat" cmpd="sng" algn="ctr">
                       <a:solidFill>
                         <a:srgbClr val="FF9999"/>
                       </a:solidFill>
@@ -9316,10 +9542,10 @@
                 </a:tc>
                 <a:tc>
                   <a:txBody>
-                    <a:bodyPr anchor="t" rtlCol="false"/>
+                    <a:bodyPr/>
                     <a:lstStyle/>
                     <a:p>
-                      <a:pPr algn="ctr" marL="0" indent="0" lvl="0">
+                      <a:pPr marL="0" lvl="0" indent="0" algn="ctr">
                         <a:lnSpc>
                           <a:spcPts val="2380"/>
                         </a:lnSpc>
@@ -9329,7 +9555,7 @@
                         <a:defRPr/>
                       </a:pPr>
                       <a:r>
-                        <a:rPr lang="en-US" b="true" sz="1700">
+                        <a:rPr lang="en-US" sz="1700" b="1">
                           <a:solidFill>
                             <a:srgbClr val="000000"/>
                           </a:solidFill>
@@ -9344,7 +9570,7 @@
                     </a:p>
                   </a:txBody>
                   <a:tcPr marL="190500" marR="190500" marT="190500" marB="190500" anchor="ctr">
-                    <a:lnL cmpd="sng" algn="ctr" cap="flat" w="38100">
+                    <a:lnL w="38100" cap="flat" cmpd="sng" algn="ctr">
                       <a:solidFill>
                         <a:srgbClr val="FF9999"/>
                       </a:solidFill>
@@ -9353,7 +9579,7 @@
                       <a:headEnd type="none" w="med" len="med"/>
                       <a:tailEnd type="none" w="med" len="med"/>
                     </a:lnL>
-                    <a:lnR cmpd="sng" algn="ctr" cap="flat" w="38100">
+                    <a:lnR w="38100" cap="flat" cmpd="sng" algn="ctr">
                       <a:solidFill>
                         <a:srgbClr val="FF9999"/>
                       </a:solidFill>
@@ -9362,7 +9588,7 @@
                       <a:headEnd type="none" w="med" len="med"/>
                       <a:tailEnd type="none" w="med" len="med"/>
                     </a:lnR>
-                    <a:lnT cmpd="sng" algn="ctr" cap="flat" w="38100">
+                    <a:lnT w="38100" cap="flat" cmpd="sng" algn="ctr">
                       <a:solidFill>
                         <a:srgbClr val="FF9999"/>
                       </a:solidFill>
@@ -9371,7 +9597,7 @@
                       <a:headEnd type="none" w="med" len="med"/>
                       <a:tailEnd type="none" w="med" len="med"/>
                     </a:lnT>
-                    <a:lnB cmpd="sng" algn="ctr" cap="flat" w="38100">
+                    <a:lnB w="38100" cap="flat" cmpd="sng" algn="ctr">
                       <a:solidFill>
                         <a:srgbClr val="FF9999"/>
                       </a:solidFill>
@@ -9385,6 +9611,11 @@
                     </a:solidFill>
                   </a:tcPr>
                 </a:tc>
+                <a:extLst>
+                  <a:ext uri="{0D108BD9-81ED-4DB2-BD59-A6C34878D82A}">
+                    <a16:rowId xmlns:a16="http://schemas.microsoft.com/office/drawing/2014/main" val="10003"/>
+                  </a:ext>
+                </a:extLst>
               </a:tr>
             </a:tbl>
           </a:graphicData>
@@ -9392,12 +9623,12 @@
       </p:graphicFrame>
       <p:sp>
         <p:nvSpPr>
-          <p:cNvPr name="TextBox 4" id="4"/>
-          <p:cNvSpPr txBox="true"/>
+          <p:cNvPr id="4" name="TextBox 4"/>
+          <p:cNvSpPr txBox="1"/>
           <p:nvPr/>
         </p:nvSpPr>
         <p:spPr>
-          <a:xfrm rot="0">
+          <a:xfrm>
             <a:off x="586804" y="171450"/>
             <a:ext cx="6435910" cy="571500"/>
           </a:xfrm>
@@ -9406,7 +9637,7 @@
           </a:prstGeom>
         </p:spPr>
         <p:txBody>
-          <a:bodyPr anchor="t" rtlCol="false" tIns="0" lIns="0" bIns="0" rIns="0">
+          <a:bodyPr lIns="0" tIns="0" rIns="0" bIns="0" rtlCol="0" anchor="t">
             <a:spAutoFit/>
           </a:bodyPr>
           <a:lstStyle/>
@@ -9417,7 +9648,7 @@
               </a:lnSpc>
             </a:pPr>
             <a:r>
-              <a:rPr lang="en-US" sz="3800" b="true">
+              <a:rPr lang="en-US" sz="3800" b="1">
                 <a:solidFill>
                   <a:srgbClr val="006747"/>
                 </a:solidFill>
@@ -9433,36 +9664,78 @@
       </p:sp>
       <p:graphicFrame>
         <p:nvGraphicFramePr>
-          <p:cNvPr name="Table 5" id="5"/>
+          <p:cNvPr id="5" name="Table 5"/>
           <p:cNvGraphicFramePr>
-            <a:graphicFrameLocks noGrp="true"/>
+            <a:graphicFrameLocks noGrp="1"/>
           </p:cNvGraphicFramePr>
           <p:nvPr/>
         </p:nvGraphicFramePr>
         <p:xfrm>
           <a:off x="428238" y="7002863"/>
-          <a:ext cx="16576008" cy="2857500"/>
+          <a:ext cx="16576008" cy="2857501"/>
         </p:xfrm>
         <a:graphic>
           <a:graphicData uri="http://schemas.openxmlformats.org/drawingml/2006/table">
             <a:tbl>
               <a:tblPr/>
               <a:tblGrid>
-                <a:gridCol w="1041981"/>
-                <a:gridCol w="3584889"/>
-                <a:gridCol w="1657841"/>
-                <a:gridCol w="2810097"/>
-                <a:gridCol w="2174370"/>
-                <a:gridCol w="2298069"/>
-                <a:gridCol w="3008761"/>
+                <a:gridCol w="1041981">
+                  <a:extLst>
+                    <a:ext uri="{9D8B030D-6E8A-4147-A177-3AD203B41FA5}">
+                      <a16:colId xmlns:a16="http://schemas.microsoft.com/office/drawing/2014/main" val="20000"/>
+                    </a:ext>
+                  </a:extLst>
+                </a:gridCol>
+                <a:gridCol w="3584889">
+                  <a:extLst>
+                    <a:ext uri="{9D8B030D-6E8A-4147-A177-3AD203B41FA5}">
+                      <a16:colId xmlns:a16="http://schemas.microsoft.com/office/drawing/2014/main" val="20001"/>
+                    </a:ext>
+                  </a:extLst>
+                </a:gridCol>
+                <a:gridCol w="1657841">
+                  <a:extLst>
+                    <a:ext uri="{9D8B030D-6E8A-4147-A177-3AD203B41FA5}">
+                      <a16:colId xmlns:a16="http://schemas.microsoft.com/office/drawing/2014/main" val="20002"/>
+                    </a:ext>
+                  </a:extLst>
+                </a:gridCol>
+                <a:gridCol w="2810097">
+                  <a:extLst>
+                    <a:ext uri="{9D8B030D-6E8A-4147-A177-3AD203B41FA5}">
+                      <a16:colId xmlns:a16="http://schemas.microsoft.com/office/drawing/2014/main" val="20003"/>
+                    </a:ext>
+                  </a:extLst>
+                </a:gridCol>
+                <a:gridCol w="2174370">
+                  <a:extLst>
+                    <a:ext uri="{9D8B030D-6E8A-4147-A177-3AD203B41FA5}">
+                      <a16:colId xmlns:a16="http://schemas.microsoft.com/office/drawing/2014/main" val="20004"/>
+                    </a:ext>
+                  </a:extLst>
+                </a:gridCol>
+                <a:gridCol w="2298069">
+                  <a:extLst>
+                    <a:ext uri="{9D8B030D-6E8A-4147-A177-3AD203B41FA5}">
+                      <a16:colId xmlns:a16="http://schemas.microsoft.com/office/drawing/2014/main" val="20005"/>
+                    </a:ext>
+                  </a:extLst>
+                </a:gridCol>
+                <a:gridCol w="3008761">
+                  <a:extLst>
+                    <a:ext uri="{9D8B030D-6E8A-4147-A177-3AD203B41FA5}">
+                      <a16:colId xmlns:a16="http://schemas.microsoft.com/office/drawing/2014/main" val="20006"/>
+                    </a:ext>
+                  </a:extLst>
+                </a:gridCol>
               </a:tblGrid>
               <a:tr h="762644">
                 <a:tc>
                   <a:txBody>
-                    <a:bodyPr anchor="t" rtlCol="false"/>
+                    <a:bodyPr/>
                     <a:lstStyle/>
                     <a:p>
-                      <a:pPr algn="ctr" marL="0" indent="0" lvl="0">
+                      <a:pPr marL="0" lvl="0" indent="0" algn="ctr">
                         <a:lnSpc>
                           <a:spcPts val="2380"/>
                         </a:lnSpc>
@@ -9472,7 +9745,7 @@
                         <a:defRPr/>
                       </a:pPr>
                       <a:r>
-                        <a:rPr lang="en-US" b="true" sz="1700" strike="noStrike" u="none">
+                        <a:rPr lang="en-US" sz="1700" b="1" u="none" strike="noStrike">
                           <a:solidFill>
                             <a:srgbClr val="FFFFFF"/>
                           </a:solidFill>
@@ -9487,7 +9760,7 @@
                     </a:p>
                   </a:txBody>
                   <a:tcPr marL="190500" marR="190500" marT="190500" marB="190500" anchor="ctr">
-                    <a:lnL cmpd="sng" algn="ctr" cap="flat" w="38100">
+                    <a:lnL w="38100" cap="flat" cmpd="sng" algn="ctr">
                       <a:solidFill>
                         <a:srgbClr val="FF9999"/>
                       </a:solidFill>
@@ -9496,7 +9769,7 @@
                       <a:headEnd type="none" w="med" len="med"/>
                       <a:tailEnd type="none" w="med" len="med"/>
                     </a:lnL>
-                    <a:lnR cmpd="sng" algn="ctr" cap="flat" w="38100">
+                    <a:lnR w="38100" cap="flat" cmpd="sng" algn="ctr">
                       <a:solidFill>
                         <a:srgbClr val="FF9999"/>
                       </a:solidFill>
@@ -9505,7 +9778,7 @@
                       <a:headEnd type="none" w="med" len="med"/>
                       <a:tailEnd type="none" w="med" len="med"/>
                     </a:lnR>
-                    <a:lnT cmpd="sng" algn="ctr" cap="flat" w="38100">
+                    <a:lnT w="38100" cap="flat" cmpd="sng" algn="ctr">
                       <a:solidFill>
                         <a:srgbClr val="FF9999"/>
                       </a:solidFill>
@@ -9514,7 +9787,7 @@
                       <a:headEnd type="none" w="med" len="med"/>
                       <a:tailEnd type="none" w="med" len="med"/>
                     </a:lnT>
-                    <a:lnB cmpd="sng" algn="ctr" cap="flat" w="38100">
+                    <a:lnB w="38100" cap="flat" cmpd="sng" algn="ctr">
                       <a:solidFill>
                         <a:srgbClr val="FF9999"/>
                       </a:solidFill>
@@ -9530,10 +9803,10 @@
                 </a:tc>
                 <a:tc>
                   <a:txBody>
-                    <a:bodyPr anchor="t" rtlCol="false"/>
+                    <a:bodyPr/>
                     <a:lstStyle/>
                     <a:p>
-                      <a:pPr algn="ctr" marL="0" indent="0" lvl="0">
+                      <a:pPr marL="0" lvl="0" indent="0" algn="ctr">
                         <a:lnSpc>
                           <a:spcPts val="2380"/>
                         </a:lnSpc>
@@ -9543,7 +9816,7 @@
                         <a:defRPr/>
                       </a:pPr>
                       <a:r>
-                        <a:rPr lang="en-US" b="true" sz="1700">
+                        <a:rPr lang="en-US" sz="1700" b="1">
                           <a:solidFill>
                             <a:srgbClr val="FFFFFF"/>
                           </a:solidFill>
@@ -9558,7 +9831,7 @@
                     </a:p>
                   </a:txBody>
                   <a:tcPr marL="190500" marR="190500" marT="190500" marB="190500" anchor="ctr">
-                    <a:lnL cmpd="sng" algn="ctr" cap="flat" w="38100">
+                    <a:lnL w="38100" cap="flat" cmpd="sng" algn="ctr">
                       <a:solidFill>
                         <a:srgbClr val="FF9999"/>
                       </a:solidFill>
@@ -9567,7 +9840,7 @@
                       <a:headEnd type="none" w="med" len="med"/>
                       <a:tailEnd type="none" w="med" len="med"/>
                     </a:lnL>
-                    <a:lnR cmpd="sng" algn="ctr" cap="flat" w="38100">
+                    <a:lnR w="38100" cap="flat" cmpd="sng" algn="ctr">
                       <a:solidFill>
                         <a:srgbClr val="FF9999"/>
                       </a:solidFill>
@@ -9576,7 +9849,7 @@
                       <a:headEnd type="none" w="med" len="med"/>
                       <a:tailEnd type="none" w="med" len="med"/>
                     </a:lnR>
-                    <a:lnT cmpd="sng" algn="ctr" cap="flat" w="38100">
+                    <a:lnT w="38100" cap="flat" cmpd="sng" algn="ctr">
                       <a:solidFill>
                         <a:srgbClr val="FF9999"/>
                       </a:solidFill>
@@ -9585,7 +9858,7 @@
                       <a:headEnd type="none" w="med" len="med"/>
                       <a:tailEnd type="none" w="med" len="med"/>
                     </a:lnT>
-                    <a:lnB cmpd="sng" algn="ctr" cap="flat" w="38100">
+                    <a:lnB w="38100" cap="flat" cmpd="sng" algn="ctr">
                       <a:solidFill>
                         <a:srgbClr val="FF9999"/>
                       </a:solidFill>
@@ -9601,10 +9874,10 @@
                 </a:tc>
                 <a:tc>
                   <a:txBody>
-                    <a:bodyPr anchor="t" rtlCol="false"/>
+                    <a:bodyPr/>
                     <a:lstStyle/>
                     <a:p>
-                      <a:pPr algn="ctr" marL="0" indent="0" lvl="0">
+                      <a:pPr marL="0" lvl="0" indent="0" algn="ctr">
                         <a:lnSpc>
                           <a:spcPts val="2380"/>
                         </a:lnSpc>
@@ -9614,7 +9887,7 @@
                         <a:defRPr/>
                       </a:pPr>
                       <a:r>
-                        <a:rPr lang="en-US" b="true" sz="1700">
+                        <a:rPr lang="en-US" sz="1700" b="1">
                           <a:solidFill>
                             <a:srgbClr val="FFFFFF"/>
                           </a:solidFill>
@@ -9629,7 +9902,7 @@
                     </a:p>
                   </a:txBody>
                   <a:tcPr marL="190500" marR="190500" marT="190500" marB="190500" anchor="ctr">
-                    <a:lnL cmpd="sng" algn="ctr" cap="flat" w="38100">
+                    <a:lnL w="38100" cap="flat" cmpd="sng" algn="ctr">
                       <a:solidFill>
                         <a:srgbClr val="FF9999"/>
                       </a:solidFill>
@@ -9638,7 +9911,7 @@
                       <a:headEnd type="none" w="med" len="med"/>
                       <a:tailEnd type="none" w="med" len="med"/>
                     </a:lnL>
-                    <a:lnR cmpd="sng" algn="ctr" cap="flat" w="38100">
+                    <a:lnR w="38100" cap="flat" cmpd="sng" algn="ctr">
                       <a:solidFill>
                         <a:srgbClr val="FF9999"/>
                       </a:solidFill>
@@ -9647,7 +9920,7 @@
                       <a:headEnd type="none" w="med" len="med"/>
                       <a:tailEnd type="none" w="med" len="med"/>
                     </a:lnR>
-                    <a:lnT cmpd="sng" algn="ctr" cap="flat" w="38100">
+                    <a:lnT w="38100" cap="flat" cmpd="sng" algn="ctr">
                       <a:solidFill>
                         <a:srgbClr val="FF9999"/>
                       </a:solidFill>
@@ -9656,7 +9929,7 @@
                       <a:headEnd type="none" w="med" len="med"/>
                       <a:tailEnd type="none" w="med" len="med"/>
                     </a:lnT>
-                    <a:lnB cmpd="sng" algn="ctr" cap="flat" w="38100">
+                    <a:lnB w="38100" cap="flat" cmpd="sng" algn="ctr">
                       <a:solidFill>
                         <a:srgbClr val="FF9999"/>
                       </a:solidFill>
@@ -9672,10 +9945,10 @@
                 </a:tc>
                 <a:tc>
                   <a:txBody>
-                    <a:bodyPr anchor="t" rtlCol="false"/>
+                    <a:bodyPr/>
                     <a:lstStyle/>
                     <a:p>
-                      <a:pPr algn="ctr" marL="0" indent="0" lvl="0">
+                      <a:pPr marL="0" lvl="0" indent="0" algn="ctr">
                         <a:lnSpc>
                           <a:spcPts val="2380"/>
                         </a:lnSpc>
@@ -9685,7 +9958,7 @@
                         <a:defRPr/>
                       </a:pPr>
                       <a:r>
-                        <a:rPr lang="en-US" b="true" sz="1700">
+                        <a:rPr lang="en-US" sz="1700" b="1">
                           <a:solidFill>
                             <a:srgbClr val="FFFFFF"/>
                           </a:solidFill>
@@ -9700,7 +9973,7 @@
                     </a:p>
                   </a:txBody>
                   <a:tcPr marL="190500" marR="190500" marT="190500" marB="190500" anchor="ctr">
-                    <a:lnL cmpd="sng" algn="ctr" cap="flat" w="38100">
+                    <a:lnL w="38100" cap="flat" cmpd="sng" algn="ctr">
                       <a:solidFill>
                         <a:srgbClr val="FF9999"/>
                       </a:solidFill>
@@ -9709,7 +9982,7 @@
                       <a:headEnd type="none" w="med" len="med"/>
                       <a:tailEnd type="none" w="med" len="med"/>
                     </a:lnL>
-                    <a:lnR cmpd="sng" algn="ctr" cap="flat" w="38100">
+                    <a:lnR w="38100" cap="flat" cmpd="sng" algn="ctr">
                       <a:solidFill>
                         <a:srgbClr val="FF9999"/>
                       </a:solidFill>
@@ -9718,7 +9991,7 @@
                       <a:headEnd type="none" w="med" len="med"/>
                       <a:tailEnd type="none" w="med" len="med"/>
                     </a:lnR>
-                    <a:lnT cmpd="sng" algn="ctr" cap="flat" w="38100">
+                    <a:lnT w="38100" cap="flat" cmpd="sng" algn="ctr">
                       <a:solidFill>
                         <a:srgbClr val="FF9999"/>
                       </a:solidFill>
@@ -9727,7 +10000,7 @@
                       <a:headEnd type="none" w="med" len="med"/>
                       <a:tailEnd type="none" w="med" len="med"/>
                     </a:lnT>
-                    <a:lnB cmpd="sng" algn="ctr" cap="flat" w="38100">
+                    <a:lnB w="38100" cap="flat" cmpd="sng" algn="ctr">
                       <a:solidFill>
                         <a:srgbClr val="FF9999"/>
                       </a:solidFill>
@@ -9743,10 +10016,10 @@
                 </a:tc>
                 <a:tc>
                   <a:txBody>
-                    <a:bodyPr anchor="t" rtlCol="false"/>
+                    <a:bodyPr/>
                     <a:lstStyle/>
                     <a:p>
-                      <a:pPr algn="ctr" marL="0" indent="0" lvl="0">
+                      <a:pPr marL="0" lvl="0" indent="0" algn="ctr">
                         <a:lnSpc>
                           <a:spcPts val="2380"/>
                         </a:lnSpc>
@@ -9756,7 +10029,7 @@
                         <a:defRPr/>
                       </a:pPr>
                       <a:r>
-                        <a:rPr lang="en-US" b="true" sz="1700">
+                        <a:rPr lang="en-US" sz="1700" b="1">
                           <a:solidFill>
                             <a:srgbClr val="FEFEFE"/>
                           </a:solidFill>
@@ -9771,7 +10044,7 @@
                     </a:p>
                   </a:txBody>
                   <a:tcPr marL="190500" marR="190500" marT="190500" marB="190500" anchor="ctr">
-                    <a:lnL cmpd="sng" algn="ctr" cap="flat" w="38100">
+                    <a:lnL w="38100" cap="flat" cmpd="sng" algn="ctr">
                       <a:solidFill>
                         <a:srgbClr val="FF9999"/>
                       </a:solidFill>
@@ -9780,7 +10053,7 @@
                       <a:headEnd type="none" w="med" len="med"/>
                       <a:tailEnd type="none" w="med" len="med"/>
                     </a:lnL>
-                    <a:lnR cmpd="sng" algn="ctr" cap="flat" w="38100">
+                    <a:lnR w="38100" cap="flat" cmpd="sng" algn="ctr">
                       <a:solidFill>
                         <a:srgbClr val="FF9999"/>
                       </a:solidFill>
@@ -9789,7 +10062,7 @@
                       <a:headEnd type="none" w="med" len="med"/>
                       <a:tailEnd type="none" w="med" len="med"/>
                     </a:lnR>
-                    <a:lnT cmpd="sng" algn="ctr" cap="flat" w="38100">
+                    <a:lnT w="38100" cap="flat" cmpd="sng" algn="ctr">
                       <a:solidFill>
                         <a:srgbClr val="FF9999"/>
                       </a:solidFill>
@@ -9798,7 +10071,7 @@
                       <a:headEnd type="none" w="med" len="med"/>
                       <a:tailEnd type="none" w="med" len="med"/>
                     </a:lnT>
-                    <a:lnB cmpd="sng" algn="ctr" cap="flat" w="38100">
+                    <a:lnB w="38100" cap="flat" cmpd="sng" algn="ctr">
                       <a:solidFill>
                         <a:srgbClr val="FF9999"/>
                       </a:solidFill>
@@ -9814,10 +10087,10 @@
                 </a:tc>
                 <a:tc>
                   <a:txBody>
-                    <a:bodyPr anchor="t" rtlCol="false"/>
+                    <a:bodyPr/>
                     <a:lstStyle/>
                     <a:p>
-                      <a:pPr algn="ctr" marL="0" indent="0" lvl="0">
+                      <a:pPr marL="0" lvl="0" indent="0" algn="ctr">
                         <a:lnSpc>
                           <a:spcPts val="2380"/>
                         </a:lnSpc>
@@ -9827,7 +10100,7 @@
                         <a:defRPr/>
                       </a:pPr>
                       <a:r>
-                        <a:rPr lang="en-US" b="true" sz="1700">
+                        <a:rPr lang="en-US" sz="1700" b="1">
                           <a:solidFill>
                             <a:srgbClr val="FEFEFE"/>
                           </a:solidFill>
@@ -9842,7 +10115,7 @@
                     </a:p>
                   </a:txBody>
                   <a:tcPr marL="190500" marR="190500" marT="190500" marB="190500" anchor="ctr">
-                    <a:lnL cmpd="sng" algn="ctr" cap="flat" w="38100">
+                    <a:lnL w="38100" cap="flat" cmpd="sng" algn="ctr">
                       <a:solidFill>
                         <a:srgbClr val="FF9999"/>
                       </a:solidFill>
@@ -9851,7 +10124,7 @@
                       <a:headEnd type="none" w="med" len="med"/>
                       <a:tailEnd type="none" w="med" len="med"/>
                     </a:lnL>
-                    <a:lnR cmpd="sng" algn="ctr" cap="flat" w="38100">
+                    <a:lnR w="38100" cap="flat" cmpd="sng" algn="ctr">
                       <a:solidFill>
                         <a:srgbClr val="FF9999"/>
                       </a:solidFill>
@@ -9860,7 +10133,7 @@
                       <a:headEnd type="none" w="med" len="med"/>
                       <a:tailEnd type="none" w="med" len="med"/>
                     </a:lnR>
-                    <a:lnT cmpd="sng" algn="ctr" cap="flat" w="38100">
+                    <a:lnT w="38100" cap="flat" cmpd="sng" algn="ctr">
                       <a:solidFill>
                         <a:srgbClr val="FF9999"/>
                       </a:solidFill>
@@ -9869,7 +10142,7 @@
                       <a:headEnd type="none" w="med" len="med"/>
                       <a:tailEnd type="none" w="med" len="med"/>
                     </a:lnT>
-                    <a:lnB cmpd="sng" algn="ctr" cap="flat" w="38100">
+                    <a:lnB w="38100" cap="flat" cmpd="sng" algn="ctr">
                       <a:solidFill>
                         <a:srgbClr val="FF9999"/>
                       </a:solidFill>
@@ -9885,10 +10158,10 @@
                 </a:tc>
                 <a:tc>
                   <a:txBody>
-                    <a:bodyPr anchor="t" rtlCol="false"/>
+                    <a:bodyPr/>
                     <a:lstStyle/>
                     <a:p>
-                      <a:pPr algn="ctr" marL="0" indent="0" lvl="0">
+                      <a:pPr marL="0" lvl="0" indent="0" algn="ctr">
                         <a:lnSpc>
                           <a:spcPts val="2380"/>
                         </a:lnSpc>
@@ -9898,7 +10171,7 @@
                         <a:defRPr/>
                       </a:pPr>
                       <a:r>
-                        <a:rPr lang="en-US" b="true" sz="1700" strike="noStrike" u="none">
+                        <a:rPr lang="en-US" sz="1700" b="1" u="none" strike="noStrike">
                           <a:solidFill>
                             <a:srgbClr val="FEFEFE"/>
                           </a:solidFill>
@@ -9913,7 +10186,7 @@
                     </a:p>
                   </a:txBody>
                   <a:tcPr marL="190500" marR="190500" marT="190500" marB="190500" anchor="ctr">
-                    <a:lnL cmpd="sng" algn="ctr" cap="flat" w="38100">
+                    <a:lnL w="38100" cap="flat" cmpd="sng" algn="ctr">
                       <a:solidFill>
                         <a:srgbClr val="FF9999"/>
                       </a:solidFill>
@@ -9922,7 +10195,7 @@
                       <a:headEnd type="none" w="med" len="med"/>
                       <a:tailEnd type="none" w="med" len="med"/>
                     </a:lnL>
-                    <a:lnR cmpd="sng" algn="ctr" cap="flat" w="38100">
+                    <a:lnR w="38100" cap="flat" cmpd="sng" algn="ctr">
                       <a:solidFill>
                         <a:srgbClr val="FF9999"/>
                       </a:solidFill>
@@ -9931,7 +10204,7 @@
                       <a:headEnd type="none" w="med" len="med"/>
                       <a:tailEnd type="none" w="med" len="med"/>
                     </a:lnR>
-                    <a:lnT cmpd="sng" algn="ctr" cap="flat" w="38100">
+                    <a:lnT w="38100" cap="flat" cmpd="sng" algn="ctr">
                       <a:solidFill>
                         <a:srgbClr val="FF9999"/>
                       </a:solidFill>
@@ -9940,7 +10213,7 @@
                       <a:headEnd type="none" w="med" len="med"/>
                       <a:tailEnd type="none" w="med" len="med"/>
                     </a:lnT>
-                    <a:lnB cmpd="sng" algn="ctr" cap="flat" w="38100">
+                    <a:lnB w="38100" cap="flat" cmpd="sng" algn="ctr">
                       <a:solidFill>
                         <a:srgbClr val="FF9999"/>
                       </a:solidFill>
@@ -9954,14 +10227,19 @@
                     </a:solidFill>
                   </a:tcPr>
                 </a:tc>
+                <a:extLst>
+                  <a:ext uri="{0D108BD9-81ED-4DB2-BD59-A6C34878D82A}">
+                    <a16:rowId xmlns:a16="http://schemas.microsoft.com/office/drawing/2014/main" val="10000"/>
+                  </a:ext>
+                </a:extLst>
               </a:tr>
               <a:tr h="1032948">
                 <a:tc>
                   <a:txBody>
-                    <a:bodyPr anchor="t" rtlCol="false"/>
+                    <a:bodyPr/>
                     <a:lstStyle/>
                     <a:p>
-                      <a:pPr algn="ctr" marL="0" indent="0" lvl="0">
+                      <a:pPr marL="0" lvl="0" indent="0" algn="ctr">
                         <a:lnSpc>
                           <a:spcPts val="2380"/>
                         </a:lnSpc>
@@ -9971,7 +10249,7 @@
                         <a:defRPr/>
                       </a:pPr>
                       <a:r>
-                        <a:rPr lang="en-US" b="true" sz="1700">
+                        <a:rPr lang="en-US" sz="1700" b="1">
                           <a:solidFill>
                             <a:srgbClr val="000000"/>
                           </a:solidFill>
@@ -9986,7 +10264,7 @@
                     </a:p>
                   </a:txBody>
                   <a:tcPr marL="190500" marR="190500" marT="190500" marB="190500" anchor="ctr">
-                    <a:lnL cmpd="sng" algn="ctr" cap="flat" w="38100">
+                    <a:lnL w="38100" cap="flat" cmpd="sng" algn="ctr">
                       <a:solidFill>
                         <a:srgbClr val="FF9999"/>
                       </a:solidFill>
@@ -9995,7 +10273,7 @@
                       <a:headEnd type="none" w="med" len="med"/>
                       <a:tailEnd type="none" w="med" len="med"/>
                     </a:lnL>
-                    <a:lnR cmpd="sng" algn="ctr" cap="flat" w="38100">
+                    <a:lnR w="38100" cap="flat" cmpd="sng" algn="ctr">
                       <a:solidFill>
                         <a:srgbClr val="FF9999"/>
                       </a:solidFill>
@@ -10004,7 +10282,7 @@
                       <a:headEnd type="none" w="med" len="med"/>
                       <a:tailEnd type="none" w="med" len="med"/>
                     </a:lnR>
-                    <a:lnT cmpd="sng" algn="ctr" cap="flat" w="38100">
+                    <a:lnT w="38100" cap="flat" cmpd="sng" algn="ctr">
                       <a:solidFill>
                         <a:srgbClr val="FF9999"/>
                       </a:solidFill>
@@ -10013,7 +10291,7 @@
                       <a:headEnd type="none" w="med" len="med"/>
                       <a:tailEnd type="none" w="med" len="med"/>
                     </a:lnT>
-                    <a:lnB cmpd="sng" algn="ctr" cap="flat" w="38100">
+                    <a:lnB w="38100" cap="flat" cmpd="sng" algn="ctr">
                       <a:solidFill>
                         <a:srgbClr val="FF9999"/>
                       </a:solidFill>
@@ -10029,10 +10307,10 @@
                 </a:tc>
                 <a:tc>
                   <a:txBody>
-                    <a:bodyPr anchor="t" rtlCol="false"/>
+                    <a:bodyPr/>
                     <a:lstStyle/>
                     <a:p>
-                      <a:pPr algn="ctr" marL="0" indent="0" lvl="0">
+                      <a:pPr marL="0" lvl="0" indent="0" algn="ctr">
                         <a:lnSpc>
                           <a:spcPts val="2380"/>
                         </a:lnSpc>
@@ -10042,7 +10320,7 @@
                         <a:defRPr/>
                       </a:pPr>
                       <a:r>
-                        <a:rPr lang="en-US" b="true" sz="1700">
+                        <a:rPr lang="en-US" sz="1700" b="1">
                           <a:solidFill>
                             <a:srgbClr val="000000"/>
                           </a:solidFill>
@@ -10057,7 +10335,7 @@
                     </a:p>
                   </a:txBody>
                   <a:tcPr marL="190500" marR="190500" marT="190500" marB="190500" anchor="ctr">
-                    <a:lnL cmpd="sng" algn="ctr" cap="flat" w="38100">
+                    <a:lnL w="38100" cap="flat" cmpd="sng" algn="ctr">
                       <a:solidFill>
                         <a:srgbClr val="FF9999"/>
                       </a:solidFill>
@@ -10066,7 +10344,7 @@
                       <a:headEnd type="none" w="med" len="med"/>
                       <a:tailEnd type="none" w="med" len="med"/>
                     </a:lnL>
-                    <a:lnR cmpd="sng" algn="ctr" cap="flat" w="38100">
+                    <a:lnR w="38100" cap="flat" cmpd="sng" algn="ctr">
                       <a:solidFill>
                         <a:srgbClr val="FF9999"/>
                       </a:solidFill>
@@ -10075,7 +10353,7 @@
                       <a:headEnd type="none" w="med" len="med"/>
                       <a:tailEnd type="none" w="med" len="med"/>
                     </a:lnR>
-                    <a:lnT cmpd="sng" algn="ctr" cap="flat" w="38100">
+                    <a:lnT w="38100" cap="flat" cmpd="sng" algn="ctr">
                       <a:solidFill>
                         <a:srgbClr val="FF9999"/>
                       </a:solidFill>
@@ -10084,7 +10362,7 @@
                       <a:headEnd type="none" w="med" len="med"/>
                       <a:tailEnd type="none" w="med" len="med"/>
                     </a:lnT>
-                    <a:lnB cmpd="sng" algn="ctr" cap="flat" w="38100">
+                    <a:lnB w="38100" cap="flat" cmpd="sng" algn="ctr">
                       <a:solidFill>
                         <a:srgbClr val="FF9999"/>
                       </a:solidFill>
@@ -10100,10 +10378,10 @@
                 </a:tc>
                 <a:tc>
                   <a:txBody>
-                    <a:bodyPr anchor="t" rtlCol="false"/>
+                    <a:bodyPr/>
                     <a:lstStyle/>
                     <a:p>
-                      <a:pPr algn="ctr" marL="0" indent="0" lvl="0">
+                      <a:pPr marL="0" lvl="0" indent="0" algn="ctr">
                         <a:lnSpc>
                           <a:spcPts val="2380"/>
                         </a:lnSpc>
@@ -10113,7 +10391,7 @@
                         <a:defRPr/>
                       </a:pPr>
                       <a:r>
-                        <a:rPr lang="en-US" b="true" sz="1700">
+                        <a:rPr lang="en-US" sz="1700" b="1">
                           <a:solidFill>
                             <a:srgbClr val="000000"/>
                           </a:solidFill>
@@ -10128,7 +10406,7 @@
                     </a:p>
                   </a:txBody>
                   <a:tcPr marL="190500" marR="190500" marT="190500" marB="190500" anchor="ctr">
-                    <a:lnL cmpd="sng" algn="ctr" cap="flat" w="38100">
+                    <a:lnL w="38100" cap="flat" cmpd="sng" algn="ctr">
                       <a:solidFill>
                         <a:srgbClr val="FF9999"/>
                       </a:solidFill>
@@ -10137,7 +10415,7 @@
                       <a:headEnd type="none" w="med" len="med"/>
                       <a:tailEnd type="none" w="med" len="med"/>
                     </a:lnL>
-                    <a:lnR cmpd="sng" algn="ctr" cap="flat" w="38100">
+                    <a:lnR w="38100" cap="flat" cmpd="sng" algn="ctr">
                       <a:solidFill>
                         <a:srgbClr val="FF9999"/>
                       </a:solidFill>
@@ -10146,7 +10424,7 @@
                       <a:headEnd type="none" w="med" len="med"/>
                       <a:tailEnd type="none" w="med" len="med"/>
                     </a:lnR>
-                    <a:lnT cmpd="sng" algn="ctr" cap="flat" w="38100">
+                    <a:lnT w="38100" cap="flat" cmpd="sng" algn="ctr">
                       <a:solidFill>
                         <a:srgbClr val="FF9999"/>
                       </a:solidFill>
@@ -10155,7 +10433,7 @@
                       <a:headEnd type="none" w="med" len="med"/>
                       <a:tailEnd type="none" w="med" len="med"/>
                     </a:lnT>
-                    <a:lnB cmpd="sng" algn="ctr" cap="flat" w="38100">
+                    <a:lnB w="38100" cap="flat" cmpd="sng" algn="ctr">
                       <a:solidFill>
                         <a:srgbClr val="FF9999"/>
                       </a:solidFill>
@@ -10171,10 +10449,10 @@
                 </a:tc>
                 <a:tc>
                   <a:txBody>
-                    <a:bodyPr anchor="t" rtlCol="false"/>
+                    <a:bodyPr/>
                     <a:lstStyle/>
                     <a:p>
-                      <a:pPr algn="ctr" marL="0" indent="0" lvl="0">
+                      <a:pPr marL="0" lvl="0" indent="0" algn="ctr">
                         <a:lnSpc>
                           <a:spcPts val="2380"/>
                         </a:lnSpc>
@@ -10184,7 +10462,7 @@
                         <a:defRPr/>
                       </a:pPr>
                       <a:r>
-                        <a:rPr lang="en-US" b="true" sz="1700">
+                        <a:rPr lang="en-US" sz="1700" b="1">
                           <a:solidFill>
                             <a:srgbClr val="000000"/>
                           </a:solidFill>
@@ -10199,7 +10477,7 @@
                     </a:p>
                   </a:txBody>
                   <a:tcPr marL="190500" marR="190500" marT="190500" marB="190500" anchor="ctr">
-                    <a:lnL cmpd="sng" algn="ctr" cap="flat" w="38100">
+                    <a:lnL w="38100" cap="flat" cmpd="sng" algn="ctr">
                       <a:solidFill>
                         <a:srgbClr val="FF9999"/>
                       </a:solidFill>
@@ -10208,7 +10486,7 @@
                       <a:headEnd type="none" w="med" len="med"/>
                       <a:tailEnd type="none" w="med" len="med"/>
                     </a:lnL>
-                    <a:lnR cmpd="sng" algn="ctr" cap="flat" w="38100">
+                    <a:lnR w="38100" cap="flat" cmpd="sng" algn="ctr">
                       <a:solidFill>
                         <a:srgbClr val="FF9999"/>
                       </a:solidFill>
@@ -10217,7 +10495,7 @@
                       <a:headEnd type="none" w="med" len="med"/>
                       <a:tailEnd type="none" w="med" len="med"/>
                     </a:lnR>
-                    <a:lnT cmpd="sng" algn="ctr" cap="flat" w="38100">
+                    <a:lnT w="38100" cap="flat" cmpd="sng" algn="ctr">
                       <a:solidFill>
                         <a:srgbClr val="FF9999"/>
                       </a:solidFill>
@@ -10226,7 +10504,7 @@
                       <a:headEnd type="none" w="med" len="med"/>
                       <a:tailEnd type="none" w="med" len="med"/>
                     </a:lnT>
-                    <a:lnB cmpd="sng" algn="ctr" cap="flat" w="38100">
+                    <a:lnB w="38100" cap="flat" cmpd="sng" algn="ctr">
                       <a:solidFill>
                         <a:srgbClr val="FF9999"/>
                       </a:solidFill>
@@ -10242,10 +10520,10 @@
                 </a:tc>
                 <a:tc>
                   <a:txBody>
-                    <a:bodyPr anchor="t" rtlCol="false"/>
+                    <a:bodyPr/>
                     <a:lstStyle/>
                     <a:p>
-                      <a:pPr algn="ctr" marL="0" indent="0" lvl="0">
+                      <a:pPr marL="0" lvl="0" indent="0" algn="ctr">
                         <a:lnSpc>
                           <a:spcPts val="2380"/>
                         </a:lnSpc>
@@ -10255,7 +10533,7 @@
                         <a:defRPr/>
                       </a:pPr>
                       <a:r>
-                        <a:rPr lang="en-US" b="true" sz="1700">
+                        <a:rPr lang="en-US" sz="1700" b="1">
                           <a:solidFill>
                             <a:srgbClr val="000000"/>
                           </a:solidFill>
@@ -10270,7 +10548,7 @@
                     </a:p>
                   </a:txBody>
                   <a:tcPr marL="190500" marR="190500" marT="190500" marB="190500" anchor="ctr">
-                    <a:lnL cmpd="sng" algn="ctr" cap="flat" w="38100">
+                    <a:lnL w="38100" cap="flat" cmpd="sng" algn="ctr">
                       <a:solidFill>
                         <a:srgbClr val="FF9999"/>
                       </a:solidFill>
@@ -10279,7 +10557,7 @@
                       <a:headEnd type="none" w="med" len="med"/>
                       <a:tailEnd type="none" w="med" len="med"/>
                     </a:lnL>
-                    <a:lnR cmpd="sng" algn="ctr" cap="flat" w="38100">
+                    <a:lnR w="38100" cap="flat" cmpd="sng" algn="ctr">
                       <a:solidFill>
                         <a:srgbClr val="FF9999"/>
                       </a:solidFill>
@@ -10288,7 +10566,7 @@
                       <a:headEnd type="none" w="med" len="med"/>
                       <a:tailEnd type="none" w="med" len="med"/>
                     </a:lnR>
-                    <a:lnT cmpd="sng" algn="ctr" cap="flat" w="38100">
+                    <a:lnT w="38100" cap="flat" cmpd="sng" algn="ctr">
                       <a:solidFill>
                         <a:srgbClr val="FF9999"/>
                       </a:solidFill>
@@ -10297,7 +10575,7 @@
                       <a:headEnd type="none" w="med" len="med"/>
                       <a:tailEnd type="none" w="med" len="med"/>
                     </a:lnT>
-                    <a:lnB cmpd="sng" algn="ctr" cap="flat" w="38100">
+                    <a:lnB w="38100" cap="flat" cmpd="sng" algn="ctr">
                       <a:solidFill>
                         <a:srgbClr val="FF9999"/>
                       </a:solidFill>
@@ -10313,10 +10591,10 @@
                 </a:tc>
                 <a:tc>
                   <a:txBody>
-                    <a:bodyPr anchor="t" rtlCol="false"/>
+                    <a:bodyPr/>
                     <a:lstStyle/>
                     <a:p>
-                      <a:pPr algn="ctr" marL="0" indent="0" lvl="0">
+                      <a:pPr marL="0" lvl="0" indent="0" algn="ctr">
                         <a:lnSpc>
                           <a:spcPts val="2380"/>
                         </a:lnSpc>
@@ -10326,7 +10604,7 @@
                         <a:defRPr/>
                       </a:pPr>
                       <a:r>
-                        <a:rPr lang="en-US" b="true" sz="1700">
+                        <a:rPr lang="en-US" sz="1700" b="1">
                           <a:solidFill>
                             <a:srgbClr val="000000"/>
                           </a:solidFill>
@@ -10341,7 +10619,7 @@
                     </a:p>
                   </a:txBody>
                   <a:tcPr marL="190500" marR="190500" marT="190500" marB="190500" anchor="ctr">
-                    <a:lnL cmpd="sng" algn="ctr" cap="flat" w="38100">
+                    <a:lnL w="38100" cap="flat" cmpd="sng" algn="ctr">
                       <a:solidFill>
                         <a:srgbClr val="FF9999"/>
                       </a:solidFill>
@@ -10350,7 +10628,7 @@
                       <a:headEnd type="none" w="med" len="med"/>
                       <a:tailEnd type="none" w="med" len="med"/>
                     </a:lnL>
-                    <a:lnR cmpd="sng" algn="ctr" cap="flat" w="38100">
+                    <a:lnR w="38100" cap="flat" cmpd="sng" algn="ctr">
                       <a:solidFill>
                         <a:srgbClr val="FF9999"/>
                       </a:solidFill>
@@ -10359,7 +10637,7 @@
                       <a:headEnd type="none" w="med" len="med"/>
                       <a:tailEnd type="none" w="med" len="med"/>
                     </a:lnR>
-                    <a:lnT cmpd="sng" algn="ctr" cap="flat" w="38100">
+                    <a:lnT w="38100" cap="flat" cmpd="sng" algn="ctr">
                       <a:solidFill>
                         <a:srgbClr val="FF9999"/>
                       </a:solidFill>
@@ -10368,7 +10646,7 @@
                       <a:headEnd type="none" w="med" len="med"/>
                       <a:tailEnd type="none" w="med" len="med"/>
                     </a:lnT>
-                    <a:lnB cmpd="sng" algn="ctr" cap="flat" w="38100">
+                    <a:lnB w="38100" cap="flat" cmpd="sng" algn="ctr">
                       <a:solidFill>
                         <a:srgbClr val="FF9999"/>
                       </a:solidFill>
@@ -10384,10 +10662,10 @@
                 </a:tc>
                 <a:tc>
                   <a:txBody>
-                    <a:bodyPr anchor="t" rtlCol="false"/>
+                    <a:bodyPr/>
                     <a:lstStyle/>
                     <a:p>
-                      <a:pPr algn="ctr" marL="0" indent="0" lvl="0">
+                      <a:pPr marL="0" lvl="0" indent="0" algn="ctr">
                         <a:lnSpc>
                           <a:spcPts val="2380"/>
                         </a:lnSpc>
@@ -10397,7 +10675,7 @@
                         <a:defRPr/>
                       </a:pPr>
                       <a:r>
-                        <a:rPr lang="en-US" b="true" sz="1700">
+                        <a:rPr lang="en-US" sz="1700" b="1">
                           <a:solidFill>
                             <a:srgbClr val="000000"/>
                           </a:solidFill>
@@ -10412,7 +10690,7 @@
                     </a:p>
                   </a:txBody>
                   <a:tcPr marL="190500" marR="190500" marT="190500" marB="190500" anchor="ctr">
-                    <a:lnL cmpd="sng" algn="ctr" cap="flat" w="38100">
+                    <a:lnL w="38100" cap="flat" cmpd="sng" algn="ctr">
                       <a:solidFill>
                         <a:srgbClr val="FF9999"/>
                       </a:solidFill>
@@ -10421,7 +10699,7 @@
                       <a:headEnd type="none" w="med" len="med"/>
                       <a:tailEnd type="none" w="med" len="med"/>
                     </a:lnL>
-                    <a:lnR cmpd="sng" algn="ctr" cap="flat" w="38100">
+                    <a:lnR w="38100" cap="flat" cmpd="sng" algn="ctr">
                       <a:solidFill>
                         <a:srgbClr val="FF9999"/>
                       </a:solidFill>
@@ -10430,7 +10708,7 @@
                       <a:headEnd type="none" w="med" len="med"/>
                       <a:tailEnd type="none" w="med" len="med"/>
                     </a:lnR>
-                    <a:lnT cmpd="sng" algn="ctr" cap="flat" w="38100">
+                    <a:lnT w="38100" cap="flat" cmpd="sng" algn="ctr">
                       <a:solidFill>
                         <a:srgbClr val="FF9999"/>
                       </a:solidFill>
@@ -10439,7 +10717,7 @@
                       <a:headEnd type="none" w="med" len="med"/>
                       <a:tailEnd type="none" w="med" len="med"/>
                     </a:lnT>
-                    <a:lnB cmpd="sng" algn="ctr" cap="flat" w="38100">
+                    <a:lnB w="38100" cap="flat" cmpd="sng" algn="ctr">
                       <a:solidFill>
                         <a:srgbClr val="FF9999"/>
                       </a:solidFill>
@@ -10453,14 +10731,19 @@
                     </a:solidFill>
                   </a:tcPr>
                 </a:tc>
+                <a:extLst>
+                  <a:ext uri="{0D108BD9-81ED-4DB2-BD59-A6C34878D82A}">
+                    <a16:rowId xmlns:a16="http://schemas.microsoft.com/office/drawing/2014/main" val="10001"/>
+                  </a:ext>
+                </a:extLst>
               </a:tr>
               <a:tr h="1061909">
                 <a:tc>
                   <a:txBody>
-                    <a:bodyPr anchor="t" rtlCol="false"/>
+                    <a:bodyPr/>
                     <a:lstStyle/>
                     <a:p>
-                      <a:pPr algn="ctr" marL="0" indent="0" lvl="0">
+                      <a:pPr marL="0" lvl="0" indent="0" algn="ctr">
                         <a:lnSpc>
                           <a:spcPts val="2380"/>
                         </a:lnSpc>
@@ -10485,7 +10768,7 @@
                     </a:p>
                   </a:txBody>
                   <a:tcPr marL="190500" marR="190500" marT="190500" marB="190500" anchor="ctr">
-                    <a:lnL cmpd="sng" algn="ctr" cap="flat" w="38100">
+                    <a:lnL w="38100" cap="flat" cmpd="sng" algn="ctr">
                       <a:solidFill>
                         <a:srgbClr val="FF9999"/>
                       </a:solidFill>
@@ -10494,7 +10777,7 @@
                       <a:headEnd type="none" w="med" len="med"/>
                       <a:tailEnd type="none" w="med" len="med"/>
                     </a:lnL>
-                    <a:lnR cmpd="sng" algn="ctr" cap="flat" w="38100">
+                    <a:lnR w="38100" cap="flat" cmpd="sng" algn="ctr">
                       <a:solidFill>
                         <a:srgbClr val="FF9999"/>
                       </a:solidFill>
@@ -10503,7 +10786,7 @@
                       <a:headEnd type="none" w="med" len="med"/>
                       <a:tailEnd type="none" w="med" len="med"/>
                     </a:lnR>
-                    <a:lnT cmpd="sng" algn="ctr" cap="flat" w="38100">
+                    <a:lnT w="38100" cap="flat" cmpd="sng" algn="ctr">
                       <a:solidFill>
                         <a:srgbClr val="FF9999"/>
                       </a:solidFill>
@@ -10512,7 +10795,7 @@
                       <a:headEnd type="none" w="med" len="med"/>
                       <a:tailEnd type="none" w="med" len="med"/>
                     </a:lnT>
-                    <a:lnB cmpd="sng" algn="ctr" cap="flat" w="38100">
+                    <a:lnB w="38100" cap="flat" cmpd="sng" algn="ctr">
                       <a:solidFill>
                         <a:srgbClr val="FF9999"/>
                       </a:solidFill>
@@ -10528,10 +10811,10 @@
                 </a:tc>
                 <a:tc>
                   <a:txBody>
-                    <a:bodyPr anchor="t" rtlCol="false"/>
+                    <a:bodyPr/>
                     <a:lstStyle/>
                     <a:p>
-                      <a:pPr algn="ctr" marL="0" indent="0" lvl="0">
+                      <a:pPr marL="0" lvl="0" indent="0" algn="ctr">
                         <a:lnSpc>
                           <a:spcPts val="2380"/>
                         </a:lnSpc>
@@ -10556,7 +10839,7 @@
                     </a:p>
                   </a:txBody>
                   <a:tcPr marL="190500" marR="190500" marT="190500" marB="190500" anchor="ctr">
-                    <a:lnL cmpd="sng" algn="ctr" cap="flat" w="38100">
+                    <a:lnL w="38100" cap="flat" cmpd="sng" algn="ctr">
                       <a:solidFill>
                         <a:srgbClr val="FF9999"/>
                       </a:solidFill>
@@ -10565,7 +10848,7 @@
                       <a:headEnd type="none" w="med" len="med"/>
                       <a:tailEnd type="none" w="med" len="med"/>
                     </a:lnL>
-                    <a:lnR cmpd="sng" algn="ctr" cap="flat" w="38100">
+                    <a:lnR w="38100" cap="flat" cmpd="sng" algn="ctr">
                       <a:solidFill>
                         <a:srgbClr val="FF9999"/>
                       </a:solidFill>
@@ -10574,7 +10857,7 @@
                       <a:headEnd type="none" w="med" len="med"/>
                       <a:tailEnd type="none" w="med" len="med"/>
                     </a:lnR>
-                    <a:lnT cmpd="sng" algn="ctr" cap="flat" w="38100">
+                    <a:lnT w="38100" cap="flat" cmpd="sng" algn="ctr">
                       <a:solidFill>
                         <a:srgbClr val="FF9999"/>
                       </a:solidFill>
@@ -10583,7 +10866,7 @@
                       <a:headEnd type="none" w="med" len="med"/>
                       <a:tailEnd type="none" w="med" len="med"/>
                     </a:lnT>
-                    <a:lnB cmpd="sng" algn="ctr" cap="flat" w="38100">
+                    <a:lnB w="38100" cap="flat" cmpd="sng" algn="ctr">
                       <a:solidFill>
                         <a:srgbClr val="FF9999"/>
                       </a:solidFill>
@@ -10599,10 +10882,10 @@
                 </a:tc>
                 <a:tc>
                   <a:txBody>
-                    <a:bodyPr anchor="t" rtlCol="false"/>
+                    <a:bodyPr/>
                     <a:lstStyle/>
                     <a:p>
-                      <a:pPr algn="ctr" marL="0" indent="0" lvl="0">
+                      <a:pPr marL="0" lvl="0" indent="0" algn="ctr">
                         <a:lnSpc>
                           <a:spcPts val="2380"/>
                         </a:lnSpc>
@@ -10612,7 +10895,7 @@
                         <a:defRPr/>
                       </a:pPr>
                       <a:r>
-                        <a:rPr lang="en-US" b="true" sz="1700">
+                        <a:rPr lang="en-US" sz="1700" b="1">
                           <a:solidFill>
                             <a:srgbClr val="000000"/>
                           </a:solidFill>
@@ -10627,7 +10910,7 @@
                     </a:p>
                   </a:txBody>
                   <a:tcPr marL="190500" marR="190500" marT="190500" marB="190500" anchor="ctr">
-                    <a:lnL cmpd="sng" algn="ctr" cap="flat" w="38100">
+                    <a:lnL w="38100" cap="flat" cmpd="sng" algn="ctr">
                       <a:solidFill>
                         <a:srgbClr val="FF9999"/>
                       </a:solidFill>
@@ -10636,7 +10919,7 @@
                       <a:headEnd type="none" w="med" len="med"/>
                       <a:tailEnd type="none" w="med" len="med"/>
                     </a:lnL>
-                    <a:lnR cmpd="sng" algn="ctr" cap="flat" w="38100">
+                    <a:lnR w="38100" cap="flat" cmpd="sng" algn="ctr">
                       <a:solidFill>
                         <a:srgbClr val="FF9999"/>
                       </a:solidFill>
@@ -10645,7 +10928,7 @@
                       <a:headEnd type="none" w="med" len="med"/>
                       <a:tailEnd type="none" w="med" len="med"/>
                     </a:lnR>
-                    <a:lnT cmpd="sng" algn="ctr" cap="flat" w="38100">
+                    <a:lnT w="38100" cap="flat" cmpd="sng" algn="ctr">
                       <a:solidFill>
                         <a:srgbClr val="FF9999"/>
                       </a:solidFill>
@@ -10654,7 +10937,7 @@
                       <a:headEnd type="none" w="med" len="med"/>
                       <a:tailEnd type="none" w="med" len="med"/>
                     </a:lnT>
-                    <a:lnB cmpd="sng" algn="ctr" cap="flat" w="38100">
+                    <a:lnB w="38100" cap="flat" cmpd="sng" algn="ctr">
                       <a:solidFill>
                         <a:srgbClr val="FF9999"/>
                       </a:solidFill>
@@ -10670,10 +10953,10 @@
                 </a:tc>
                 <a:tc>
                   <a:txBody>
-                    <a:bodyPr anchor="t" rtlCol="false"/>
+                    <a:bodyPr/>
                     <a:lstStyle/>
                     <a:p>
-                      <a:pPr algn="ctr" marL="0" indent="0" lvl="0">
+                      <a:pPr marL="0" lvl="0" indent="0" algn="ctr">
                         <a:lnSpc>
                           <a:spcPts val="2380"/>
                         </a:lnSpc>
@@ -10683,7 +10966,7 @@
                         <a:defRPr/>
                       </a:pPr>
                       <a:r>
-                        <a:rPr lang="en-US" b="true" sz="1700">
+                        <a:rPr lang="en-US" sz="1700" b="1">
                           <a:solidFill>
                             <a:srgbClr val="000000"/>
                           </a:solidFill>
@@ -10698,7 +10981,7 @@
                     </a:p>
                   </a:txBody>
                   <a:tcPr marL="190500" marR="190500" marT="190500" marB="190500" anchor="ctr">
-                    <a:lnL cmpd="sng" algn="ctr" cap="flat" w="38100">
+                    <a:lnL w="38100" cap="flat" cmpd="sng" algn="ctr">
                       <a:solidFill>
                         <a:srgbClr val="FF9999"/>
                       </a:solidFill>
@@ -10707,7 +10990,7 @@
                       <a:headEnd type="none" w="med" len="med"/>
                       <a:tailEnd type="none" w="med" len="med"/>
                     </a:lnL>
-                    <a:lnR cmpd="sng" algn="ctr" cap="flat" w="38100">
+                    <a:lnR w="38100" cap="flat" cmpd="sng" algn="ctr">
                       <a:solidFill>
                         <a:srgbClr val="FF9999"/>
                       </a:solidFill>
@@ -10716,7 +10999,7 @@
                       <a:headEnd type="none" w="med" len="med"/>
                       <a:tailEnd type="none" w="med" len="med"/>
                     </a:lnR>
-                    <a:lnT cmpd="sng" algn="ctr" cap="flat" w="38100">
+                    <a:lnT w="38100" cap="flat" cmpd="sng" algn="ctr">
                       <a:solidFill>
                         <a:srgbClr val="FF9999"/>
                       </a:solidFill>
@@ -10725,7 +11008,7 @@
                       <a:headEnd type="none" w="med" len="med"/>
                       <a:tailEnd type="none" w="med" len="med"/>
                     </a:lnT>
-                    <a:lnB cmpd="sng" algn="ctr" cap="flat" w="38100">
+                    <a:lnB w="38100" cap="flat" cmpd="sng" algn="ctr">
                       <a:solidFill>
                         <a:srgbClr val="FF9999"/>
                       </a:solidFill>
@@ -10741,10 +11024,10 @@
                 </a:tc>
                 <a:tc>
                   <a:txBody>
-                    <a:bodyPr anchor="t" rtlCol="false"/>
+                    <a:bodyPr/>
                     <a:lstStyle/>
                     <a:p>
-                      <a:pPr algn="ctr" marL="0" indent="0" lvl="0">
+                      <a:pPr marL="0" lvl="0" indent="0" algn="ctr">
                         <a:lnSpc>
                           <a:spcPts val="2380"/>
                         </a:lnSpc>
@@ -10769,7 +11052,7 @@
                     </a:p>
                   </a:txBody>
                   <a:tcPr marL="190500" marR="190500" marT="190500" marB="190500" anchor="ctr">
-                    <a:lnL cmpd="sng" algn="ctr" cap="flat" w="38100">
+                    <a:lnL w="38100" cap="flat" cmpd="sng" algn="ctr">
                       <a:solidFill>
                         <a:srgbClr val="FF9999"/>
                       </a:solidFill>
@@ -10778,7 +11061,7 @@
                       <a:headEnd type="none" w="med" len="med"/>
                       <a:tailEnd type="none" w="med" len="med"/>
                     </a:lnL>
-                    <a:lnR cmpd="sng" algn="ctr" cap="flat" w="38100">
+                    <a:lnR w="38100" cap="flat" cmpd="sng" algn="ctr">
                       <a:solidFill>
                         <a:srgbClr val="FF9999"/>
                       </a:solidFill>
@@ -10787,7 +11070,7 @@
                       <a:headEnd type="none" w="med" len="med"/>
                       <a:tailEnd type="none" w="med" len="med"/>
                     </a:lnR>
-                    <a:lnT cmpd="sng" algn="ctr" cap="flat" w="38100">
+                    <a:lnT w="38100" cap="flat" cmpd="sng" algn="ctr">
                       <a:solidFill>
                         <a:srgbClr val="FF9999"/>
                       </a:solidFill>
@@ -10796,7 +11079,7 @@
                       <a:headEnd type="none" w="med" len="med"/>
                       <a:tailEnd type="none" w="med" len="med"/>
                     </a:lnT>
-                    <a:lnB cmpd="sng" algn="ctr" cap="flat" w="38100">
+                    <a:lnB w="38100" cap="flat" cmpd="sng" algn="ctr">
                       <a:solidFill>
                         <a:srgbClr val="FF9999"/>
                       </a:solidFill>
@@ -10812,10 +11095,10 @@
                 </a:tc>
                 <a:tc>
                   <a:txBody>
-                    <a:bodyPr anchor="t" rtlCol="false"/>
+                    <a:bodyPr/>
                     <a:lstStyle/>
                     <a:p>
-                      <a:pPr algn="ctr" marL="0" indent="0" lvl="0">
+                      <a:pPr marL="0" lvl="0" indent="0" algn="ctr">
                         <a:lnSpc>
                           <a:spcPts val="2380"/>
                         </a:lnSpc>
@@ -10825,7 +11108,7 @@
                         <a:defRPr/>
                       </a:pPr>
                       <a:r>
-                        <a:rPr lang="en-US" b="true" sz="1700">
+                        <a:rPr lang="en-US" sz="1700" b="1">
                           <a:solidFill>
                             <a:srgbClr val="000000"/>
                           </a:solidFill>
@@ -10840,7 +11123,7 @@
                     </a:p>
                   </a:txBody>
                   <a:tcPr marL="190500" marR="190500" marT="190500" marB="190500" anchor="ctr">
-                    <a:lnL cmpd="sng" algn="ctr" cap="flat" w="38100">
+                    <a:lnL w="38100" cap="flat" cmpd="sng" algn="ctr">
                       <a:solidFill>
                         <a:srgbClr val="FF9999"/>
                       </a:solidFill>
@@ -10849,7 +11132,7 @@
                       <a:headEnd type="none" w="med" len="med"/>
                       <a:tailEnd type="none" w="med" len="med"/>
                     </a:lnL>
-                    <a:lnR cmpd="sng" algn="ctr" cap="flat" w="38100">
+                    <a:lnR w="38100" cap="flat" cmpd="sng" algn="ctr">
                       <a:solidFill>
                         <a:srgbClr val="FF9999"/>
                       </a:solidFill>
@@ -10858,7 +11141,7 @@
                       <a:headEnd type="none" w="med" len="med"/>
                       <a:tailEnd type="none" w="med" len="med"/>
                     </a:lnR>
-                    <a:lnT cmpd="sng" algn="ctr" cap="flat" w="38100">
+                    <a:lnT w="38100" cap="flat" cmpd="sng" algn="ctr">
                       <a:solidFill>
                         <a:srgbClr val="FF9999"/>
                       </a:solidFill>
@@ -10867,7 +11150,7 @@
                       <a:headEnd type="none" w="med" len="med"/>
                       <a:tailEnd type="none" w="med" len="med"/>
                     </a:lnT>
-                    <a:lnB cmpd="sng" algn="ctr" cap="flat" w="38100">
+                    <a:lnB w="38100" cap="flat" cmpd="sng" algn="ctr">
                       <a:solidFill>
                         <a:srgbClr val="FF9999"/>
                       </a:solidFill>
@@ -10883,10 +11166,10 @@
                 </a:tc>
                 <a:tc>
                   <a:txBody>
-                    <a:bodyPr anchor="t" rtlCol="false"/>
+                    <a:bodyPr/>
                     <a:lstStyle/>
                     <a:p>
-                      <a:pPr algn="ctr" marL="0" indent="0" lvl="0">
+                      <a:pPr marL="0" lvl="0" indent="0" algn="ctr">
                         <a:lnSpc>
                           <a:spcPts val="2380"/>
                         </a:lnSpc>
@@ -10911,7 +11194,7 @@
                     </a:p>
                   </a:txBody>
                   <a:tcPr marL="190500" marR="190500" marT="190500" marB="190500" anchor="ctr">
-                    <a:lnL cmpd="sng" algn="ctr" cap="flat" w="38100">
+                    <a:lnL w="38100" cap="flat" cmpd="sng" algn="ctr">
                       <a:solidFill>
                         <a:srgbClr val="FF9999"/>
                       </a:solidFill>
@@ -10920,7 +11203,7 @@
                       <a:headEnd type="none" w="med" len="med"/>
                       <a:tailEnd type="none" w="med" len="med"/>
                     </a:lnL>
-                    <a:lnR cmpd="sng" algn="ctr" cap="flat" w="38100">
+                    <a:lnR w="38100" cap="flat" cmpd="sng" algn="ctr">
                       <a:solidFill>
                         <a:srgbClr val="FF9999"/>
                       </a:solidFill>
@@ -10929,7 +11212,7 @@
                       <a:headEnd type="none" w="med" len="med"/>
                       <a:tailEnd type="none" w="med" len="med"/>
                     </a:lnR>
-                    <a:lnT cmpd="sng" algn="ctr" cap="flat" w="38100">
+                    <a:lnT w="38100" cap="flat" cmpd="sng" algn="ctr">
                       <a:solidFill>
                         <a:srgbClr val="FF9999"/>
                       </a:solidFill>
@@ -10938,7 +11221,7 @@
                       <a:headEnd type="none" w="med" len="med"/>
                       <a:tailEnd type="none" w="med" len="med"/>
                     </a:lnT>
-                    <a:lnB cmpd="sng" algn="ctr" cap="flat" w="38100">
+                    <a:lnB w="38100" cap="flat" cmpd="sng" algn="ctr">
                       <a:solidFill>
                         <a:srgbClr val="FF9999"/>
                       </a:solidFill>
@@ -10952,6 +11235,11 @@
                     </a:solidFill>
                   </a:tcPr>
                 </a:tc>
+                <a:extLst>
+                  <a:ext uri="{0D108BD9-81ED-4DB2-BD59-A6C34878D82A}">
+                    <a16:rowId xmlns:a16="http://schemas.microsoft.com/office/drawing/2014/main" val="10002"/>
+                  </a:ext>
+                </a:extLst>
               </a:tr>
             </a:tbl>
           </a:graphicData>
@@ -10959,12 +11247,12 @@
       </p:graphicFrame>
       <p:sp>
         <p:nvSpPr>
-          <p:cNvPr name="TextBox 6" id="6"/>
-          <p:cNvSpPr txBox="true"/>
+          <p:cNvPr id="6" name="TextBox 6"/>
+          <p:cNvSpPr txBox="1"/>
           <p:nvPr/>
         </p:nvSpPr>
         <p:spPr>
-          <a:xfrm rot="0">
+          <a:xfrm>
             <a:off x="428238" y="6431363"/>
             <a:ext cx="15176887" cy="571500"/>
           </a:xfrm>
@@ -10973,7 +11261,7 @@
           </a:prstGeom>
         </p:spPr>
         <p:txBody>
-          <a:bodyPr anchor="t" rtlCol="false" tIns="0" lIns="0" bIns="0" rIns="0">
+          <a:bodyPr lIns="0" tIns="0" rIns="0" bIns="0" rtlCol="0" anchor="t">
             <a:spAutoFit/>
           </a:bodyPr>
           <a:lstStyle/>
@@ -10984,7 +11272,7 @@
               </a:lnSpc>
             </a:pPr>
             <a:r>
-              <a:rPr lang="en-US" sz="3800" b="true">
+              <a:rPr lang="en-US" sz="3800" b="1">
                 <a:solidFill>
                   <a:srgbClr val="006747"/>
                 </a:solidFill>
@@ -11000,12 +11288,12 @@
       </p:sp>
       <p:sp>
         <p:nvSpPr>
-          <p:cNvPr name="TextBox 7" id="7"/>
-          <p:cNvSpPr txBox="true"/>
+          <p:cNvPr id="7" name="TextBox 7"/>
+          <p:cNvSpPr txBox="1"/>
           <p:nvPr/>
         </p:nvSpPr>
         <p:spPr>
-          <a:xfrm rot="0">
+          <a:xfrm>
             <a:off x="6170106" y="171450"/>
             <a:ext cx="6435910" cy="685800"/>
           </a:xfrm>
@@ -11014,7 +11302,7 @@
           </a:prstGeom>
         </p:spPr>
         <p:txBody>
-          <a:bodyPr anchor="t" rtlCol="false" tIns="0" lIns="0" bIns="0" rIns="0">
+          <a:bodyPr lIns="0" tIns="0" rIns="0" bIns="0" rtlCol="0" anchor="t">
             <a:spAutoFit/>
           </a:bodyPr>
           <a:lstStyle/>
@@ -11025,7 +11313,7 @@
               </a:lnSpc>
             </a:pPr>
             <a:r>
-              <a:rPr lang="en-US" sz="4500" b="true">
+              <a:rPr lang="en-US" sz="4500" b="1">
                 <a:solidFill>
                   <a:srgbClr val="006747"/>
                 </a:solidFill>
@@ -11048,7 +11336,7 @@
 </file>
 
 <file path=ppt/slides/slide8.xml><?xml version="1.0" encoding="utf-8"?>
-<p:sld xmlns:p="http://schemas.openxmlformats.org/presentationml/2006/main" xmlns:a="http://schemas.openxmlformats.org/drawingml/2006/main" xmlns:r="http://schemas.openxmlformats.org/officeDocument/2006/relationships">
+<p:sld xmlns:a="http://schemas.openxmlformats.org/drawingml/2006/main" xmlns:r="http://schemas.openxmlformats.org/officeDocument/2006/relationships" xmlns:p="http://schemas.openxmlformats.org/presentationml/2006/main">
   <p:cSld>
     <p:spTree>
       <p:nvGrpSpPr>
@@ -11066,12 +11354,12 @@
       </p:grpSpPr>
       <p:sp>
         <p:nvSpPr>
-          <p:cNvPr name="Freeform 2" id="2"/>
+          <p:cNvPr id="2" name="Freeform 2"/>
           <p:cNvSpPr/>
           <p:nvPr/>
         </p:nvSpPr>
         <p:spPr>
-          <a:xfrm flipH="false" flipV="false" rot="5400000">
+          <a:xfrm rot="5400000">
             <a:off x="4000500" y="-4000500"/>
             <a:ext cx="10287000" cy="18288000"/>
           </a:xfrm>
@@ -11080,9 +11368,9 @@
             <a:gdLst/>
             <a:ahLst/>
             <a:cxnLst/>
-            <a:rect r="r" b="b" t="t" l="l"/>
+            <a:rect l="l" t="t" r="r" b="b"/>
             <a:pathLst>
-              <a:path h="18288000" w="10287000">
+              <a:path w="10287000" h="18288000">
                 <a:moveTo>
                   <a:pt x="0" y="18288000"/>
                 </a:moveTo>
@@ -11105,19 +11393,26 @@
           <a:blipFill>
             <a:blip r:embed="rId2"/>
             <a:stretch>
-              <a:fillRect l="-12888" t="0" r="-12888" b="0"/>
+              <a:fillRect l="-12888" r="-12888"/>
             </a:stretch>
           </a:blipFill>
         </p:spPr>
+        <p:txBody>
+          <a:bodyPr/>
+          <a:lstStyle/>
+          <a:p>
+            <a:endParaRPr lang="es-ES"/>
+          </a:p>
+        </p:txBody>
       </p:sp>
       <p:sp>
         <p:nvSpPr>
-          <p:cNvPr name="Freeform 3" id="3"/>
+          <p:cNvPr id="3" name="Freeform 3"/>
           <p:cNvSpPr/>
           <p:nvPr/>
         </p:nvSpPr>
         <p:spPr>
-          <a:xfrm flipH="false" flipV="false" rot="0">
+          <a:xfrm>
             <a:off x="3568580" y="1028700"/>
             <a:ext cx="12601796" cy="9136302"/>
           </a:xfrm>
@@ -11126,9 +11421,9 @@
             <a:gdLst/>
             <a:ahLst/>
             <a:cxnLst/>
-            <a:rect r="r" b="b" t="t" l="l"/>
+            <a:rect l="l" t="t" r="r" b="b"/>
             <a:pathLst>
-              <a:path h="9136302" w="12601796">
+              <a:path w="12601796" h="9136302">
                 <a:moveTo>
                   <a:pt x="0" y="0"/>
                 </a:moveTo>
@@ -11151,19 +11446,26 @@
           <a:blipFill>
             <a:blip r:embed="rId3"/>
             <a:stretch>
-              <a:fillRect l="0" t="0" r="0" b="0"/>
+              <a:fillRect/>
             </a:stretch>
           </a:blipFill>
         </p:spPr>
+        <p:txBody>
+          <a:bodyPr/>
+          <a:lstStyle/>
+          <a:p>
+            <a:endParaRPr lang="es-ES"/>
+          </a:p>
+        </p:txBody>
       </p:sp>
       <p:sp>
         <p:nvSpPr>
-          <p:cNvPr name="TextBox 4" id="4"/>
-          <p:cNvSpPr txBox="true"/>
+          <p:cNvPr id="4" name="TextBox 4"/>
+          <p:cNvSpPr txBox="1"/>
           <p:nvPr/>
         </p:nvSpPr>
         <p:spPr>
-          <a:xfrm rot="0">
+          <a:xfrm>
             <a:off x="5926045" y="209550"/>
             <a:ext cx="6435910" cy="819150"/>
           </a:xfrm>
@@ -11172,7 +11474,7 @@
           </a:prstGeom>
         </p:spPr>
         <p:txBody>
-          <a:bodyPr anchor="t" rtlCol="false" tIns="0" lIns="0" bIns="0" rIns="0">
+          <a:bodyPr lIns="0" tIns="0" rIns="0" bIns="0" rtlCol="0" anchor="t">
             <a:spAutoFit/>
           </a:bodyPr>
           <a:lstStyle/>
@@ -11183,7 +11485,7 @@
               </a:lnSpc>
             </a:pPr>
             <a:r>
-              <a:rPr lang="en-US" sz="5400" b="true">
+              <a:rPr lang="en-US" sz="5400" b="1">
                 <a:solidFill>
                   <a:srgbClr val="006747"/>
                 </a:solidFill>
@@ -11206,13 +11508,14 @@
 </file>
 
 <file path=ppt/slides/slide9.xml><?xml version="1.0" encoding="utf-8"?>
-<p:sld xmlns:p="http://schemas.openxmlformats.org/presentationml/2006/main" xmlns:a="http://schemas.openxmlformats.org/drawingml/2006/main" xmlns:r="http://schemas.openxmlformats.org/officeDocument/2006/relationships">
+<p:sld xmlns:a="http://schemas.openxmlformats.org/drawingml/2006/main" xmlns:r="http://schemas.openxmlformats.org/officeDocument/2006/relationships" xmlns:p="http://schemas.openxmlformats.org/presentationml/2006/main">
   <p:cSld>
     <p:bg>
       <p:bgPr>
         <a:solidFill>
           <a:srgbClr val="C8E2CC"/>
         </a:solidFill>
+        <a:effectLst/>
       </p:bgPr>
     </p:bg>
     <p:spTree>
@@ -11231,12 +11534,12 @@
       </p:grpSpPr>
       <p:grpSp>
         <p:nvGrpSpPr>
-          <p:cNvPr name="Group 2" id="2"/>
+          <p:cNvPr id="2" name="Group 2"/>
           <p:cNvGrpSpPr/>
           <p:nvPr/>
         </p:nvGrpSpPr>
         <p:grpSpPr>
-          <a:xfrm rot="0">
+          <a:xfrm>
             <a:off x="-3774619" y="-1138445"/>
             <a:ext cx="11062159" cy="11425445"/>
             <a:chOff x="0" y="0"/>
@@ -11245,12 +11548,12 @@
         </p:grpSpPr>
         <p:sp>
           <p:nvSpPr>
-            <p:cNvPr name="Freeform 3" id="3"/>
+            <p:cNvPr id="3" name="Freeform 3"/>
             <p:cNvSpPr/>
             <p:nvPr/>
           </p:nvSpPr>
           <p:spPr>
-            <a:xfrm flipH="false" flipV="false" rot="0">
+            <a:xfrm>
               <a:off x="0" y="0"/>
               <a:ext cx="1044796" cy="1079108"/>
             </a:xfrm>
@@ -11259,9 +11562,9 @@
               <a:gdLst/>
               <a:ahLst/>
               <a:cxnLst/>
-              <a:rect r="r" b="b" t="t" l="l"/>
+              <a:rect l="l" t="t" r="r" b="b"/>
               <a:pathLst>
-                <a:path h="1079108" w="1044796">
+                <a:path w="1044796" h="1079108">
                   <a:moveTo>
                     <a:pt x="522398" y="0"/>
                   </a:moveTo>
@@ -11295,11 +11598,18 @@
               </a:srgbClr>
             </a:solidFill>
           </p:spPr>
+          <p:txBody>
+            <a:bodyPr/>
+            <a:lstStyle/>
+            <a:p>
+              <a:endParaRPr lang="es-ES"/>
+            </a:p>
+          </p:txBody>
         </p:sp>
         <p:sp>
           <p:nvSpPr>
-            <p:cNvPr name="TextBox 4" id="4"/>
-            <p:cNvSpPr txBox="true"/>
+            <p:cNvPr id="4" name="TextBox 4"/>
+            <p:cNvSpPr txBox="1"/>
             <p:nvPr/>
           </p:nvSpPr>
           <p:spPr>
@@ -11312,7 +11622,7 @@
             </a:prstGeom>
           </p:spPr>
           <p:txBody>
-            <a:bodyPr anchor="ctr" rtlCol="false" tIns="50800" lIns="50800" bIns="50800" rIns="50800"/>
+            <a:bodyPr lIns="50800" tIns="50800" rIns="50800" bIns="50800" rtlCol="0" anchor="ctr"/>
             <a:lstStyle/>
             <a:p>
               <a:pPr algn="ctr">
@@ -11320,18 +11630,19 @@
                   <a:spcPts val="2659"/>
                 </a:lnSpc>
               </a:pPr>
+              <a:endParaRPr/>
             </a:p>
           </p:txBody>
         </p:sp>
       </p:grpSp>
       <p:sp>
         <p:nvSpPr>
-          <p:cNvPr name="Freeform 5" id="5"/>
+          <p:cNvPr id="5" name="Freeform 5"/>
           <p:cNvSpPr/>
           <p:nvPr/>
         </p:nvSpPr>
         <p:spPr>
-          <a:xfrm flipH="false" flipV="false" rot="0">
+          <a:xfrm>
             <a:off x="241050" y="2062614"/>
             <a:ext cx="6397421" cy="5023327"/>
           </a:xfrm>
@@ -11340,9 +11651,9 @@
             <a:gdLst/>
             <a:ahLst/>
             <a:cxnLst/>
-            <a:rect r="r" b="b" t="t" l="l"/>
+            <a:rect l="l" t="t" r="r" b="b"/>
             <a:pathLst>
-              <a:path h="5023327" w="6397421">
+              <a:path w="6397421" h="5023327">
                 <a:moveTo>
                   <a:pt x="0" y="0"/>
                 </a:moveTo>
@@ -11365,19 +11676,26 @@
           <a:blipFill>
             <a:blip r:embed="rId2"/>
             <a:stretch>
-              <a:fillRect l="0" t="0" r="0" b="0"/>
+              <a:fillRect/>
             </a:stretch>
           </a:blipFill>
         </p:spPr>
+        <p:txBody>
+          <a:bodyPr/>
+          <a:lstStyle/>
+          <a:p>
+            <a:endParaRPr lang="es-ES"/>
+          </a:p>
+        </p:txBody>
       </p:sp>
       <p:sp>
         <p:nvSpPr>
-          <p:cNvPr name="Freeform 6" id="6"/>
+          <p:cNvPr id="6" name="Freeform 6"/>
           <p:cNvSpPr/>
           <p:nvPr/>
         </p:nvSpPr>
         <p:spPr>
-          <a:xfrm flipH="false" flipV="false" rot="0">
+          <a:xfrm>
             <a:off x="10021736" y="8032532"/>
             <a:ext cx="7737381" cy="1843955"/>
           </a:xfrm>
@@ -11386,9 +11704,9 @@
             <a:gdLst/>
             <a:ahLst/>
             <a:cxnLst/>
-            <a:rect r="r" b="b" t="t" l="l"/>
+            <a:rect l="l" t="t" r="r" b="b"/>
             <a:pathLst>
-              <a:path h="1843955" w="7737381">
+              <a:path w="7737381" h="1843955">
                 <a:moveTo>
                   <a:pt x="0" y="0"/>
                 </a:moveTo>
@@ -11411,19 +11729,26 @@
           <a:blipFill>
             <a:blip r:embed="rId3"/>
             <a:stretch>
-              <a:fillRect l="0" t="0" r="0" b="0"/>
+              <a:fillRect/>
             </a:stretch>
           </a:blipFill>
         </p:spPr>
+        <p:txBody>
+          <a:bodyPr/>
+          <a:lstStyle/>
+          <a:p>
+            <a:endParaRPr lang="es-ES"/>
+          </a:p>
+        </p:txBody>
       </p:sp>
       <p:sp>
         <p:nvSpPr>
-          <p:cNvPr name="TextBox 7" id="7"/>
-          <p:cNvSpPr txBox="true"/>
+          <p:cNvPr id="7" name="TextBox 7"/>
+          <p:cNvSpPr txBox="1"/>
           <p:nvPr/>
         </p:nvSpPr>
         <p:spPr>
-          <a:xfrm rot="0">
+          <a:xfrm>
             <a:off x="8412848" y="4574277"/>
             <a:ext cx="8648195" cy="1171575"/>
           </a:xfrm>
@@ -11432,7 +11757,7 @@
           </a:prstGeom>
         </p:spPr>
         <p:txBody>
-          <a:bodyPr anchor="t" rtlCol="false" tIns="0" lIns="0" bIns="0" rIns="0">
+          <a:bodyPr lIns="0" tIns="0" rIns="0" bIns="0" rtlCol="0" anchor="t">
             <a:spAutoFit/>
           </a:bodyPr>
           <a:lstStyle/>
@@ -11459,12 +11784,12 @@
       </p:sp>
       <p:sp>
         <p:nvSpPr>
-          <p:cNvPr name="TextBox 8" id="8"/>
-          <p:cNvSpPr txBox="true"/>
+          <p:cNvPr id="8" name="TextBox 8"/>
+          <p:cNvSpPr txBox="1"/>
           <p:nvPr/>
         </p:nvSpPr>
         <p:spPr>
-          <a:xfrm rot="0">
+          <a:xfrm>
             <a:off x="1210330" y="1491114"/>
             <a:ext cx="5054763" cy="1143000"/>
           </a:xfrm>
@@ -11473,7 +11798,7 @@
           </a:prstGeom>
         </p:spPr>
         <p:txBody>
-          <a:bodyPr anchor="t" rtlCol="false" tIns="0" lIns="0" bIns="0" rIns="0">
+          <a:bodyPr lIns="0" tIns="0" rIns="0" bIns="0" rtlCol="0" anchor="t">
             <a:spAutoFit/>
           </a:bodyPr>
           <a:lstStyle/>
@@ -11487,7 +11812,7 @@
               </a:spcBef>
             </a:pPr>
             <a:r>
-              <a:rPr lang="en-US" b="true" sz="3800">
+              <a:rPr lang="en-US" sz="3800" b="1">
                 <a:solidFill>
                   <a:srgbClr val="517A71"/>
                 </a:solidFill>
